--- a/presentation/Presentation_Quiz.pptx
+++ b/presentation/Presentation_Quiz.pptx
@@ -4,20 +4,21 @@
   <p:sldMasterIdLst>
     <p:sldMasterId id="2147483648" r:id="rId1"/>
   </p:sldMasterIdLst>
+  <p:notesMasterIdLst>
+    <p:notesMasterId r:id="rId11"/>
+  </p:notesMasterIdLst>
   <p:sldIdLst>
     <p:sldId id="256" r:id="rId2"/>
     <p:sldId id="257" r:id="rId3"/>
     <p:sldId id="258" r:id="rId4"/>
     <p:sldId id="259" r:id="rId5"/>
-    <p:sldId id="260" r:id="rId6"/>
-    <p:sldId id="261" r:id="rId7"/>
-    <p:sldId id="262" r:id="rId8"/>
-    <p:sldId id="263" r:id="rId9"/>
+    <p:sldId id="264" r:id="rId6"/>
+    <p:sldId id="260" r:id="rId7"/>
+    <p:sldId id="261" r:id="rId8"/>
+    <p:sldId id="262" r:id="rId9"/>
+    <p:sldId id="263" r:id="rId10"/>
   </p:sldIdLst>
-  <p:notesMasterIdLst>
-    <p:notesMasterId r:id="rId10"/>
-  </p:notesMasterIdLst>
-  <p:sldSz cx="9144000" cy="5143500"/>
+  <p:sldSz cx="9144000" cy="5143500" type="screen16x9"/>
   <p:notesSz cx="5143500" cy="9144000"/>
   <p:defaultTextStyle>
     <a:lvl1pPr marL="0" algn="l" defTabSz="914400" rtl="0" eaLnBrk="1" latinLnBrk="0" hangingPunct="1">
@@ -111,6 +112,11 @@
       </a:defRPr>
     </a:lvl9pPr>
   </p:defaultTextStyle>
+  <p:extLst>
+    <p:ext uri="{EFAFB233-063F-42B5-8137-9DF3F51BA10A}">
+      <p15:sldGuideLst xmlns:p15="http://schemas.microsoft.com/office/powerpoint/2012/main"/>
+    </p:ext>
+  </p:extLst>
 </p:presentation>
 </file>
 
@@ -136,234 +142,10 @@
           <a:chExt cx="0" cy="0"/>
         </a:xfrm>
       </p:grpSpPr>
-      <p:sp>
-        <p:nvSpPr>
-          <p:cNvPr id="2" name="Header Placeholder 1"/>
-          <p:cNvSpPr>
-            <a:spLocks noGrp="1"/>
-          </p:cNvSpPr>
-          <p:nvPr>
-            <p:ph type="hdr" sz="quarter"/>
-          </p:nvPr>
-        </p:nvSpPr>
-        <p:spPr>
-          <a:xfrm>
-            <a:off x="0" y="0"/>
-            <a:ext cx="2971800" cy="458788"/>
-          </a:xfrm>
-          <a:prstGeom prst="rect">
-            <a:avLst/>
-          </a:prstGeom>
-        </p:spPr>
-        <p:txBody>
-          <a:bodyPr vert="horz" lIns="91440" tIns="45720" rIns="91440" bIns="45720" rtlCol="0"/>
-          <a:lstStyle>
-            <a:lvl1pPr algn="l">
-              <a:defRPr sz="1200"/>
-            </a:lvl1pPr>
-          </a:lstStyle>
-          <a:p>
-            <a:endParaRPr lang="en-US"/>
-          </a:p>
-        </p:txBody>
-      </p:sp>
-      <p:sp>
-        <p:nvSpPr>
-          <p:cNvPr id="3" name="Date Placeholder 2"/>
-          <p:cNvSpPr>
-            <a:spLocks noGrp="1"/>
-          </p:cNvSpPr>
-          <p:nvPr>
-            <p:ph type="dt" idx="1"/>
-          </p:nvPr>
-        </p:nvSpPr>
-        <p:spPr>
-          <a:xfrm>
-            <a:off x="3884613" y="0"/>
-            <a:ext cx="2971800" cy="458788"/>
-          </a:xfrm>
-          <a:prstGeom prst="rect">
-            <a:avLst/>
-          </a:prstGeom>
-        </p:spPr>
-        <p:txBody>
-          <a:bodyPr vert="horz" lIns="91440" tIns="45720" rIns="91440" bIns="45720" rtlCol="0"/>
-          <a:lstStyle>
-            <a:lvl1pPr algn="r">
-              <a:defRPr sz="1200"/>
-            </a:lvl1pPr>
-          </a:lstStyle>
-          <a:p>
-            <a:fld id="{5282F153-3F37-0F45-9E97-73ACFA13230C}" type="datetimeFigureOut">
-              <a:rPr lang="en-US"/>
-              <a:t>7/23/19</a:t>
-            </a:fld>
-            <a:endParaRPr lang="en-US"/>
-          </a:p>
-        </p:txBody>
-      </p:sp>
-      <p:sp>
-        <p:nvSpPr>
-          <p:cNvPr id="4" name="Slide Image Placeholder 3"/>
-          <p:cNvSpPr>
-            <a:spLocks noGrp="1" noRot="1" noChangeAspect="1"/>
-          </p:cNvSpPr>
-          <p:nvPr>
-            <p:ph type="sldImg" idx="2"/>
-          </p:nvPr>
-        </p:nvSpPr>
-        <p:spPr>
-          <a:xfrm>
-            <a:off x="685800" y="1143000"/>
-            <a:ext cx="5486400" cy="3086100"/>
-          </a:xfrm>
-          <a:prstGeom prst="rect">
-            <a:avLst/>
-          </a:prstGeom>
-          <a:noFill/>
-          <a:ln w="12700">
-            <a:solidFill>
-              <a:prstClr val="black"/>
-            </a:solidFill>
-          </a:ln>
-        </p:spPr>
-        <p:txBody>
-          <a:bodyPr vert="horz" lIns="91440" tIns="45720" rIns="91440" bIns="45720" rtlCol="0" anchor="ctr"/>
-          <a:lstStyle/>
-          <a:p>
-            <a:endParaRPr lang="en-US"/>
-          </a:p>
-        </p:txBody>
-      </p:sp>
-      <p:sp>
-        <p:nvSpPr>
-          <p:cNvPr id="5" name="Notes Placeholder 4"/>
-          <p:cNvSpPr>
-            <a:spLocks noGrp="1"/>
-          </p:cNvSpPr>
-          <p:nvPr>
-            <p:ph type="body" sz="quarter" idx="3"/>
-          </p:nvPr>
-        </p:nvSpPr>
-        <p:spPr>
-          <a:xfrm>
-            <a:off x="685800" y="4400550"/>
-            <a:ext cx="5486400" cy="3600450"/>
-          </a:xfrm>
-          <a:prstGeom prst="rect">
-            <a:avLst/>
-          </a:prstGeom>
-        </p:spPr>
-        <p:txBody>
-          <a:bodyPr vert="horz" lIns="91440" tIns="45720" rIns="91440" bIns="45720" rtlCol="0"/>
-          <a:lstStyle/>
-          <a:p>
-            <a:pPr lvl="0"/>
-            <a:r>
-              <a:rPr lang="en-US"/>
-              <a:t>Click to edit Master text styles</a:t>
-            </a:r>
-          </a:p>
-          <a:p>
-            <a:pPr lvl="1"/>
-            <a:r>
-              <a:rPr lang="en-US"/>
-              <a:t>Second level</a:t>
-            </a:r>
-          </a:p>
-          <a:p>
-            <a:pPr lvl="2"/>
-            <a:r>
-              <a:rPr lang="en-US"/>
-              <a:t>Third level</a:t>
-            </a:r>
-          </a:p>
-          <a:p>
-            <a:pPr lvl="3"/>
-            <a:r>
-              <a:rPr lang="en-US"/>
-              <a:t>Fourth level</a:t>
-            </a:r>
-          </a:p>
-          <a:p>
-            <a:pPr lvl="4"/>
-            <a:r>
-              <a:rPr lang="en-US"/>
-              <a:t>Fifth level</a:t>
-            </a:r>
-          </a:p>
-        </p:txBody>
-      </p:sp>
-      <p:sp>
-        <p:nvSpPr>
-          <p:cNvPr id="6" name="Footer Placeholder 5"/>
-          <p:cNvSpPr>
-            <a:spLocks noGrp="1"/>
-          </p:cNvSpPr>
-          <p:nvPr>
-            <p:ph type="ftr" sz="quarter" idx="4"/>
-          </p:nvPr>
-        </p:nvSpPr>
-        <p:spPr>
-          <a:xfrm>
-            <a:off x="0" y="8685213"/>
-            <a:ext cx="2971800" cy="458787"/>
-          </a:xfrm>
-          <a:prstGeom prst="rect">
-            <a:avLst/>
-          </a:prstGeom>
-        </p:spPr>
-        <p:txBody>
-          <a:bodyPr vert="horz" lIns="91440" tIns="45720" rIns="91440" bIns="45720" rtlCol="0" anchor="b"/>
-          <a:lstStyle>
-            <a:lvl1pPr algn="l">
-              <a:defRPr sz="1200"/>
-            </a:lvl1pPr>
-          </a:lstStyle>
-          <a:p>
-            <a:endParaRPr lang="en-US"/>
-          </a:p>
-        </p:txBody>
-      </p:sp>
-      <p:sp>
-        <p:nvSpPr>
-          <p:cNvPr id="7" name="Slide Number Placeholder 6"/>
-          <p:cNvSpPr>
-            <a:spLocks noGrp="1"/>
-          </p:cNvSpPr>
-          <p:nvPr>
-            <p:ph type="sldNum" sz="quarter" idx="5"/>
-          </p:nvPr>
-        </p:nvSpPr>
-        <p:spPr>
-          <a:xfrm>
-            <a:off x="3884613" y="8685213"/>
-            <a:ext cx="2971800" cy="458787"/>
-          </a:xfrm>
-          <a:prstGeom prst="rect">
-            <a:avLst/>
-          </a:prstGeom>
-        </p:spPr>
-        <p:txBody>
-          <a:bodyPr vert="horz" lIns="91440" tIns="45720" rIns="91440" bIns="45720" rtlCol="0" anchor="b"/>
-          <a:lstStyle>
-            <a:lvl1pPr algn="r">
-              <a:defRPr sz="1200"/>
-            </a:lvl1pPr>
-          </a:lstStyle>
-          <a:p>
-            <a:fld id="{CE5E9CC1-C706-0F49-92D6-E571CC5EEA8F}" type="slidenum">
-              <a:rPr lang="en-US"/>
-              <a:t>‹#›</a:t>
-            </a:fld>
-            <a:endParaRPr lang="en-US"/>
-          </a:p>
-        </p:txBody>
-      </p:sp>
     </p:spTree>
     <p:extLst>
       <p:ext uri="{BB962C8B-B14F-4D97-AF65-F5344CB8AC3E}">
-        <p14:creationId xmlns:p14="http://schemas.microsoft.com/office/powerpoint/2010/main" val="1024086991"/>
+        <p14:creationId xmlns:p14="http://schemas.microsoft.com/office/powerpoint/2010/main" val="2331579901"/>
       </p:ext>
     </p:extLst>
   </p:cSld>
@@ -507,10 +289,6 @@
           <a:bodyPr/>
           <a:lstStyle/>
           <a:p>
-            <a:r>
-              <a:rPr lang="en-US" dirty="0"/>
-              <a:t/>
-            </a:r>
             <a:endParaRPr lang="en-US" dirty="0"/>
           </a:p>
         </p:txBody>
@@ -595,10 +373,6 @@
           <a:bodyPr/>
           <a:lstStyle/>
           <a:p>
-            <a:r>
-              <a:rPr lang="en-US" dirty="0"/>
-              <a:t/>
-            </a:r>
             <a:endParaRPr lang="en-US" dirty="0"/>
           </a:p>
         </p:txBody>
@@ -683,10 +457,6 @@
           <a:bodyPr/>
           <a:lstStyle/>
           <a:p>
-            <a:r>
-              <a:rPr lang="en-US" dirty="0"/>
-              <a:t/>
-            </a:r>
             <a:endParaRPr lang="en-US" dirty="0"/>
           </a:p>
         </p:txBody>
@@ -771,10 +541,6 @@
           <a:bodyPr/>
           <a:lstStyle/>
           <a:p>
-            <a:r>
-              <a:rPr lang="en-US" dirty="0"/>
-              <a:t/>
-            </a:r>
             <a:endParaRPr lang="en-US" dirty="0"/>
           </a:p>
         </p:txBody>
@@ -859,10 +625,6 @@
           <a:bodyPr/>
           <a:lstStyle/>
           <a:p>
-            <a:r>
-              <a:rPr lang="en-US" dirty="0"/>
-              <a:t/>
-            </a:r>
             <a:endParaRPr lang="en-US" dirty="0"/>
           </a:p>
         </p:txBody>
@@ -884,7 +646,7 @@
           <a:p>
             <a:fld id="{F7021451-1387-4CA6-816F-3879F97B5CBC}" type="slidenum">
               <a:rPr lang="en-US"/>
-              <a:t>5</a:t>
+              <a:t>6</a:t>
             </a:fld>
             <a:endParaRPr lang="en-US"/>
           </a:p>
@@ -947,10 +709,6 @@
           <a:bodyPr/>
           <a:lstStyle/>
           <a:p>
-            <a:r>
-              <a:rPr lang="en-US" dirty="0"/>
-              <a:t/>
-            </a:r>
             <a:endParaRPr lang="en-US" dirty="0"/>
           </a:p>
         </p:txBody>
@@ -972,7 +730,7 @@
           <a:p>
             <a:fld id="{F7021451-1387-4CA6-816F-3879F97B5CBC}" type="slidenum">
               <a:rPr lang="en-US"/>
-              <a:t>6</a:t>
+              <a:t>7</a:t>
             </a:fld>
             <a:endParaRPr lang="en-US"/>
           </a:p>
@@ -1035,10 +793,6 @@
           <a:bodyPr/>
           <a:lstStyle/>
           <a:p>
-            <a:r>
-              <a:rPr lang="en-US" dirty="0"/>
-              <a:t/>
-            </a:r>
             <a:endParaRPr lang="en-US" dirty="0"/>
           </a:p>
         </p:txBody>
@@ -1060,7 +814,7 @@
           <a:p>
             <a:fld id="{F7021451-1387-4CA6-816F-3879F97B5CBC}" type="slidenum">
               <a:rPr lang="en-US"/>
-              <a:t>7</a:t>
+              <a:t>8</a:t>
             </a:fld>
             <a:endParaRPr lang="en-US"/>
           </a:p>
@@ -1123,10 +877,6 @@
           <a:bodyPr/>
           <a:lstStyle/>
           <a:p>
-            <a:r>
-              <a:rPr lang="en-US" dirty="0"/>
-              <a:t/>
-            </a:r>
             <a:endParaRPr lang="en-US" dirty="0"/>
           </a:p>
         </p:txBody>
@@ -1148,7 +898,7 @@
           <a:p>
             <a:fld id="{F7021451-1387-4CA6-816F-3879F97B5CBC}" type="slidenum">
               <a:rPr lang="en-US"/>
-              <a:t>8</a:t>
+              <a:t>9</a:t>
             </a:fld>
             <a:endParaRPr lang="en-US"/>
           </a:p>
@@ -1200,6 +950,11 @@
 <file path=ppt/slideMasters/slideMaster1.xml><?xml version="1.0" encoding="utf-8"?>
 <p:sldMaster xmlns:a="http://schemas.openxmlformats.org/drawingml/2006/main" xmlns:r="http://schemas.openxmlformats.org/officeDocument/2006/relationships" xmlns:p="http://schemas.openxmlformats.org/presentationml/2006/main">
   <p:cSld>
+    <p:bg>
+      <p:bgRef idx="1001">
+        <a:schemeClr val="bg1"/>
+      </p:bgRef>
+    </p:bg>
     <p:spTree>
       <p:nvGrpSpPr>
         <p:cNvPr id="1" name=""/>
@@ -1482,6 +1237,7 @@
         <a:solidFill>
           <a:srgbClr val="1A237E"/>
         </a:solidFill>
+        <a:effectLst/>
       </p:bgPr>
     </p:bg>
     <p:spTree>
@@ -1522,6 +1278,13 @@
             <a:prstDash val="solid"/>
           </a:ln>
         </p:spPr>
+        <p:txBody>
+          <a:bodyPr/>
+          <a:lstStyle/>
+          <a:p>
+            <a:endParaRPr lang="fr-FR"/>
+          </a:p>
+        </p:txBody>
       </p:sp>
       <p:sp>
         <p:nvSpPr>
@@ -1549,17 +1312,24 @@
             <a:prstDash val="solid"/>
           </a:ln>
         </p:spPr>
+        <p:txBody>
+          <a:bodyPr/>
+          <a:lstStyle/>
+          <a:p>
+            <a:endParaRPr lang="fr-FR"/>
+          </a:p>
+        </p:txBody>
       </p:sp>
       <p:pic>
         <p:nvPicPr>
-          <p:cNvPr id="4" name="Image 0" descr="preencoded.png">    </p:cNvPr>
+          <p:cNvPr id="4" name="Image 0" descr="preencoded.png"/>
           <p:cNvPicPr>
             <a:picLocks noChangeAspect="1"/>
           </p:cNvPicPr>
           <p:nvPr/>
         </p:nvPicPr>
         <p:blipFill>
-          <a:blip r:embed="rId1"/>
+          <a:blip r:embed="rId3"/>
           <a:stretch>
             <a:fillRect/>
           </a:stretch>
@@ -1595,7 +1365,7 @@
           <a:bodyPr wrap="square" lIns="0" tIns="0" rIns="0" bIns="0" rtlCol="0" anchor="ctr"/>
           <a:lstStyle/>
           <a:p>
-            <a:pPr algn="l" indent="0" marL="0">
+            <a:pPr marL="0" indent="0" algn="l">
               <a:buNone/>
             </a:pPr>
             <a:r>
@@ -1634,7 +1404,7 @@
           <a:bodyPr wrap="square" lIns="0" tIns="0" rIns="0" bIns="0" rtlCol="0" anchor="ctr"/>
           <a:lstStyle/>
           <a:p>
-            <a:pPr algn="l" indent="0" marL="0">
+            <a:pPr marL="0" indent="0" algn="l">
               <a:buNone/>
             </a:pPr>
             <a:r>
@@ -1676,6 +1446,13 @@
             <a:prstDash val="solid"/>
           </a:ln>
         </p:spPr>
+        <p:txBody>
+          <a:bodyPr/>
+          <a:lstStyle/>
+          <a:p>
+            <a:endParaRPr lang="fr-FR"/>
+          </a:p>
+        </p:txBody>
       </p:sp>
       <p:sp>
         <p:nvSpPr>
@@ -1698,7 +1475,7 @@
           <a:bodyPr wrap="square" lIns="0" tIns="0" rIns="0" bIns="0" rtlCol="0" anchor="ctr"/>
           <a:lstStyle/>
           <a:p>
-            <a:pPr algn="l" indent="0" marL="0">
+            <a:pPr marL="0" indent="0" algn="l">
               <a:buNone/>
             </a:pPr>
             <a:r>
@@ -1732,6 +1509,7 @@
         <a:solidFill>
           <a:srgbClr val="F0F4FF"/>
         </a:solidFill>
+        <a:effectLst/>
       </p:bgPr>
     </p:bg>
     <p:spTree>
@@ -1772,6 +1550,13 @@
             <a:prstDash val="solid"/>
           </a:ln>
         </p:spPr>
+        <p:txBody>
+          <a:bodyPr/>
+          <a:lstStyle/>
+          <a:p>
+            <a:endParaRPr lang="fr-FR"/>
+          </a:p>
+        </p:txBody>
       </p:sp>
       <p:sp>
         <p:nvSpPr>
@@ -1794,7 +1579,7 @@
           <a:bodyPr wrap="square" lIns="0" tIns="0" rIns="0" bIns="0" rtlCol="0" anchor="ctr"/>
           <a:lstStyle/>
           <a:p>
-            <a:pPr algn="l" indent="0" marL="0">
+            <a:pPr marL="0" indent="0" algn="l">
               <a:buNone/>
             </a:pPr>
             <a:r>
@@ -1833,13 +1618,20 @@
           </a:solidFill>
           <a:ln/>
           <a:effectLst>
-            <a:outerShdw sx="100000" sy="100000" kx="0" ky="0" algn="bl" rotWithShape="0" blurRad="76200" dist="25400" dir="2700000">
+            <a:outerShdw blurRad="76200" dist="25400" dir="2700000" algn="bl" rotWithShape="0">
               <a:srgbClr val="000000">
                 <a:alpha val="9000"/>
               </a:srgbClr>
             </a:outerShdw>
           </a:effectLst>
         </p:spPr>
+        <p:txBody>
+          <a:bodyPr/>
+          <a:lstStyle/>
+          <a:p>
+            <a:endParaRPr lang="fr-FR"/>
+          </a:p>
+        </p:txBody>
       </p:sp>
       <p:sp>
         <p:nvSpPr>
@@ -1867,6 +1659,13 @@
             <a:prstDash val="solid"/>
           </a:ln>
         </p:spPr>
+        <p:txBody>
+          <a:bodyPr/>
+          <a:lstStyle/>
+          <a:p>
+            <a:endParaRPr lang="fr-FR"/>
+          </a:p>
+        </p:txBody>
       </p:sp>
       <p:sp>
         <p:nvSpPr>
@@ -1892,17 +1691,24 @@
             <a:prstDash val="solid"/>
           </a:ln>
         </p:spPr>
+        <p:txBody>
+          <a:bodyPr/>
+          <a:lstStyle/>
+          <a:p>
+            <a:endParaRPr lang="fr-FR"/>
+          </a:p>
+        </p:txBody>
       </p:sp>
       <p:pic>
         <p:nvPicPr>
-          <p:cNvPr id="7" name="Image 0" descr="preencoded.png">    </p:cNvPr>
+          <p:cNvPr id="7" name="Image 0" descr="preencoded.png"/>
           <p:cNvPicPr>
             <a:picLocks noChangeAspect="1"/>
           </p:cNvPicPr>
           <p:nvPr/>
         </p:nvPicPr>
         <p:blipFill>
-          <a:blip r:embed="rId1"/>
+          <a:blip r:embed="rId3"/>
           <a:stretch>
             <a:fillRect/>
           </a:stretch>
@@ -1938,7 +1744,7 @@
           <a:bodyPr wrap="square" lIns="0" tIns="0" rIns="0" bIns="0" rtlCol="0" anchor="ctr"/>
           <a:lstStyle/>
           <a:p>
-            <a:pPr algn="ctr" indent="0" marL="0">
+            <a:pPr marL="0" indent="0" algn="ctr">
               <a:buNone/>
             </a:pPr>
             <a:r>
@@ -1977,7 +1783,7 @@
           <a:bodyPr wrap="square" lIns="0" tIns="0" rIns="0" bIns="0" rtlCol="0" anchor="ctr"/>
           <a:lstStyle/>
           <a:p>
-            <a:pPr algn="ctr" indent="0" marL="0">
+            <a:pPr marL="0" indent="0" algn="ctr">
               <a:buNone/>
             </a:pPr>
             <a:r>
@@ -1994,7 +1800,7 @@
             <a:endParaRPr lang="en-US" sz="1050" dirty="0"/>
           </a:p>
           <a:p>
-            <a:pPr algn="ctr" indent="0" marL="0">
+            <a:pPr marL="0" indent="0" algn="ctr">
               <a:buNone/>
             </a:pPr>
             <a:r>
@@ -2033,13 +1839,20 @@
           </a:solidFill>
           <a:ln/>
           <a:effectLst>
-            <a:outerShdw sx="100000" sy="100000" kx="0" ky="0" algn="bl" rotWithShape="0" blurRad="76200" dist="25400" dir="2700000">
+            <a:outerShdw blurRad="76200" dist="25400" dir="2700000" algn="bl" rotWithShape="0">
               <a:srgbClr val="000000">
                 <a:alpha val="9000"/>
               </a:srgbClr>
             </a:outerShdw>
           </a:effectLst>
         </p:spPr>
+        <p:txBody>
+          <a:bodyPr/>
+          <a:lstStyle/>
+          <a:p>
+            <a:endParaRPr lang="fr-FR"/>
+          </a:p>
+        </p:txBody>
       </p:sp>
       <p:sp>
         <p:nvSpPr>
@@ -2067,6 +1880,13 @@
             <a:prstDash val="solid"/>
           </a:ln>
         </p:spPr>
+        <p:txBody>
+          <a:bodyPr/>
+          <a:lstStyle/>
+          <a:p>
+            <a:endParaRPr lang="fr-FR"/>
+          </a:p>
+        </p:txBody>
       </p:sp>
       <p:sp>
         <p:nvSpPr>
@@ -2092,17 +1912,24 @@
             <a:prstDash val="solid"/>
           </a:ln>
         </p:spPr>
+        <p:txBody>
+          <a:bodyPr/>
+          <a:lstStyle/>
+          <a:p>
+            <a:endParaRPr lang="fr-FR"/>
+          </a:p>
+        </p:txBody>
       </p:sp>
       <p:pic>
         <p:nvPicPr>
-          <p:cNvPr id="13" name="Image 1" descr="preencoded.png">    </p:cNvPr>
+          <p:cNvPr id="13" name="Image 1" descr="preencoded.png"/>
           <p:cNvPicPr>
             <a:picLocks noChangeAspect="1"/>
           </p:cNvPicPr>
           <p:nvPr/>
         </p:nvPicPr>
         <p:blipFill>
-          <a:blip r:embed="rId2"/>
+          <a:blip r:embed="rId4"/>
           <a:stretch>
             <a:fillRect/>
           </a:stretch>
@@ -2138,7 +1965,7 @@
           <a:bodyPr wrap="square" lIns="0" tIns="0" rIns="0" bIns="0" rtlCol="0" anchor="ctr"/>
           <a:lstStyle/>
           <a:p>
-            <a:pPr algn="ctr" indent="0" marL="0">
+            <a:pPr marL="0" indent="0" algn="ctr">
               <a:buNone/>
             </a:pPr>
             <a:r>
@@ -2177,7 +2004,7 @@
           <a:bodyPr wrap="square" lIns="0" tIns="0" rIns="0" bIns="0" rtlCol="0" anchor="ctr"/>
           <a:lstStyle/>
           <a:p>
-            <a:pPr algn="ctr" indent="0" marL="0">
+            <a:pPr marL="0" indent="0" algn="ctr">
               <a:buNone/>
             </a:pPr>
             <a:r>
@@ -2194,7 +2021,7 @@
             <a:endParaRPr lang="en-US" sz="1050" dirty="0"/>
           </a:p>
           <a:p>
-            <a:pPr algn="ctr" indent="0" marL="0">
+            <a:pPr marL="0" indent="0" algn="ctr">
               <a:buNone/>
             </a:pPr>
             <a:r>
@@ -2233,13 +2060,20 @@
           </a:solidFill>
           <a:ln/>
           <a:effectLst>
-            <a:outerShdw sx="100000" sy="100000" kx="0" ky="0" algn="bl" rotWithShape="0" blurRad="76200" dist="25400" dir="2700000">
+            <a:outerShdw blurRad="76200" dist="25400" dir="2700000" algn="bl" rotWithShape="0">
               <a:srgbClr val="000000">
                 <a:alpha val="9000"/>
               </a:srgbClr>
             </a:outerShdw>
           </a:effectLst>
         </p:spPr>
+        <p:txBody>
+          <a:bodyPr/>
+          <a:lstStyle/>
+          <a:p>
+            <a:endParaRPr lang="fr-FR"/>
+          </a:p>
+        </p:txBody>
       </p:sp>
       <p:sp>
         <p:nvSpPr>
@@ -2267,6 +2101,13 @@
             <a:prstDash val="solid"/>
           </a:ln>
         </p:spPr>
+        <p:txBody>
+          <a:bodyPr/>
+          <a:lstStyle/>
+          <a:p>
+            <a:endParaRPr lang="fr-FR"/>
+          </a:p>
+        </p:txBody>
       </p:sp>
       <p:sp>
         <p:nvSpPr>
@@ -2292,17 +2133,24 @@
             <a:prstDash val="solid"/>
           </a:ln>
         </p:spPr>
+        <p:txBody>
+          <a:bodyPr/>
+          <a:lstStyle/>
+          <a:p>
+            <a:endParaRPr lang="fr-FR"/>
+          </a:p>
+        </p:txBody>
       </p:sp>
       <p:pic>
         <p:nvPicPr>
-          <p:cNvPr id="19" name="Image 2" descr="preencoded.png">    </p:cNvPr>
+          <p:cNvPr id="19" name="Image 2" descr="preencoded.png"/>
           <p:cNvPicPr>
             <a:picLocks noChangeAspect="1"/>
           </p:cNvPicPr>
           <p:nvPr/>
         </p:nvPicPr>
         <p:blipFill>
-          <a:blip r:embed="rId3"/>
+          <a:blip r:embed="rId5"/>
           <a:stretch>
             <a:fillRect/>
           </a:stretch>
@@ -2338,7 +2186,7 @@
           <a:bodyPr wrap="square" lIns="0" tIns="0" rIns="0" bIns="0" rtlCol="0" anchor="ctr"/>
           <a:lstStyle/>
           <a:p>
-            <a:pPr algn="ctr" indent="0" marL="0">
+            <a:pPr marL="0" indent="0" algn="ctr">
               <a:buNone/>
             </a:pPr>
             <a:r>
@@ -2377,7 +2225,7 @@
           <a:bodyPr wrap="square" lIns="0" tIns="0" rIns="0" bIns="0" rtlCol="0" anchor="ctr"/>
           <a:lstStyle/>
           <a:p>
-            <a:pPr algn="ctr" indent="0" marL="0">
+            <a:pPr marL="0" indent="0" algn="ctr">
               <a:buNone/>
             </a:pPr>
             <a:r>
@@ -2394,7 +2242,7 @@
             <a:endParaRPr lang="en-US" sz="1050" dirty="0"/>
           </a:p>
           <a:p>
-            <a:pPr algn="ctr" indent="0" marL="0">
+            <a:pPr marL="0" indent="0" algn="ctr">
               <a:buNone/>
             </a:pPr>
             <a:r>
@@ -2433,13 +2281,20 @@
           </a:solidFill>
           <a:ln/>
           <a:effectLst>
-            <a:outerShdw sx="100000" sy="100000" kx="0" ky="0" algn="bl" rotWithShape="0" blurRad="76200" dist="25400" dir="2700000">
+            <a:outerShdw blurRad="76200" dist="25400" dir="2700000" algn="bl" rotWithShape="0">
               <a:srgbClr val="000000">
                 <a:alpha val="9000"/>
               </a:srgbClr>
             </a:outerShdw>
           </a:effectLst>
         </p:spPr>
+        <p:txBody>
+          <a:bodyPr/>
+          <a:lstStyle/>
+          <a:p>
+            <a:endParaRPr lang="fr-FR"/>
+          </a:p>
+        </p:txBody>
       </p:sp>
       <p:sp>
         <p:nvSpPr>
@@ -2467,6 +2322,13 @@
             <a:prstDash val="solid"/>
           </a:ln>
         </p:spPr>
+        <p:txBody>
+          <a:bodyPr/>
+          <a:lstStyle/>
+          <a:p>
+            <a:endParaRPr lang="fr-FR"/>
+          </a:p>
+        </p:txBody>
       </p:sp>
       <p:sp>
         <p:nvSpPr>
@@ -2492,17 +2354,24 @@
             <a:prstDash val="solid"/>
           </a:ln>
         </p:spPr>
+        <p:txBody>
+          <a:bodyPr/>
+          <a:lstStyle/>
+          <a:p>
+            <a:endParaRPr lang="fr-FR"/>
+          </a:p>
+        </p:txBody>
       </p:sp>
       <p:pic>
         <p:nvPicPr>
-          <p:cNvPr id="25" name="Image 3" descr="preencoded.png">    </p:cNvPr>
+          <p:cNvPr id="25" name="Image 3" descr="preencoded.png"/>
           <p:cNvPicPr>
             <a:picLocks noChangeAspect="1"/>
           </p:cNvPicPr>
           <p:nvPr/>
         </p:nvPicPr>
         <p:blipFill>
-          <a:blip r:embed="rId4"/>
+          <a:blip r:embed="rId6"/>
           <a:stretch>
             <a:fillRect/>
           </a:stretch>
@@ -2538,7 +2407,7 @@
           <a:bodyPr wrap="square" lIns="0" tIns="0" rIns="0" bIns="0" rtlCol="0" anchor="ctr"/>
           <a:lstStyle/>
           <a:p>
-            <a:pPr algn="ctr" indent="0" marL="0">
+            <a:pPr marL="0" indent="0" algn="ctr">
               <a:buNone/>
             </a:pPr>
             <a:r>
@@ -2577,7 +2446,7 @@
           <a:bodyPr wrap="square" lIns="0" tIns="0" rIns="0" bIns="0" rtlCol="0" anchor="ctr"/>
           <a:lstStyle/>
           <a:p>
-            <a:pPr algn="ctr" indent="0" marL="0">
+            <a:pPr marL="0" indent="0" algn="ctr">
               <a:buNone/>
             </a:pPr>
             <a:r>
@@ -2594,7 +2463,7 @@
             <a:endParaRPr lang="en-US" sz="1050" dirty="0"/>
           </a:p>
           <a:p>
-            <a:pPr algn="ctr" indent="0" marL="0">
+            <a:pPr marL="0" indent="0" algn="ctr">
               <a:buNone/>
             </a:pPr>
             <a:r>
@@ -2633,13 +2502,20 @@
           </a:solidFill>
           <a:ln/>
           <a:effectLst>
-            <a:outerShdw sx="100000" sy="100000" kx="0" ky="0" algn="bl" rotWithShape="0" blurRad="76200" dist="25400" dir="2700000">
+            <a:outerShdw blurRad="76200" dist="25400" dir="2700000" algn="bl" rotWithShape="0">
               <a:srgbClr val="000000">
                 <a:alpha val="9000"/>
               </a:srgbClr>
             </a:outerShdw>
           </a:effectLst>
         </p:spPr>
+        <p:txBody>
+          <a:bodyPr/>
+          <a:lstStyle/>
+          <a:p>
+            <a:endParaRPr lang="fr-FR"/>
+          </a:p>
+        </p:txBody>
       </p:sp>
       <p:sp>
         <p:nvSpPr>
@@ -2667,6 +2543,13 @@
             <a:prstDash val="solid"/>
           </a:ln>
         </p:spPr>
+        <p:txBody>
+          <a:bodyPr/>
+          <a:lstStyle/>
+          <a:p>
+            <a:endParaRPr lang="fr-FR"/>
+          </a:p>
+        </p:txBody>
       </p:sp>
       <p:sp>
         <p:nvSpPr>
@@ -2692,17 +2575,24 @@
             <a:prstDash val="solid"/>
           </a:ln>
         </p:spPr>
+        <p:txBody>
+          <a:bodyPr/>
+          <a:lstStyle/>
+          <a:p>
+            <a:endParaRPr lang="fr-FR"/>
+          </a:p>
+        </p:txBody>
       </p:sp>
       <p:pic>
         <p:nvPicPr>
-          <p:cNvPr id="31" name="Image 4" descr="preencoded.png">    </p:cNvPr>
+          <p:cNvPr id="31" name="Image 4" descr="preencoded.png"/>
           <p:cNvPicPr>
             <a:picLocks noChangeAspect="1"/>
           </p:cNvPicPr>
           <p:nvPr/>
         </p:nvPicPr>
         <p:blipFill>
-          <a:blip r:embed="rId5"/>
+          <a:blip r:embed="rId7"/>
           <a:stretch>
             <a:fillRect/>
           </a:stretch>
@@ -2738,7 +2628,7 @@
           <a:bodyPr wrap="square" lIns="0" tIns="0" rIns="0" bIns="0" rtlCol="0" anchor="ctr"/>
           <a:lstStyle/>
           <a:p>
-            <a:pPr algn="ctr" indent="0" marL="0">
+            <a:pPr marL="0" indent="0" algn="ctr">
               <a:buNone/>
             </a:pPr>
             <a:r>
@@ -2777,7 +2667,7 @@
           <a:bodyPr wrap="square" lIns="0" tIns="0" rIns="0" bIns="0" rtlCol="0" anchor="ctr"/>
           <a:lstStyle/>
           <a:p>
-            <a:pPr algn="ctr" indent="0" marL="0">
+            <a:pPr marL="0" indent="0" algn="ctr">
               <a:buNone/>
             </a:pPr>
             <a:r>
@@ -2794,7 +2684,7 @@
             <a:endParaRPr lang="en-US" sz="1050" dirty="0"/>
           </a:p>
           <a:p>
-            <a:pPr algn="ctr" indent="0" marL="0">
+            <a:pPr marL="0" indent="0" algn="ctr">
               <a:buNone/>
             </a:pPr>
             <a:r>
@@ -2833,13 +2723,20 @@
           </a:solidFill>
           <a:ln/>
           <a:effectLst>
-            <a:outerShdw sx="100000" sy="100000" kx="0" ky="0" algn="bl" rotWithShape="0" blurRad="76200" dist="25400" dir="2700000">
+            <a:outerShdw blurRad="76200" dist="25400" dir="2700000" algn="bl" rotWithShape="0">
               <a:srgbClr val="000000">
                 <a:alpha val="9000"/>
               </a:srgbClr>
             </a:outerShdw>
           </a:effectLst>
         </p:spPr>
+        <p:txBody>
+          <a:bodyPr/>
+          <a:lstStyle/>
+          <a:p>
+            <a:endParaRPr lang="fr-FR"/>
+          </a:p>
+        </p:txBody>
       </p:sp>
       <p:sp>
         <p:nvSpPr>
@@ -2867,6 +2764,13 @@
             <a:prstDash val="solid"/>
           </a:ln>
         </p:spPr>
+        <p:txBody>
+          <a:bodyPr/>
+          <a:lstStyle/>
+          <a:p>
+            <a:endParaRPr lang="fr-FR"/>
+          </a:p>
+        </p:txBody>
       </p:sp>
       <p:sp>
         <p:nvSpPr>
@@ -2892,17 +2796,24 @@
             <a:prstDash val="solid"/>
           </a:ln>
         </p:spPr>
+        <p:txBody>
+          <a:bodyPr/>
+          <a:lstStyle/>
+          <a:p>
+            <a:endParaRPr lang="fr-FR"/>
+          </a:p>
+        </p:txBody>
       </p:sp>
       <p:pic>
         <p:nvPicPr>
-          <p:cNvPr id="37" name="Image 5" descr="preencoded.png">    </p:cNvPr>
+          <p:cNvPr id="37" name="Image 5" descr="preencoded.png"/>
           <p:cNvPicPr>
             <a:picLocks noChangeAspect="1"/>
           </p:cNvPicPr>
           <p:nvPr/>
         </p:nvPicPr>
         <p:blipFill>
-          <a:blip r:embed="rId6"/>
+          <a:blip r:embed="rId8"/>
           <a:stretch>
             <a:fillRect/>
           </a:stretch>
@@ -2938,7 +2849,7 @@
           <a:bodyPr wrap="square" lIns="0" tIns="0" rIns="0" bIns="0" rtlCol="0" anchor="ctr"/>
           <a:lstStyle/>
           <a:p>
-            <a:pPr algn="ctr" indent="0" marL="0">
+            <a:pPr marL="0" indent="0" algn="ctr">
               <a:buNone/>
             </a:pPr>
             <a:r>
@@ -2977,7 +2888,7 @@
           <a:bodyPr wrap="square" lIns="0" tIns="0" rIns="0" bIns="0" rtlCol="0" anchor="ctr"/>
           <a:lstStyle/>
           <a:p>
-            <a:pPr algn="ctr" indent="0" marL="0">
+            <a:pPr marL="0" indent="0" algn="ctr">
               <a:buNone/>
             </a:pPr>
             <a:r>
@@ -2994,7 +2905,7 @@
             <a:endParaRPr lang="en-US" sz="1050" dirty="0"/>
           </a:p>
           <a:p>
-            <a:pPr algn="ctr" indent="0" marL="0">
+            <a:pPr marL="0" indent="0" algn="ctr">
               <a:buNone/>
             </a:pPr>
             <a:r>
@@ -3028,6 +2939,7 @@
         <a:solidFill>
           <a:srgbClr val="0D1B2A"/>
         </a:solidFill>
+        <a:effectLst/>
       </p:bgPr>
     </p:bg>
     <p:spTree>
@@ -3068,6 +2980,13 @@
             <a:prstDash val="solid"/>
           </a:ln>
         </p:spPr>
+        <p:txBody>
+          <a:bodyPr/>
+          <a:lstStyle/>
+          <a:p>
+            <a:endParaRPr lang="fr-FR"/>
+          </a:p>
+        </p:txBody>
       </p:sp>
       <p:sp>
         <p:nvSpPr>
@@ -3090,7 +3009,7 @@
           <a:bodyPr wrap="square" lIns="0" tIns="0" rIns="0" bIns="0" rtlCol="0" anchor="ctr"/>
           <a:lstStyle/>
           <a:p>
-            <a:pPr algn="l" indent="0" marL="0">
+            <a:pPr marL="0" indent="0" algn="l">
               <a:buNone/>
             </a:pPr>
             <a:r>
@@ -3134,6 +3053,13 @@
             <a:prstDash val="solid"/>
           </a:ln>
         </p:spPr>
+        <p:txBody>
+          <a:bodyPr/>
+          <a:lstStyle/>
+          <a:p>
+            <a:endParaRPr lang="fr-FR"/>
+          </a:p>
+        </p:txBody>
       </p:sp>
       <p:sp>
         <p:nvSpPr>
@@ -3156,7 +3082,7 @@
           <a:bodyPr wrap="square" lIns="0" tIns="0" rIns="0" bIns="0" rtlCol="0" anchor="ctr"/>
           <a:lstStyle/>
           <a:p>
-            <a:pPr algn="ctr" indent="0" marL="0">
+            <a:pPr marL="0" indent="0" algn="ctr">
               <a:buNone/>
             </a:pPr>
             <a:r>
@@ -3195,7 +3121,7 @@
           <a:bodyPr wrap="square" lIns="0" tIns="0" rIns="0" bIns="0" rtlCol="0" anchor="ctr"/>
           <a:lstStyle/>
           <a:p>
-            <a:pPr algn="ctr" indent="0" marL="0">
+            <a:pPr marL="0" indent="0" algn="ctr">
               <a:buNone/>
             </a:pPr>
             <a:r>
@@ -3239,6 +3165,13 @@
             <a:prstDash val="solid"/>
           </a:ln>
         </p:spPr>
+        <p:txBody>
+          <a:bodyPr/>
+          <a:lstStyle/>
+          <a:p>
+            <a:endParaRPr lang="fr-FR"/>
+          </a:p>
+        </p:txBody>
       </p:sp>
       <p:sp>
         <p:nvSpPr>
@@ -3261,7 +3194,7 @@
           <a:bodyPr wrap="square" lIns="0" tIns="0" rIns="0" bIns="0" rtlCol="0" anchor="ctr"/>
           <a:lstStyle/>
           <a:p>
-            <a:pPr algn="ctr" indent="0" marL="0">
+            <a:pPr marL="0" indent="0" algn="ctr">
               <a:buNone/>
             </a:pPr>
             <a:r>
@@ -3300,7 +3233,7 @@
           <a:bodyPr wrap="square" lIns="0" tIns="0" rIns="0" bIns="0" rtlCol="0" anchor="ctr"/>
           <a:lstStyle/>
           <a:p>
-            <a:pPr algn="ctr" indent="0" marL="0">
+            <a:pPr marL="0" indent="0" algn="ctr">
               <a:buNone/>
             </a:pPr>
             <a:r>
@@ -3344,6 +3277,13 @@
             <a:prstDash val="solid"/>
           </a:ln>
         </p:spPr>
+        <p:txBody>
+          <a:bodyPr/>
+          <a:lstStyle/>
+          <a:p>
+            <a:endParaRPr lang="fr-FR"/>
+          </a:p>
+        </p:txBody>
       </p:sp>
       <p:sp>
         <p:nvSpPr>
@@ -3366,7 +3306,7 @@
           <a:bodyPr wrap="square" lIns="0" tIns="0" rIns="0" bIns="0" rtlCol="0" anchor="ctr"/>
           <a:lstStyle/>
           <a:p>
-            <a:pPr algn="ctr" indent="0" marL="0">
+            <a:pPr marL="0" indent="0" algn="ctr">
               <a:buNone/>
             </a:pPr>
             <a:r>
@@ -3405,7 +3345,7 @@
           <a:bodyPr wrap="square" lIns="0" tIns="0" rIns="0" bIns="0" rtlCol="0" anchor="ctr"/>
           <a:lstStyle/>
           <a:p>
-            <a:pPr algn="ctr" indent="0" marL="0">
+            <a:pPr marL="0" indent="0" algn="ctr">
               <a:buNone/>
             </a:pPr>
             <a:r>
@@ -3425,14 +3365,14 @@
       </p:sp>
       <p:pic>
         <p:nvPicPr>
-          <p:cNvPr id="13" name="Image 0" descr="preencoded.png">    </p:cNvPr>
+          <p:cNvPr id="13" name="Image 0" descr="preencoded.png"/>
           <p:cNvPicPr>
             <a:picLocks noChangeAspect="1"/>
           </p:cNvPicPr>
           <p:nvPr/>
         </p:nvPicPr>
         <p:blipFill>
-          <a:blip r:embed="rId1"/>
+          <a:blip r:embed="rId3"/>
           <a:stretch>
             <a:fillRect/>
           </a:stretch>
@@ -3449,14 +3389,14 @@
       </p:pic>
       <p:pic>
         <p:nvPicPr>
-          <p:cNvPr id="14" name="Image 1" descr="preencoded.png">    </p:cNvPr>
+          <p:cNvPr id="14" name="Image 1" descr="preencoded.png"/>
           <p:cNvPicPr>
             <a:picLocks noChangeAspect="1"/>
           </p:cNvPicPr>
           <p:nvPr/>
         </p:nvPicPr>
         <p:blipFill>
-          <a:blip r:embed="rId2"/>
+          <a:blip r:embed="rId3"/>
           <a:stretch>
             <a:fillRect/>
           </a:stretch>
@@ -3497,6 +3437,13 @@
             <a:prstDash val="solid"/>
           </a:ln>
         </p:spPr>
+        <p:txBody>
+          <a:bodyPr/>
+          <a:lstStyle/>
+          <a:p>
+            <a:endParaRPr lang="fr-FR"/>
+          </a:p>
+        </p:txBody>
       </p:sp>
       <p:sp>
         <p:nvSpPr>
@@ -3519,7 +3466,7 @@
           <a:bodyPr wrap="square" lIns="0" tIns="0" rIns="0" bIns="0" rtlCol="0" anchor="ctr"/>
           <a:lstStyle/>
           <a:p>
-            <a:pPr algn="ctr" indent="0" marL="0">
+            <a:pPr marL="0" indent="0" algn="ctr">
               <a:buNone/>
             </a:pPr>
             <a:r>
@@ -3558,7 +3505,7 @@
           <a:bodyPr wrap="square" lIns="0" tIns="0" rIns="0" bIns="0" rtlCol="0" anchor="ctr"/>
           <a:lstStyle/>
           <a:p>
-            <a:pPr algn="ctr" indent="0" marL="0">
+            <a:pPr marL="0" indent="0" algn="ctr">
               <a:buNone/>
             </a:pPr>
             <a:r>
@@ -3598,6 +3545,13 @@
             <a:prstDash val="dash"/>
           </a:ln>
         </p:spPr>
+        <p:txBody>
+          <a:bodyPr/>
+          <a:lstStyle/>
+          <a:p>
+            <a:endParaRPr lang="fr-FR"/>
+          </a:p>
+        </p:txBody>
       </p:sp>
       <p:sp>
         <p:nvSpPr>
@@ -3625,6 +3579,13 @@
             <a:prstDash val="solid"/>
           </a:ln>
         </p:spPr>
+        <p:txBody>
+          <a:bodyPr/>
+          <a:lstStyle/>
+          <a:p>
+            <a:endParaRPr lang="fr-FR"/>
+          </a:p>
+        </p:txBody>
       </p:sp>
       <p:sp>
         <p:nvSpPr>
@@ -3647,7 +3608,7 @@
           <a:bodyPr wrap="square" lIns="0" tIns="0" rIns="0" bIns="0" rtlCol="0" anchor="ctr"/>
           <a:lstStyle/>
           <a:p>
-            <a:pPr algn="ctr" indent="0" marL="0">
+            <a:pPr marL="0" indent="0" algn="ctr">
               <a:buNone/>
             </a:pPr>
             <a:r>
@@ -3681,6 +3642,7 @@
         <a:solidFill>
           <a:srgbClr val="F0F4FF"/>
         </a:solidFill>
+        <a:effectLst/>
       </p:bgPr>
     </p:bg>
     <p:spTree>
@@ -3721,231 +3683,17 @@
             <a:prstDash val="solid"/>
           </a:ln>
         </p:spPr>
+        <p:txBody>
+          <a:bodyPr/>
+          <a:lstStyle/>
+          <a:p>
+            <a:endParaRPr lang="fr-FR"/>
+          </a:p>
+        </p:txBody>
       </p:sp>
       <p:pic>
         <p:nvPicPr>
-          <p:cNvPr id="3" name="Image 0" descr="preencoded.png">    </p:cNvPr>
-          <p:cNvPicPr>
-            <a:picLocks noChangeAspect="1"/>
-          </p:cNvPicPr>
-          <p:nvPr/>
-        </p:nvPicPr>
-        <p:blipFill>
-          <a:blip r:embed="rId1"/>
-          <a:stretch>
-            <a:fillRect/>
-          </a:stretch>
-        </p:blipFill>
-        <p:spPr>
-          <a:xfrm>
-            <a:off x="182880" y="64008"/>
-            <a:ext cx="566928" cy="566928"/>
-          </a:xfrm>
-          <a:prstGeom prst="rect">
-            <a:avLst/>
-          </a:prstGeom>
-        </p:spPr>
-      </p:pic>
-      <p:sp>
-        <p:nvSpPr>
-          <p:cNvPr id="4" name="Text 1"/>
-          <p:cNvSpPr/>
-          <p:nvPr/>
-        </p:nvSpPr>
-        <p:spPr>
-          <a:xfrm>
-            <a:off x="841248" y="45720"/>
-            <a:ext cx="7955280" cy="640080"/>
-          </a:xfrm>
-          <a:prstGeom prst="rect">
-            <a:avLst/>
-          </a:prstGeom>
-          <a:noFill/>
-          <a:ln/>
-        </p:spPr>
-        <p:txBody>
-          <a:bodyPr wrap="square" lIns="0" tIns="0" rIns="0" bIns="0" rtlCol="0" anchor="ctr"/>
-          <a:lstStyle/>
-          <a:p>
-            <a:pPr algn="l" indent="0" marL="0">
-              <a:buNone/>
-            </a:pPr>
-            <a:r>
-              <a:rPr lang="en-US" sz="2600" b="1" dirty="0">
-                <a:solidFill>
-                  <a:srgbClr val="FFFFFF"/>
-                </a:solidFill>
-                <a:latin typeface="Calibri" pitchFamily="34" charset="0"/>
-                <a:ea typeface="Calibri" pitchFamily="34" charset="-122"/>
-                <a:cs typeface="Calibri" pitchFamily="34" charset="-120"/>
-              </a:rPr>
-              <a:t>React</a:t>
-            </a:r>
-            <a:endParaRPr lang="en-US" sz="2600" dirty="0"/>
-          </a:p>
-        </p:txBody>
-      </p:sp>
-      <p:sp>
-        <p:nvSpPr>
-          <p:cNvPr id="5" name="Text 2"/>
-          <p:cNvSpPr/>
-          <p:nvPr/>
-        </p:nvSpPr>
-        <p:spPr>
-          <a:xfrm>
-            <a:off x="365760" y="868680"/>
-            <a:ext cx="3749040" cy="685800"/>
-          </a:xfrm>
-          <a:prstGeom prst="rect">
-            <a:avLst/>
-          </a:prstGeom>
-          <a:noFill/>
-          <a:ln/>
-        </p:spPr>
-        <p:txBody>
-          <a:bodyPr wrap="square" lIns="0" tIns="0" rIns="0" bIns="0" rtlCol="0" anchor="ctr"/>
-          <a:lstStyle/>
-          <a:p>
-            <a:pPr algn="l" indent="0" marL="0">
-              <a:buNone/>
-            </a:pPr>
-            <a:r>
-              <a:rPr lang="en-US" sz="1200" dirty="0">
-                <a:solidFill>
-                  <a:srgbClr val="546E7A"/>
-                </a:solidFill>
-                <a:latin typeface="Calibri" pitchFamily="34" charset="0"/>
-                <a:ea typeface="Calibri" pitchFamily="34" charset="-122"/>
-                <a:cs typeface="Calibri" pitchFamily="34" charset="-120"/>
-              </a:rPr>
-              <a:t>Bibliothèque JavaScript</a:t>
-            </a:r>
-            <a:endParaRPr lang="en-US" sz="1200" dirty="0"/>
-          </a:p>
-          <a:p>
-            <a:pPr algn="l" indent="0" marL="0">
-              <a:buNone/>
-            </a:pPr>
-            <a:r>
-              <a:rPr lang="en-US" sz="1200" dirty="0">
-                <a:solidFill>
-                  <a:srgbClr val="546E7A"/>
-                </a:solidFill>
-                <a:latin typeface="Calibri" pitchFamily="34" charset="0"/>
-                <a:ea typeface="Calibri" pitchFamily="34" charset="-122"/>
-                <a:cs typeface="Calibri" pitchFamily="34" charset="-120"/>
-              </a:rPr>
-              <a:t>pour interfaces composants.</a:t>
-            </a:r>
-            <a:endParaRPr lang="en-US" sz="1200" dirty="0"/>
-          </a:p>
-        </p:txBody>
-      </p:sp>
-      <p:sp>
-        <p:nvSpPr>
-          <p:cNvPr id="6" name="Text 3"/>
-          <p:cNvSpPr/>
-          <p:nvPr/>
-        </p:nvSpPr>
-        <p:spPr>
-          <a:xfrm>
-            <a:off x="365760" y="1664208"/>
-            <a:ext cx="3749040" cy="347472"/>
-          </a:xfrm>
-          <a:prstGeom prst="rect">
-            <a:avLst/>
-          </a:prstGeom>
-          <a:noFill/>
-          <a:ln/>
-        </p:spPr>
-        <p:txBody>
-          <a:bodyPr wrap="square" lIns="0" tIns="0" rIns="0" bIns="0" rtlCol="0" anchor="ctr"/>
-          <a:lstStyle/>
-          <a:p>
-            <a:pPr indent="0" marL="0">
-              <a:buNone/>
-            </a:pPr>
-            <a:r>
-              <a:rPr lang="en-US" sz="1300" b="1" dirty="0">
-                <a:solidFill>
-                  <a:srgbClr val="2E7D32"/>
-                </a:solidFill>
-                <a:latin typeface="Calibri" pitchFamily="34" charset="0"/>
-                <a:ea typeface="Calibri" pitchFamily="34" charset="-122"/>
-                <a:cs typeface="Calibri" pitchFamily="34" charset="-120"/>
-              </a:rPr>
-              <a:t>Avantages</a:t>
-            </a:r>
-            <a:endParaRPr lang="en-US" sz="1300" dirty="0"/>
-          </a:p>
-        </p:txBody>
-      </p:sp>
-      <p:pic>
-        <p:nvPicPr>
-          <p:cNvPr id="7" name="Image 1" descr="preencoded.png">    </p:cNvPr>
-          <p:cNvPicPr>
-            <a:picLocks noChangeAspect="1"/>
-          </p:cNvPicPr>
-          <p:nvPr/>
-        </p:nvPicPr>
-        <p:blipFill>
-          <a:blip r:embed="rId2"/>
-          <a:stretch>
-            <a:fillRect/>
-          </a:stretch>
-        </p:blipFill>
-        <p:spPr>
-          <a:xfrm>
-            <a:off x="365760" y="2075688"/>
-            <a:ext cx="237744" cy="237744"/>
-          </a:xfrm>
-          <a:prstGeom prst="rect">
-            <a:avLst/>
-          </a:prstGeom>
-        </p:spPr>
-      </p:pic>
-      <p:sp>
-        <p:nvSpPr>
-          <p:cNvPr id="8" name="Text 4"/>
-          <p:cNvSpPr/>
-          <p:nvPr/>
-        </p:nvSpPr>
-        <p:spPr>
-          <a:xfrm>
-            <a:off x="676656" y="2057400"/>
-            <a:ext cx="3438144" cy="329184"/>
-          </a:xfrm>
-          <a:prstGeom prst="rect">
-            <a:avLst/>
-          </a:prstGeom>
-          <a:noFill/>
-          <a:ln/>
-        </p:spPr>
-        <p:txBody>
-          <a:bodyPr wrap="square" lIns="0" tIns="0" rIns="0" bIns="0" rtlCol="0" anchor="ctr"/>
-          <a:lstStyle/>
-          <a:p>
-            <a:pPr indent="0" marL="0">
-              <a:buNone/>
-            </a:pPr>
-            <a:r>
-              <a:rPr lang="en-US" sz="1150" dirty="0">
-                <a:solidFill>
-                  <a:srgbClr val="546E7A"/>
-                </a:solidFill>
-                <a:latin typeface="Calibri" pitchFamily="34" charset="0"/>
-                <a:ea typeface="Calibri" pitchFamily="34" charset="-122"/>
-                <a:cs typeface="Calibri" pitchFamily="34" charset="-120"/>
-              </a:rPr>
-              <a:t>DOM virtuel efficace</a:t>
-            </a:r>
-            <a:endParaRPr lang="en-US" sz="1150" dirty="0"/>
-          </a:p>
-        </p:txBody>
-      </p:sp>
-      <p:pic>
-        <p:nvPicPr>
-          <p:cNvPr id="9" name="Image 2" descr="preencoded.png">    </p:cNvPr>
+          <p:cNvPr id="3" name="Image 0" descr="preencoded.png"/>
           <p:cNvPicPr>
             <a:picLocks noChangeAspect="1"/>
           </p:cNvPicPr>
@@ -3959,14 +3707,187 @@
         </p:blipFill>
         <p:spPr>
           <a:xfrm>
-            <a:off x="365760" y="2478024"/>
-            <a:ext cx="237744" cy="237744"/>
+            <a:off x="182880" y="64008"/>
+            <a:ext cx="566928" cy="566928"/>
           </a:xfrm>
           <a:prstGeom prst="rect">
             <a:avLst/>
           </a:prstGeom>
         </p:spPr>
       </p:pic>
+      <p:sp>
+        <p:nvSpPr>
+          <p:cNvPr id="4" name="Text 1"/>
+          <p:cNvSpPr/>
+          <p:nvPr/>
+        </p:nvSpPr>
+        <p:spPr>
+          <a:xfrm>
+            <a:off x="841248" y="45720"/>
+            <a:ext cx="7955280" cy="640080"/>
+          </a:xfrm>
+          <a:prstGeom prst="rect">
+            <a:avLst/>
+          </a:prstGeom>
+          <a:noFill/>
+          <a:ln/>
+        </p:spPr>
+        <p:txBody>
+          <a:bodyPr wrap="square" lIns="0" tIns="0" rIns="0" bIns="0" rtlCol="0" anchor="ctr"/>
+          <a:lstStyle/>
+          <a:p>
+            <a:pPr marL="0" indent="0" algn="l">
+              <a:buNone/>
+            </a:pPr>
+            <a:r>
+              <a:rPr lang="en-US" sz="2600" b="1" dirty="0">
+                <a:solidFill>
+                  <a:srgbClr val="FFFFFF"/>
+                </a:solidFill>
+                <a:latin typeface="Calibri" pitchFamily="34" charset="0"/>
+                <a:ea typeface="Calibri" pitchFamily="34" charset="-122"/>
+                <a:cs typeface="Calibri" pitchFamily="34" charset="-120"/>
+              </a:rPr>
+              <a:t>React</a:t>
+            </a:r>
+            <a:endParaRPr lang="en-US" sz="2600" dirty="0"/>
+          </a:p>
+        </p:txBody>
+      </p:sp>
+      <p:sp>
+        <p:nvSpPr>
+          <p:cNvPr id="5" name="Text 2"/>
+          <p:cNvSpPr/>
+          <p:nvPr/>
+        </p:nvSpPr>
+        <p:spPr>
+          <a:xfrm>
+            <a:off x="365760" y="868680"/>
+            <a:ext cx="3749040" cy="685800"/>
+          </a:xfrm>
+          <a:prstGeom prst="rect">
+            <a:avLst/>
+          </a:prstGeom>
+          <a:noFill/>
+          <a:ln/>
+        </p:spPr>
+        <p:txBody>
+          <a:bodyPr wrap="square" lIns="0" tIns="0" rIns="0" bIns="0" rtlCol="0" anchor="ctr"/>
+          <a:lstStyle/>
+          <a:p>
+            <a:pPr marL="0" indent="0" algn="l">
+              <a:buNone/>
+            </a:pPr>
+            <a:r>
+              <a:rPr lang="en-US" sz="1200" dirty="0">
+                <a:solidFill>
+                  <a:srgbClr val="546E7A"/>
+                </a:solidFill>
+                <a:latin typeface="Calibri" pitchFamily="34" charset="0"/>
+                <a:ea typeface="Calibri" pitchFamily="34" charset="-122"/>
+                <a:cs typeface="Calibri" pitchFamily="34" charset="-120"/>
+              </a:rPr>
+              <a:t>Bibliothèque JavaScript</a:t>
+            </a:r>
+            <a:endParaRPr lang="en-US" sz="1200" dirty="0"/>
+          </a:p>
+          <a:p>
+            <a:pPr marL="0" indent="0" algn="l">
+              <a:buNone/>
+            </a:pPr>
+            <a:r>
+              <a:rPr lang="en-US" sz="1200" dirty="0">
+                <a:solidFill>
+                  <a:srgbClr val="546E7A"/>
+                </a:solidFill>
+                <a:latin typeface="Calibri" pitchFamily="34" charset="0"/>
+                <a:ea typeface="Calibri" pitchFamily="34" charset="-122"/>
+                <a:cs typeface="Calibri" pitchFamily="34" charset="-120"/>
+              </a:rPr>
+              <a:t>pour interfaces composants.</a:t>
+            </a:r>
+            <a:endParaRPr lang="en-US" sz="1200" dirty="0"/>
+          </a:p>
+        </p:txBody>
+      </p:sp>
+      <p:sp>
+        <p:nvSpPr>
+          <p:cNvPr id="6" name="Text 3"/>
+          <p:cNvSpPr/>
+          <p:nvPr/>
+        </p:nvSpPr>
+        <p:spPr>
+          <a:xfrm>
+            <a:off x="365760" y="1664208"/>
+            <a:ext cx="3749040" cy="347472"/>
+          </a:xfrm>
+          <a:prstGeom prst="rect">
+            <a:avLst/>
+          </a:prstGeom>
+          <a:noFill/>
+          <a:ln/>
+        </p:spPr>
+        <p:txBody>
+          <a:bodyPr wrap="square" lIns="0" tIns="0" rIns="0" bIns="0" rtlCol="0" anchor="ctr"/>
+          <a:lstStyle/>
+          <a:p>
+            <a:pPr marL="0" indent="0">
+              <a:buNone/>
+            </a:pPr>
+            <a:r>
+              <a:rPr lang="en-US" sz="1300" b="1" dirty="0">
+                <a:solidFill>
+                  <a:srgbClr val="2E7D32"/>
+                </a:solidFill>
+                <a:latin typeface="Calibri" pitchFamily="34" charset="0"/>
+                <a:ea typeface="Calibri" pitchFamily="34" charset="-122"/>
+                <a:cs typeface="Calibri" pitchFamily="34" charset="-120"/>
+              </a:rPr>
+              <a:t>Avantages</a:t>
+            </a:r>
+            <a:endParaRPr lang="en-US" sz="1300" dirty="0"/>
+          </a:p>
+        </p:txBody>
+      </p:sp>
+      <p:sp>
+        <p:nvSpPr>
+          <p:cNvPr id="8" name="Text 4"/>
+          <p:cNvSpPr/>
+          <p:nvPr/>
+        </p:nvSpPr>
+        <p:spPr>
+          <a:xfrm>
+            <a:off x="676656" y="2057400"/>
+            <a:ext cx="3438144" cy="329184"/>
+          </a:xfrm>
+          <a:prstGeom prst="rect">
+            <a:avLst/>
+          </a:prstGeom>
+          <a:noFill/>
+          <a:ln/>
+        </p:spPr>
+        <p:txBody>
+          <a:bodyPr wrap="square" lIns="0" tIns="0" rIns="0" bIns="0" rtlCol="0" anchor="ctr"/>
+          <a:lstStyle/>
+          <a:p>
+            <a:pPr marL="0" indent="0">
+              <a:buNone/>
+            </a:pPr>
+            <a:r>
+              <a:rPr lang="en-US" sz="1150" dirty="0">
+                <a:solidFill>
+                  <a:srgbClr val="546E7A"/>
+                </a:solidFill>
+                <a:latin typeface="Calibri" pitchFamily="34" charset="0"/>
+                <a:ea typeface="Calibri" pitchFamily="34" charset="-122"/>
+                <a:cs typeface="Calibri" pitchFamily="34" charset="-120"/>
+              </a:rPr>
+              <a:t>DOM virtuel efficace</a:t>
+            </a:r>
+            <a:endParaRPr lang="en-US" sz="1150" dirty="0"/>
+          </a:p>
+        </p:txBody>
+      </p:sp>
       <p:sp>
         <p:nvSpPr>
           <p:cNvPr id="10" name="Text 5"/>
@@ -3988,7 +3909,7 @@
           <a:bodyPr wrap="square" lIns="0" tIns="0" rIns="0" bIns="0" rtlCol="0" anchor="ctr"/>
           <a:lstStyle/>
           <a:p>
-            <a:pPr indent="0" marL="0">
+            <a:pPr marL="0" indent="0">
               <a:buNone/>
             </a:pPr>
             <a:r>
@@ -4006,30 +3927,6 @@
           </a:p>
         </p:txBody>
       </p:sp>
-      <p:pic>
-        <p:nvPicPr>
-          <p:cNvPr id="11" name="Image 3" descr="preencoded.png">    </p:cNvPr>
-          <p:cNvPicPr>
-            <a:picLocks noChangeAspect="1"/>
-          </p:cNvPicPr>
-          <p:nvPr/>
-        </p:nvPicPr>
-        <p:blipFill>
-          <a:blip r:embed="rId4"/>
-          <a:stretch>
-            <a:fillRect/>
-          </a:stretch>
-        </p:blipFill>
-        <p:spPr>
-          <a:xfrm>
-            <a:off x="365760" y="2880360"/>
-            <a:ext cx="237744" cy="237744"/>
-          </a:xfrm>
-          <a:prstGeom prst="rect">
-            <a:avLst/>
-          </a:prstGeom>
-        </p:spPr>
-      </p:pic>
       <p:sp>
         <p:nvSpPr>
           <p:cNvPr id="12" name="Text 6"/>
@@ -4051,7 +3948,7 @@
           <a:bodyPr wrap="square" lIns="0" tIns="0" rIns="0" bIns="0" rtlCol="0" anchor="ctr"/>
           <a:lstStyle/>
           <a:p>
-            <a:pPr indent="0" marL="0">
+            <a:pPr marL="0" indent="0">
               <a:buNone/>
             </a:pPr>
             <a:r>
@@ -4090,7 +3987,7 @@
           <a:bodyPr wrap="square" lIns="0" tIns="0" rIns="0" bIns="0" rtlCol="0" anchor="ctr"/>
           <a:lstStyle/>
           <a:p>
-            <a:pPr indent="0" marL="0">
+            <a:pPr marL="0" indent="0">
               <a:buNone/>
             </a:pPr>
             <a:r>
@@ -4108,30 +4005,6 @@
           </a:p>
         </p:txBody>
       </p:sp>
-      <p:pic>
-        <p:nvPicPr>
-          <p:cNvPr id="14" name="Image 4" descr="preencoded.png">    </p:cNvPr>
-          <p:cNvPicPr>
-            <a:picLocks noChangeAspect="1"/>
-          </p:cNvPicPr>
-          <p:nvPr/>
-        </p:nvPicPr>
-        <p:blipFill>
-          <a:blip r:embed="rId5"/>
-          <a:stretch>
-            <a:fillRect/>
-          </a:stretch>
-        </p:blipFill>
-        <p:spPr>
-          <a:xfrm>
-            <a:off x="365760" y="3749040"/>
-            <a:ext cx="219456" cy="219456"/>
-          </a:xfrm>
-          <a:prstGeom prst="rect">
-            <a:avLst/>
-          </a:prstGeom>
-        </p:spPr>
-      </p:pic>
       <p:sp>
         <p:nvSpPr>
           <p:cNvPr id="15" name="Text 8"/>
@@ -4153,7 +4026,7 @@
           <a:bodyPr wrap="square" lIns="0" tIns="0" rIns="0" bIns="0" rtlCol="0" anchor="ctr"/>
           <a:lstStyle/>
           <a:p>
-            <a:pPr indent="0" marL="0">
+            <a:pPr marL="0" indent="0">
               <a:buNone/>
             </a:pPr>
             <a:r>
@@ -4171,30 +4044,6 @@
           </a:p>
         </p:txBody>
       </p:sp>
-      <p:pic>
-        <p:nvPicPr>
-          <p:cNvPr id="16" name="Image 5" descr="preencoded.png">    </p:cNvPr>
-          <p:cNvPicPr>
-            <a:picLocks noChangeAspect="1"/>
-          </p:cNvPicPr>
-          <p:nvPr/>
-        </p:nvPicPr>
-        <p:blipFill>
-          <a:blip r:embed="rId6"/>
-          <a:stretch>
-            <a:fillRect/>
-          </a:stretch>
-        </p:blipFill>
-        <p:spPr>
-          <a:xfrm>
-            <a:off x="365760" y="4114800"/>
-            <a:ext cx="219456" cy="219456"/>
-          </a:xfrm>
-          <a:prstGeom prst="rect">
-            <a:avLst/>
-          </a:prstGeom>
-        </p:spPr>
-      </p:pic>
       <p:sp>
         <p:nvSpPr>
           <p:cNvPr id="17" name="Text 9"/>
@@ -4216,7 +4065,7 @@
           <a:bodyPr wrap="square" lIns="0" tIns="0" rIns="0" bIns="0" rtlCol="0" anchor="ctr"/>
           <a:lstStyle/>
           <a:p>
-            <a:pPr indent="0" marL="0">
+            <a:pPr marL="0" indent="0">
               <a:buNone/>
             </a:pPr>
             <a:r>
@@ -4234,30 +4083,6 @@
           </a:p>
         </p:txBody>
       </p:sp>
-      <p:pic>
-        <p:nvPicPr>
-          <p:cNvPr id="18" name="Image 6" descr="preencoded.png">    </p:cNvPr>
-          <p:cNvPicPr>
-            <a:picLocks noChangeAspect="1"/>
-          </p:cNvPicPr>
-          <p:nvPr/>
-        </p:nvPicPr>
-        <p:blipFill>
-          <a:blip r:embed="rId7"/>
-          <a:stretch>
-            <a:fillRect/>
-          </a:stretch>
-        </p:blipFill>
-        <p:spPr>
-          <a:xfrm>
-            <a:off x="365760" y="4480560"/>
-            <a:ext cx="219456" cy="219456"/>
-          </a:xfrm>
-          <a:prstGeom prst="rect">
-            <a:avLst/>
-          </a:prstGeom>
-        </p:spPr>
-      </p:pic>
       <p:sp>
         <p:nvSpPr>
           <p:cNvPr id="19" name="Text 10"/>
@@ -4279,7 +4104,7 @@
           <a:bodyPr wrap="square" lIns="0" tIns="0" rIns="0" bIns="0" rtlCol="0" anchor="ctr"/>
           <a:lstStyle/>
           <a:p>
-            <a:pPr indent="0" marL="0">
+            <a:pPr marL="0" indent="0">
               <a:buNone/>
             </a:pPr>
             <a:r>
@@ -4323,6 +4148,13 @@
             <a:prstDash val="solid"/>
           </a:ln>
         </p:spPr>
+        <p:txBody>
+          <a:bodyPr/>
+          <a:lstStyle/>
+          <a:p>
+            <a:endParaRPr lang="fr-FR"/>
+          </a:p>
+        </p:txBody>
       </p:sp>
       <p:sp>
         <p:nvSpPr>
@@ -4345,7 +4177,7 @@
           <a:bodyPr wrap="square" lIns="0" tIns="0" rIns="0" bIns="0" rtlCol="0" anchor="ctr"/>
           <a:lstStyle/>
           <a:p>
-            <a:pPr algn="ctr" indent="0" marL="0">
+            <a:pPr marL="0" indent="0" algn="ctr">
               <a:buNone/>
             </a:pPr>
             <a:r>
@@ -4389,6 +4221,13 @@
             <a:prstDash val="solid"/>
           </a:ln>
         </p:spPr>
+        <p:txBody>
+          <a:bodyPr/>
+          <a:lstStyle/>
+          <a:p>
+            <a:endParaRPr lang="fr-FR"/>
+          </a:p>
+        </p:txBody>
       </p:sp>
       <p:sp>
         <p:nvSpPr>
@@ -4411,7 +4250,7 @@
           <a:bodyPr wrap="square" lIns="0" tIns="0" rIns="0" bIns="0" rtlCol="0" anchor="ctr"/>
           <a:lstStyle/>
           <a:p>
-            <a:pPr algn="ctr" indent="0" marL="0">
+            <a:pPr marL="0" indent="0" algn="ctr">
               <a:buNone/>
             </a:pPr>
             <a:r>
@@ -4455,6 +4294,13 @@
             <a:prstDash val="solid"/>
           </a:ln>
         </p:spPr>
+        <p:txBody>
+          <a:bodyPr/>
+          <a:lstStyle/>
+          <a:p>
+            <a:endParaRPr lang="fr-FR"/>
+          </a:p>
+        </p:txBody>
       </p:sp>
       <p:sp>
         <p:nvSpPr>
@@ -4477,7 +4323,7 @@
           <a:bodyPr wrap="square" lIns="0" tIns="0" rIns="0" bIns="0" rtlCol="0" anchor="ctr"/>
           <a:lstStyle/>
           <a:p>
-            <a:pPr algn="ctr" indent="0" marL="0">
+            <a:pPr marL="0" indent="0" algn="ctr">
               <a:buNone/>
             </a:pPr>
             <a:r>
@@ -4521,6 +4367,13 @@
             <a:prstDash val="solid"/>
           </a:ln>
         </p:spPr>
+        <p:txBody>
+          <a:bodyPr/>
+          <a:lstStyle/>
+          <a:p>
+            <a:endParaRPr lang="fr-FR"/>
+          </a:p>
+        </p:txBody>
       </p:sp>
       <p:sp>
         <p:nvSpPr>
@@ -4543,7 +4396,7 @@
           <a:bodyPr wrap="square" lIns="0" tIns="0" rIns="0" bIns="0" rtlCol="0" anchor="ctr"/>
           <a:lstStyle/>
           <a:p>
-            <a:pPr algn="ctr" indent="0" marL="0">
+            <a:pPr marL="0" indent="0" algn="ctr">
               <a:buNone/>
             </a:pPr>
             <a:r>
@@ -4587,6 +4440,13 @@
             <a:prstDash val="solid"/>
           </a:ln>
         </p:spPr>
+        <p:txBody>
+          <a:bodyPr/>
+          <a:lstStyle/>
+          <a:p>
+            <a:endParaRPr lang="fr-FR"/>
+          </a:p>
+        </p:txBody>
       </p:sp>
       <p:sp>
         <p:nvSpPr>
@@ -4609,7 +4469,7 @@
           <a:bodyPr wrap="square" lIns="0" tIns="0" rIns="0" bIns="0" rtlCol="0" anchor="ctr"/>
           <a:lstStyle/>
           <a:p>
-            <a:pPr algn="ctr" indent="0" marL="0">
+            <a:pPr marL="0" indent="0" algn="ctr">
               <a:buNone/>
             </a:pPr>
             <a:r>
@@ -4649,6 +4509,13 @@
             <a:prstDash val="solid"/>
           </a:ln>
         </p:spPr>
+        <p:txBody>
+          <a:bodyPr/>
+          <a:lstStyle/>
+          <a:p>
+            <a:endParaRPr lang="fr-FR"/>
+          </a:p>
+        </p:txBody>
       </p:sp>
       <p:sp>
         <p:nvSpPr>
@@ -4672,6 +4539,13 @@
             <a:prstDash val="solid"/>
           </a:ln>
         </p:spPr>
+        <p:txBody>
+          <a:bodyPr/>
+          <a:lstStyle/>
+          <a:p>
+            <a:endParaRPr lang="fr-FR"/>
+          </a:p>
+        </p:txBody>
       </p:sp>
       <p:sp>
         <p:nvSpPr>
@@ -4695,6 +4569,13 @@
             <a:prstDash val="solid"/>
           </a:ln>
         </p:spPr>
+        <p:txBody>
+          <a:bodyPr/>
+          <a:lstStyle/>
+          <a:p>
+            <a:endParaRPr lang="fr-FR"/>
+          </a:p>
+        </p:txBody>
       </p:sp>
       <p:sp>
         <p:nvSpPr>
@@ -4718,6 +4599,13 @@
             <a:prstDash val="solid"/>
           </a:ln>
         </p:spPr>
+        <p:txBody>
+          <a:bodyPr/>
+          <a:lstStyle/>
+          <a:p>
+            <a:endParaRPr lang="fr-FR"/>
+          </a:p>
+        </p:txBody>
       </p:sp>
       <p:sp>
         <p:nvSpPr>
@@ -4741,6 +4629,13 @@
             <a:prstDash val="solid"/>
           </a:ln>
         </p:spPr>
+        <p:txBody>
+          <a:bodyPr/>
+          <a:lstStyle/>
+          <a:p>
+            <a:endParaRPr lang="fr-FR"/>
+          </a:p>
+        </p:txBody>
       </p:sp>
       <p:sp>
         <p:nvSpPr>
@@ -4764,6 +4659,13 @@
             <a:prstDash val="dash"/>
           </a:ln>
         </p:spPr>
+        <p:txBody>
+          <a:bodyPr/>
+          <a:lstStyle/>
+          <a:p>
+            <a:endParaRPr lang="fr-FR"/>
+          </a:p>
+        </p:txBody>
       </p:sp>
       <p:sp>
         <p:nvSpPr>
@@ -4786,7 +4688,7 @@
           <a:bodyPr wrap="square" lIns="0" tIns="0" rIns="0" bIns="0" rtlCol="0" anchor="ctr"/>
           <a:lstStyle/>
           <a:p>
-            <a:pPr algn="ctr" indent="0" marL="0">
+            <a:pPr marL="0" indent="0" algn="ctr">
               <a:buNone/>
             </a:pPr>
             <a:r>
@@ -4804,6 +4706,66 @@
           </a:p>
         </p:txBody>
       </p:sp>
+      <p:pic>
+        <p:nvPicPr>
+          <p:cNvPr id="38" name="Image 37">
+            <a:extLst>
+              <a:ext uri="{FF2B5EF4-FFF2-40B4-BE49-F238E27FC236}">
+                <a16:creationId xmlns:a16="http://schemas.microsoft.com/office/drawing/2014/main" id="{881E6562-5C9C-707B-D8FF-9C74E88CFEF6}"/>
+              </a:ext>
+            </a:extLst>
+          </p:cNvPr>
+          <p:cNvPicPr>
+            <a:picLocks noChangeAspect="1"/>
+          </p:cNvPicPr>
+          <p:nvPr/>
+        </p:nvPicPr>
+        <p:blipFill>
+          <a:blip r:embed="rId4"/>
+          <a:stretch>
+            <a:fillRect/>
+          </a:stretch>
+        </p:blipFill>
+        <p:spPr>
+          <a:xfrm>
+            <a:off x="3105985" y="2537460"/>
+            <a:ext cx="2383390" cy="1179576"/>
+          </a:xfrm>
+          <a:prstGeom prst="rect">
+            <a:avLst/>
+          </a:prstGeom>
+        </p:spPr>
+      </p:pic>
+      <p:pic>
+        <p:nvPicPr>
+          <p:cNvPr id="40" name="Image 39">
+            <a:extLst>
+              <a:ext uri="{FF2B5EF4-FFF2-40B4-BE49-F238E27FC236}">
+                <a16:creationId xmlns:a16="http://schemas.microsoft.com/office/drawing/2014/main" id="{B303C1E5-7600-A41E-6946-B56AD0BC0778}"/>
+              </a:ext>
+            </a:extLst>
+          </p:cNvPr>
+          <p:cNvPicPr>
+            <a:picLocks noChangeAspect="1"/>
+          </p:cNvPicPr>
+          <p:nvPr/>
+        </p:nvPicPr>
+        <p:blipFill>
+          <a:blip r:embed="rId5"/>
+          <a:stretch>
+            <a:fillRect/>
+          </a:stretch>
+        </p:blipFill>
+        <p:spPr>
+          <a:xfrm>
+            <a:off x="2729285" y="3845052"/>
+            <a:ext cx="3136791" cy="1060696"/>
+          </a:xfrm>
+          <a:prstGeom prst="rect">
+            <a:avLst/>
+          </a:prstGeom>
+        </p:spPr>
+      </p:pic>
     </p:spTree>
   </p:cSld>
   <p:clrMapOvr>
@@ -4814,12 +4776,16 @@
 
 <file path=ppt/slides/slide5.xml><?xml version="1.0" encoding="utf-8"?>
 <p:sld xmlns:a="http://schemas.openxmlformats.org/drawingml/2006/main" xmlns:r="http://schemas.openxmlformats.org/officeDocument/2006/relationships" xmlns:p="http://schemas.openxmlformats.org/presentationml/2006/main">
-  <p:cSld name="Slide 5">
+  <p:cSld>
     <p:bg>
       <p:bgPr>
         <a:solidFill>
-          <a:srgbClr val="0D1B2A"/>
+          <a:schemeClr val="accent1">
+            <a:lumMod val="20000"/>
+            <a:lumOff val="80000"/>
+          </a:schemeClr>
         </a:solidFill>
+        <a:effectLst/>
       </p:bgPr>
     </p:bg>
     <p:spTree>
@@ -4836,295 +4802,15 @@
           <a:chExt cx="0" cy="0"/>
         </a:xfrm>
       </p:grpSpPr>
-      <p:sp>
-        <p:nvSpPr>
-          <p:cNvPr id="2" name="Shape 0"/>
-          <p:cNvSpPr/>
-          <p:nvPr/>
-        </p:nvSpPr>
-        <p:spPr>
-          <a:xfrm>
-            <a:off x="0" y="0"/>
-            <a:ext cx="9144000" cy="731520"/>
-          </a:xfrm>
-          <a:prstGeom prst="rect">
-            <a:avLst/>
-          </a:prstGeom>
-          <a:solidFill>
-            <a:srgbClr val="1B5E20"/>
-          </a:solidFill>
-          <a:ln w="12700">
-            <a:solidFill>
-              <a:srgbClr val="1B5E20"/>
-            </a:solidFill>
-            <a:prstDash val="solid"/>
-          </a:ln>
-        </p:spPr>
-      </p:sp>
       <p:pic>
         <p:nvPicPr>
-          <p:cNvPr id="3" name="Image 0" descr="preencoded.png">    </p:cNvPr>
-          <p:cNvPicPr>
-            <a:picLocks noChangeAspect="1"/>
-          </p:cNvPicPr>
-          <p:nvPr/>
-        </p:nvPicPr>
-        <p:blipFill>
-          <a:blip r:embed="rId1"/>
-          <a:stretch>
-            <a:fillRect/>
-          </a:stretch>
-        </p:blipFill>
-        <p:spPr>
-          <a:xfrm>
-            <a:off x="182880" y="64008"/>
-            <a:ext cx="566928" cy="566928"/>
-          </a:xfrm>
-          <a:prstGeom prst="rect">
-            <a:avLst/>
-          </a:prstGeom>
-        </p:spPr>
-      </p:pic>
-      <p:sp>
-        <p:nvSpPr>
-          <p:cNvPr id="4" name="Text 1"/>
-          <p:cNvSpPr/>
-          <p:nvPr/>
-        </p:nvSpPr>
-        <p:spPr>
-          <a:xfrm>
-            <a:off x="841248" y="45720"/>
-            <a:ext cx="7955280" cy="640080"/>
-          </a:xfrm>
-          <a:prstGeom prst="rect">
-            <a:avLst/>
-          </a:prstGeom>
-          <a:noFill/>
-          <a:ln/>
-        </p:spPr>
-        <p:txBody>
-          <a:bodyPr wrap="square" lIns="0" tIns="0" rIns="0" bIns="0" rtlCol="0" anchor="ctr"/>
-          <a:lstStyle/>
-          <a:p>
-            <a:pPr algn="l" indent="0" marL="0">
-              <a:buNone/>
-            </a:pPr>
-            <a:r>
-              <a:rPr lang="en-US" sz="2600" b="1" dirty="0">
-                <a:solidFill>
-                  <a:srgbClr val="FFFFFF"/>
-                </a:solidFill>
-                <a:latin typeface="Calibri" pitchFamily="34" charset="0"/>
-                <a:ea typeface="Calibri" pitchFamily="34" charset="-122"/>
-                <a:cs typeface="Calibri" pitchFamily="34" charset="-120"/>
-              </a:rPr>
-              <a:t>Open Trivia DB</a:t>
-            </a:r>
-            <a:endParaRPr lang="en-US" sz="2600" dirty="0"/>
-          </a:p>
-        </p:txBody>
-      </p:sp>
-      <p:sp>
-        <p:nvSpPr>
-          <p:cNvPr id="5" name="Shape 2"/>
-          <p:cNvSpPr/>
-          <p:nvPr/>
-        </p:nvSpPr>
-        <p:spPr>
-          <a:xfrm>
-            <a:off x="365760" y="868680"/>
-            <a:ext cx="8412480" cy="1234440"/>
-          </a:xfrm>
-          <a:prstGeom prst="roundRect">
-            <a:avLst>
-              <a:gd name="adj" fmla="val 7407"/>
-            </a:avLst>
-          </a:prstGeom>
-          <a:solidFill>
-            <a:srgbClr val="0D2B0F"/>
-          </a:solidFill>
-          <a:ln w="12700">
-            <a:solidFill>
-              <a:srgbClr val="388E3C"/>
-            </a:solidFill>
-            <a:prstDash val="solid"/>
-          </a:ln>
-        </p:spPr>
-      </p:sp>
-      <p:sp>
-        <p:nvSpPr>
-          <p:cNvPr id="6" name="Text 3"/>
-          <p:cNvSpPr/>
-          <p:nvPr/>
-        </p:nvSpPr>
-        <p:spPr>
-          <a:xfrm>
-            <a:off x="640080" y="960120"/>
-            <a:ext cx="7863840" cy="365760"/>
-          </a:xfrm>
-          <a:prstGeom prst="rect">
-            <a:avLst/>
-          </a:prstGeom>
-          <a:noFill/>
-          <a:ln/>
-        </p:spPr>
-        <p:txBody>
-          <a:bodyPr wrap="square" lIns="0" tIns="0" rIns="0" bIns="0" rtlCol="0" anchor="ctr"/>
-          <a:lstStyle/>
-          <a:p>
-            <a:pPr algn="l" indent="0" marL="0">
-              <a:buNone/>
-            </a:pPr>
-            <a:r>
-              <a:rPr lang="en-US" sz="1300" dirty="0">
-                <a:solidFill>
-                  <a:srgbClr val="A5D6A7"/>
-                </a:solidFill>
-                <a:latin typeface="Courier New" pitchFamily="34" charset="0"/>
-                <a:ea typeface="Courier New" pitchFamily="34" charset="-122"/>
-                <a:cs typeface="Courier New" pitchFamily="34" charset="-120"/>
-              </a:rPr>
-              <a:t>GET  https://opentdb.com/api.php</a:t>
-            </a:r>
-            <a:endParaRPr lang="en-US" sz="1300" dirty="0"/>
-          </a:p>
-        </p:txBody>
-      </p:sp>
-      <p:sp>
-        <p:nvSpPr>
-          <p:cNvPr id="7" name="Text 4"/>
-          <p:cNvSpPr/>
-          <p:nvPr/>
-        </p:nvSpPr>
-        <p:spPr>
-          <a:xfrm>
-            <a:off x="640080" y="1325880"/>
-            <a:ext cx="7863840" cy="365760"/>
-          </a:xfrm>
-          <a:prstGeom prst="rect">
-            <a:avLst/>
-          </a:prstGeom>
-          <a:noFill/>
-          <a:ln/>
-        </p:spPr>
-        <p:txBody>
-          <a:bodyPr wrap="square" lIns="0" tIns="0" rIns="0" bIns="0" rtlCol="0" anchor="ctr"/>
-          <a:lstStyle/>
-          <a:p>
-            <a:pPr algn="l" indent="0" marL="0">
-              <a:buNone/>
-            </a:pPr>
-            <a:r>
-              <a:rPr lang="en-US" sz="1200" dirty="0">
-                <a:solidFill>
-                  <a:srgbClr val="80CBC4"/>
-                </a:solidFill>
-                <a:latin typeface="Courier New" pitchFamily="34" charset="0"/>
-                <a:ea typeface="Courier New" pitchFamily="34" charset="-122"/>
-                <a:cs typeface="Courier New" pitchFamily="34" charset="-120"/>
-              </a:rPr>
-              <a:t>  ?amount=10  &amp;type=multiple  &amp;category=9  &amp;difficulty=easy</a:t>
-            </a:r>
-            <a:endParaRPr lang="en-US" sz="1200" dirty="0"/>
-          </a:p>
-        </p:txBody>
-      </p:sp>
-      <p:sp>
-        <p:nvSpPr>
-          <p:cNvPr id="8" name="Shape 5"/>
-          <p:cNvSpPr/>
-          <p:nvPr/>
-        </p:nvSpPr>
-        <p:spPr>
-          <a:xfrm>
-            <a:off x="365760" y="2286000"/>
-            <a:ext cx="4023360" cy="2606040"/>
-          </a:xfrm>
-          <a:prstGeom prst="roundRect">
-            <a:avLst>
-              <a:gd name="adj" fmla="val 3509"/>
-            </a:avLst>
-          </a:prstGeom>
-          <a:solidFill>
-            <a:srgbClr val="0A2E0B"/>
-          </a:solidFill>
-          <a:ln w="12700">
-            <a:solidFill>
-              <a:srgbClr val="388E3C"/>
-            </a:solidFill>
-            <a:prstDash val="solid"/>
-          </a:ln>
-        </p:spPr>
-      </p:sp>
-      <p:sp>
-        <p:nvSpPr>
-          <p:cNvPr id="9" name="Shape 6"/>
-          <p:cNvSpPr/>
-          <p:nvPr/>
-        </p:nvSpPr>
-        <p:spPr>
-          <a:xfrm>
-            <a:off x="4754880" y="2286000"/>
-            <a:ext cx="4023360" cy="2606040"/>
-          </a:xfrm>
-          <a:prstGeom prst="roundRect">
-            <a:avLst>
-              <a:gd name="adj" fmla="val 3509"/>
-            </a:avLst>
-          </a:prstGeom>
-          <a:solidFill>
-            <a:srgbClr val="2D0A0A"/>
-          </a:solidFill>
-          <a:ln w="12700">
-            <a:solidFill>
-              <a:srgbClr val="C62828"/>
-            </a:solidFill>
-            <a:prstDash val="solid"/>
-          </a:ln>
-        </p:spPr>
-      </p:sp>
-      <p:sp>
-        <p:nvSpPr>
-          <p:cNvPr id="10" name="Text 7"/>
-          <p:cNvSpPr/>
-          <p:nvPr/>
-        </p:nvSpPr>
-        <p:spPr>
-          <a:xfrm>
-            <a:off x="640080" y="2377440"/>
-            <a:ext cx="3474720" cy="365760"/>
-          </a:xfrm>
-          <a:prstGeom prst="rect">
-            <a:avLst/>
-          </a:prstGeom>
-          <a:noFill/>
-          <a:ln/>
-        </p:spPr>
-        <p:txBody>
-          <a:bodyPr wrap="square" lIns="0" tIns="0" rIns="0" bIns="0" rtlCol="0" anchor="ctr"/>
-          <a:lstStyle/>
-          <a:p>
-            <a:pPr indent="0" marL="0">
-              <a:buNone/>
-            </a:pPr>
-            <a:r>
-              <a:rPr lang="en-US" sz="1400" b="1" dirty="0">
-                <a:solidFill>
-                  <a:srgbClr val="A5D6A7"/>
-                </a:solidFill>
-                <a:latin typeface="Calibri" pitchFamily="34" charset="0"/>
-                <a:ea typeface="Calibri" pitchFamily="34" charset="-122"/>
-                <a:cs typeface="Calibri" pitchFamily="34" charset="-120"/>
-              </a:rPr>
-              <a:t>Avantages</a:t>
-            </a:r>
-            <a:endParaRPr lang="en-US" sz="1400" dirty="0"/>
-          </a:p>
-        </p:txBody>
-      </p:sp>
-      <p:pic>
-        <p:nvPicPr>
-          <p:cNvPr id="11" name="Image 1" descr="preencoded.png">    </p:cNvPr>
+          <p:cNvPr id="7" name="Image 6">
+            <a:extLst>
+              <a:ext uri="{FF2B5EF4-FFF2-40B4-BE49-F238E27FC236}">
+                <a16:creationId xmlns:a16="http://schemas.microsoft.com/office/drawing/2014/main" id="{3F1A0146-1518-99BD-8F60-36368E5F6723}"/>
+              </a:ext>
+            </a:extLst>
+          </p:cNvPr>
           <p:cNvPicPr>
             <a:picLocks noChangeAspect="1"/>
           </p:cNvPicPr>
@@ -5138,56 +4824,23 @@
         </p:blipFill>
         <p:spPr>
           <a:xfrm>
-            <a:off x="548640" y="2852928"/>
-            <a:ext cx="274320" cy="274320"/>
+            <a:off x="560663" y="541134"/>
+            <a:ext cx="3878392" cy="1502194"/>
           </a:xfrm>
           <a:prstGeom prst="rect">
             <a:avLst/>
           </a:prstGeom>
         </p:spPr>
       </p:pic>
-      <p:sp>
-        <p:nvSpPr>
-          <p:cNvPr id="12" name="Text 8"/>
-          <p:cNvSpPr/>
-          <p:nvPr/>
-        </p:nvSpPr>
-        <p:spPr>
-          <a:xfrm>
-            <a:off x="914400" y="2852928"/>
-            <a:ext cx="3291840" cy="411480"/>
-          </a:xfrm>
-          <a:prstGeom prst="rect">
-            <a:avLst/>
-          </a:prstGeom>
-          <a:noFill/>
-          <a:ln/>
-        </p:spPr>
-        <p:txBody>
-          <a:bodyPr wrap="square" lIns="0" tIns="0" rIns="0" bIns="0" rtlCol="0" anchor="ctr"/>
-          <a:lstStyle/>
-          <a:p>
-            <a:pPr indent="0" marL="0">
-              <a:buNone/>
-            </a:pPr>
-            <a:r>
-              <a:rPr lang="en-US" sz="1200" dirty="0">
-                <a:solidFill>
-                  <a:srgbClr val="E8F5E9"/>
-                </a:solidFill>
-                <a:latin typeface="Calibri" pitchFamily="34" charset="0"/>
-                <a:ea typeface="Calibri" pitchFamily="34" charset="-122"/>
-                <a:cs typeface="Calibri" pitchFamily="34" charset="-120"/>
-              </a:rPr>
-              <a:t>Gratuite, sans clé API</a:t>
-            </a:r>
-            <a:endParaRPr lang="en-US" sz="1200" dirty="0"/>
-          </a:p>
-        </p:txBody>
-      </p:sp>
       <p:pic>
         <p:nvPicPr>
-          <p:cNvPr id="13" name="Image 2" descr="preencoded.png">    </p:cNvPr>
+          <p:cNvPr id="9" name="Image 8">
+            <a:extLst>
+              <a:ext uri="{FF2B5EF4-FFF2-40B4-BE49-F238E27FC236}">
+                <a16:creationId xmlns:a16="http://schemas.microsoft.com/office/drawing/2014/main" id="{37467FF8-AC65-1CED-9390-715638E200F8}"/>
+              </a:ext>
+            </a:extLst>
+          </p:cNvPr>
           <p:cNvPicPr>
             <a:picLocks noChangeAspect="1"/>
           </p:cNvPicPr>
@@ -5201,56 +4854,23 @@
         </p:blipFill>
         <p:spPr>
           <a:xfrm>
-            <a:off x="548640" y="3401568"/>
-            <a:ext cx="274320" cy="274320"/>
+            <a:off x="5160469" y="541134"/>
+            <a:ext cx="3334111" cy="2089948"/>
           </a:xfrm>
           <a:prstGeom prst="rect">
             <a:avLst/>
           </a:prstGeom>
         </p:spPr>
       </p:pic>
-      <p:sp>
-        <p:nvSpPr>
-          <p:cNvPr id="14" name="Text 9"/>
-          <p:cNvSpPr/>
-          <p:nvPr/>
-        </p:nvSpPr>
-        <p:spPr>
-          <a:xfrm>
-            <a:off x="914400" y="3401568"/>
-            <a:ext cx="3291840" cy="411480"/>
-          </a:xfrm>
-          <a:prstGeom prst="rect">
-            <a:avLst/>
-          </a:prstGeom>
-          <a:noFill/>
-          <a:ln/>
-        </p:spPr>
-        <p:txBody>
-          <a:bodyPr wrap="square" lIns="0" tIns="0" rIns="0" bIns="0" rtlCol="0" anchor="ctr"/>
-          <a:lstStyle/>
-          <a:p>
-            <a:pPr indent="0" marL="0">
-              <a:buNone/>
-            </a:pPr>
-            <a:r>
-              <a:rPr lang="en-US" sz="1200" dirty="0">
-                <a:solidFill>
-                  <a:srgbClr val="E8F5E9"/>
-                </a:solidFill>
-                <a:latin typeface="Calibri" pitchFamily="34" charset="0"/>
-                <a:ea typeface="Calibri" pitchFamily="34" charset="-122"/>
-                <a:cs typeface="Calibri" pitchFamily="34" charset="-120"/>
-              </a:rPr>
-              <a:t>Données prêtes à l'emploi</a:t>
-            </a:r>
-            <a:endParaRPr lang="en-US" sz="1200" dirty="0"/>
-          </a:p>
-        </p:txBody>
-      </p:sp>
       <p:pic>
         <p:nvPicPr>
-          <p:cNvPr id="15" name="Image 3" descr="preencoded.png">    </p:cNvPr>
+          <p:cNvPr id="11" name="Image 10">
+            <a:extLst>
+              <a:ext uri="{FF2B5EF4-FFF2-40B4-BE49-F238E27FC236}">
+                <a16:creationId xmlns:a16="http://schemas.microsoft.com/office/drawing/2014/main" id="{20FCDBBD-976B-17DF-805C-8586948B6CF1}"/>
+              </a:ext>
+            </a:extLst>
+          </p:cNvPr>
           <p:cNvPicPr>
             <a:picLocks noChangeAspect="1"/>
           </p:cNvPicPr>
@@ -5264,8 +4884,8 @@
         </p:blipFill>
         <p:spPr>
           <a:xfrm>
-            <a:off x="548640" y="3950208"/>
-            <a:ext cx="274320" cy="274320"/>
+            <a:off x="5160469" y="2962912"/>
+            <a:ext cx="3334111" cy="1569840"/>
           </a:xfrm>
           <a:prstGeom prst="rect">
             <a:avLst/>
@@ -5274,272 +4894,113 @@
       </p:pic>
       <p:sp>
         <p:nvSpPr>
-          <p:cNvPr id="16" name="Text 10"/>
-          <p:cNvSpPr/>
-          <p:nvPr/>
-        </p:nvSpPr>
-        <p:spPr>
-          <a:xfrm>
-            <a:off x="914400" y="3950208"/>
-            <a:ext cx="3291840" cy="411480"/>
-          </a:xfrm>
-          <a:prstGeom prst="rect">
-            <a:avLst/>
-          </a:prstGeom>
-          <a:noFill/>
-          <a:ln/>
-        </p:spPr>
-        <p:txBody>
-          <a:bodyPr wrap="square" lIns="0" tIns="0" rIns="0" bIns="0" rtlCol="0" anchor="ctr"/>
-          <a:lstStyle/>
-          <a:p>
-            <a:pPr indent="0" marL="0">
-              <a:buNone/>
-            </a:pPr>
-            <a:r>
-              <a:rPr lang="en-US" sz="1200" dirty="0">
-                <a:solidFill>
-                  <a:srgbClr val="E8F5E9"/>
-                </a:solidFill>
-                <a:latin typeface="Calibri" pitchFamily="34" charset="0"/>
-                <a:ea typeface="Calibri" pitchFamily="34" charset="-122"/>
-                <a:cs typeface="Calibri" pitchFamily="34" charset="-120"/>
-              </a:rPr>
-              <a:t>Filtrage URL simple</a:t>
-            </a:r>
-            <a:endParaRPr lang="en-US" sz="1200" dirty="0"/>
-          </a:p>
-        </p:txBody>
-      </p:sp>
-      <p:sp>
-        <p:nvSpPr>
-          <p:cNvPr id="17" name="Text 11"/>
-          <p:cNvSpPr/>
-          <p:nvPr/>
-        </p:nvSpPr>
-        <p:spPr>
-          <a:xfrm>
-            <a:off x="4937760" y="2377440"/>
-            <a:ext cx="3474720" cy="365760"/>
-          </a:xfrm>
-          <a:prstGeom prst="rect">
-            <a:avLst/>
-          </a:prstGeom>
-          <a:noFill/>
-          <a:ln/>
-        </p:spPr>
-        <p:txBody>
-          <a:bodyPr wrap="square" lIns="0" tIns="0" rIns="0" bIns="0" rtlCol="0" anchor="ctr"/>
-          <a:lstStyle/>
-          <a:p>
-            <a:pPr indent="0" marL="0">
-              <a:buNone/>
-            </a:pPr>
-            <a:r>
-              <a:rPr lang="en-US" sz="1400" b="1" dirty="0">
-                <a:solidFill>
-                  <a:srgbClr val="EF9A9A"/>
-                </a:solidFill>
-                <a:latin typeface="Calibri" pitchFamily="34" charset="0"/>
-                <a:ea typeface="Calibri" pitchFamily="34" charset="-122"/>
-                <a:cs typeface="Calibri" pitchFamily="34" charset="-120"/>
-              </a:rPr>
-              <a:t>Inconvénients</a:t>
-            </a:r>
-            <a:endParaRPr lang="en-US" sz="1400" dirty="0"/>
-          </a:p>
-        </p:txBody>
-      </p:sp>
-      <p:pic>
-        <p:nvPicPr>
-          <p:cNvPr id="18" name="Image 4" descr="preencoded.png">    </p:cNvPr>
-          <p:cNvPicPr>
-            <a:picLocks noChangeAspect="1"/>
-          </p:cNvPicPr>
-          <p:nvPr/>
-        </p:nvPicPr>
-        <p:blipFill>
-          <a:blip r:embed="rId5"/>
-          <a:stretch>
-            <a:fillRect/>
-          </a:stretch>
-        </p:blipFill>
-        <p:spPr>
-          <a:xfrm>
-            <a:off x="4846320" y="2852928"/>
-            <a:ext cx="274320" cy="274320"/>
-          </a:xfrm>
-          <a:prstGeom prst="rect">
-            <a:avLst/>
-          </a:prstGeom>
-        </p:spPr>
-      </p:pic>
-      <p:sp>
-        <p:nvSpPr>
-          <p:cNvPr id="19" name="Text 12"/>
-          <p:cNvSpPr/>
-          <p:nvPr/>
-        </p:nvSpPr>
-        <p:spPr>
-          <a:xfrm>
-            <a:off x="5212080" y="2852928"/>
-            <a:ext cx="3291840" cy="411480"/>
-          </a:xfrm>
-          <a:prstGeom prst="rect">
-            <a:avLst/>
-          </a:prstGeom>
-          <a:noFill/>
-          <a:ln/>
-        </p:spPr>
-        <p:txBody>
-          <a:bodyPr wrap="square" lIns="0" tIns="0" rIns="0" bIns="0" rtlCol="0" anchor="ctr"/>
-          <a:lstStyle/>
-          <a:p>
-            <a:pPr indent="0" marL="0">
-              <a:buNone/>
-            </a:pPr>
-            <a:r>
-              <a:rPr lang="en-US" sz="1200" dirty="0">
-                <a:solidFill>
-                  <a:srgbClr val="FFCDD2"/>
-                </a:solidFill>
-                <a:latin typeface="Calibri" pitchFamily="34" charset="0"/>
-                <a:ea typeface="Calibri" pitchFamily="34" charset="-122"/>
-                <a:cs typeface="Calibri" pitchFamily="34" charset="-120"/>
-              </a:rPr>
-              <a:t>Rate limiting (HTTP 429)</a:t>
-            </a:r>
-            <a:endParaRPr lang="en-US" sz="1200" dirty="0"/>
-          </a:p>
-        </p:txBody>
-      </p:sp>
-      <p:pic>
-        <p:nvPicPr>
-          <p:cNvPr id="20" name="Image 5" descr="preencoded.png">    </p:cNvPr>
-          <p:cNvPicPr>
-            <a:picLocks noChangeAspect="1"/>
-          </p:cNvPicPr>
-          <p:nvPr/>
-        </p:nvPicPr>
-        <p:blipFill>
-          <a:blip r:embed="rId6"/>
-          <a:stretch>
-            <a:fillRect/>
-          </a:stretch>
-        </p:blipFill>
-        <p:spPr>
-          <a:xfrm>
-            <a:off x="4846320" y="3401568"/>
-            <a:ext cx="274320" cy="274320"/>
-          </a:xfrm>
-          <a:prstGeom prst="rect">
-            <a:avLst/>
-          </a:prstGeom>
-        </p:spPr>
-      </p:pic>
-      <p:sp>
-        <p:nvSpPr>
-          <p:cNvPr id="21" name="Text 13"/>
-          <p:cNvSpPr/>
-          <p:nvPr/>
-        </p:nvSpPr>
-        <p:spPr>
-          <a:xfrm>
-            <a:off x="5212080" y="3401568"/>
-            <a:ext cx="3291840" cy="411480"/>
-          </a:xfrm>
-          <a:prstGeom prst="rect">
-            <a:avLst/>
-          </a:prstGeom>
-          <a:noFill/>
-          <a:ln/>
-        </p:spPr>
-        <p:txBody>
-          <a:bodyPr wrap="square" lIns="0" tIns="0" rIns="0" bIns="0" rtlCol="0" anchor="ctr"/>
-          <a:lstStyle/>
-          <a:p>
-            <a:pPr indent="0" marL="0">
-              <a:buNone/>
-            </a:pPr>
-            <a:r>
-              <a:rPr lang="en-US" sz="1200" dirty="0">
-                <a:solidFill>
-                  <a:srgbClr val="FFCDD2"/>
-                </a:solidFill>
-                <a:latin typeface="Calibri" pitchFamily="34" charset="0"/>
-                <a:ea typeface="Calibri" pitchFamily="34" charset="-122"/>
-                <a:cs typeface="Calibri" pitchFamily="34" charset="-120"/>
-              </a:rPr>
-              <a:t>Texte encodé HTML (&amp;amp;)</a:t>
-            </a:r>
-            <a:endParaRPr lang="en-US" sz="1200" dirty="0"/>
-          </a:p>
-        </p:txBody>
-      </p:sp>
-      <p:pic>
-        <p:nvPicPr>
-          <p:cNvPr id="22" name="Image 6" descr="preencoded.png">    </p:cNvPr>
-          <p:cNvPicPr>
-            <a:picLocks noChangeAspect="1"/>
-          </p:cNvPicPr>
-          <p:nvPr/>
-        </p:nvPicPr>
-        <p:blipFill>
-          <a:blip r:embed="rId7"/>
-          <a:stretch>
-            <a:fillRect/>
-          </a:stretch>
-        </p:blipFill>
-        <p:spPr>
-          <a:xfrm>
-            <a:off x="4846320" y="3950208"/>
-            <a:ext cx="274320" cy="274320"/>
-          </a:xfrm>
-          <a:prstGeom prst="rect">
-            <a:avLst/>
-          </a:prstGeom>
-        </p:spPr>
-      </p:pic>
-      <p:sp>
-        <p:nvSpPr>
-          <p:cNvPr id="23" name="Text 14"/>
-          <p:cNvSpPr/>
-          <p:nvPr/>
-        </p:nvSpPr>
-        <p:spPr>
-          <a:xfrm>
-            <a:off x="5212080" y="3950208"/>
-            <a:ext cx="3291840" cy="411480"/>
-          </a:xfrm>
-          <a:prstGeom prst="rect">
-            <a:avLst/>
-          </a:prstGeom>
-          <a:noFill/>
-          <a:ln/>
-        </p:spPr>
-        <p:txBody>
-          <a:bodyPr wrap="square" lIns="0" tIns="0" rIns="0" bIns="0" rtlCol="0" anchor="ctr"/>
-          <a:lstStyle/>
-          <a:p>
-            <a:pPr indent="0" marL="0">
-              <a:buNone/>
-            </a:pPr>
-            <a:r>
-              <a:rPr lang="en-US" sz="1200" dirty="0">
-                <a:solidFill>
-                  <a:srgbClr val="FFCDD2"/>
-                </a:solidFill>
-                <a:latin typeface="Calibri" pitchFamily="34" charset="0"/>
-                <a:ea typeface="Calibri" pitchFamily="34" charset="-122"/>
-                <a:cs typeface="Calibri" pitchFamily="34" charset="-120"/>
-              </a:rPr>
-              <a:t>Contenu en anglais seulement</a:t>
-            </a:r>
-            <a:endParaRPr lang="en-US" sz="1200" dirty="0"/>
+          <p:cNvPr id="12" name="ZoneTexte 11">
+            <a:extLst>
+              <a:ext uri="{FF2B5EF4-FFF2-40B4-BE49-F238E27FC236}">
+                <a16:creationId xmlns:a16="http://schemas.microsoft.com/office/drawing/2014/main" id="{F4D360DC-4CEE-6B5E-EF88-F445784C6975}"/>
+              </a:ext>
+            </a:extLst>
+          </p:cNvPr>
+          <p:cNvSpPr txBox="1"/>
+          <p:nvPr/>
+        </p:nvSpPr>
+        <p:spPr>
+          <a:xfrm>
+            <a:off x="312420" y="2447930"/>
+            <a:ext cx="4406537" cy="2215991"/>
+          </a:xfrm>
+          <a:prstGeom prst="rect">
+            <a:avLst/>
+          </a:prstGeom>
+          <a:noFill/>
+        </p:spPr>
+        <p:txBody>
+          <a:bodyPr wrap="square" rtlCol="0">
+            <a:spAutoFit/>
+          </a:bodyPr>
+          <a:lstStyle/>
+          <a:p>
+            <a:pPr algn="ctr">
+              <a:lnSpc>
+                <a:spcPct val="150000"/>
+              </a:lnSpc>
+            </a:pPr>
+            <a:r>
+              <a:rPr lang="fr-FR" sz="1600" b="1" u="sng" dirty="0"/>
+              <a:t>Différences</a:t>
+            </a:r>
+            <a:endParaRPr lang="fr-FR" sz="1600" dirty="0"/>
+          </a:p>
+          <a:p>
+            <a:pPr marL="285750" indent="-285750">
+              <a:lnSpc>
+                <a:spcPct val="150000"/>
+              </a:lnSpc>
+              <a:buFont typeface="Arial" panose="020B0604020202020204" pitchFamily="34" charset="0"/>
+              <a:buChar char="•"/>
+            </a:pPr>
+            <a:r>
+              <a:rPr lang="fr-FR" sz="1600" dirty="0" err="1"/>
+              <a:t>Parsing</a:t>
+            </a:r>
+            <a:r>
+              <a:rPr lang="fr-FR" sz="1600" dirty="0"/>
+              <a:t> JSON automatique (</a:t>
+            </a:r>
+            <a:r>
+              <a:rPr lang="fr-FR" sz="1600" dirty="0" err="1"/>
+              <a:t>res.data</a:t>
+            </a:r>
+            <a:r>
+              <a:rPr lang="fr-FR" sz="1600" dirty="0"/>
+              <a:t> vs .</a:t>
+            </a:r>
+            <a:r>
+              <a:rPr lang="fr-FR" sz="1600" dirty="0" err="1"/>
+              <a:t>json</a:t>
+            </a:r>
+            <a:r>
+              <a:rPr lang="fr-FR" sz="1600" dirty="0"/>
+              <a:t>())</a:t>
+            </a:r>
+          </a:p>
+          <a:p>
+            <a:pPr marL="285750" indent="-285750">
+              <a:lnSpc>
+                <a:spcPct val="150000"/>
+              </a:lnSpc>
+              <a:buFont typeface="Arial" panose="020B0604020202020204" pitchFamily="34" charset="0"/>
+              <a:buChar char="•"/>
+            </a:pPr>
+            <a:r>
+              <a:rPr lang="fr-FR" sz="1600" dirty="0"/>
+              <a:t>Erreurs HTTP gérées automatiquement </a:t>
+            </a:r>
+          </a:p>
+          <a:p>
+            <a:pPr marL="285750" indent="-285750">
+              <a:lnSpc>
+                <a:spcPct val="150000"/>
+              </a:lnSpc>
+              <a:buFont typeface="Arial" panose="020B0604020202020204" pitchFamily="34" charset="0"/>
+              <a:buChar char="•"/>
+            </a:pPr>
+            <a:r>
+              <a:rPr lang="fr-FR" sz="1600" dirty="0"/>
+              <a:t>Envoi de données simplifié (sérialisation + headers automatiques)</a:t>
+            </a:r>
+          </a:p>
+          <a:p>
+            <a:endParaRPr lang="fr-FR" dirty="0"/>
           </a:p>
         </p:txBody>
       </p:sp>
     </p:spTree>
+    <p:extLst>
+      <p:ext uri="{BB962C8B-B14F-4D97-AF65-F5344CB8AC3E}">
+        <p14:creationId xmlns:p14="http://schemas.microsoft.com/office/powerpoint/2010/main" val="275888698"/>
+      </p:ext>
+    </p:extLst>
   </p:cSld>
   <p:clrMapOvr>
     <a:masterClrMapping/>
@@ -5549,12 +5010,13 @@
 
 <file path=ppt/slides/slide6.xml><?xml version="1.0" encoding="utf-8"?>
 <p:sld xmlns:a="http://schemas.openxmlformats.org/drawingml/2006/main" xmlns:r="http://schemas.openxmlformats.org/officeDocument/2006/relationships" xmlns:p="http://schemas.openxmlformats.org/presentationml/2006/main">
-  <p:cSld name="Slide 6">
+  <p:cSld name="Slide 5">
     <p:bg>
       <p:bgPr>
         <a:solidFill>
-          <a:srgbClr val="F0F4FF"/>
+          <a:srgbClr val="0D1B2A"/>
         </a:solidFill>
+        <a:effectLst/>
       </p:bgPr>
     </p:bg>
     <p:spTree>
@@ -5586,349 +5048,26 @@
             <a:avLst/>
           </a:prstGeom>
           <a:solidFill>
-            <a:srgbClr val="1A237E"/>
+            <a:srgbClr val="1B5E20"/>
           </a:solidFill>
           <a:ln w="12700">
             <a:solidFill>
-              <a:srgbClr val="1A237E"/>
+              <a:srgbClr val="1B5E20"/>
             </a:solidFill>
             <a:prstDash val="solid"/>
           </a:ln>
         </p:spPr>
-      </p:sp>
-      <p:sp>
-        <p:nvSpPr>
-          <p:cNvPr id="3" name="Text 1"/>
-          <p:cNvSpPr/>
-          <p:nvPr/>
-        </p:nvSpPr>
-        <p:spPr>
-          <a:xfrm>
-            <a:off x="365760" y="45720"/>
-            <a:ext cx="8412480" cy="640080"/>
-          </a:xfrm>
-          <a:prstGeom prst="rect">
-            <a:avLst/>
-          </a:prstGeom>
-          <a:noFill/>
-          <a:ln/>
-        </p:spPr>
-        <p:txBody>
-          <a:bodyPr wrap="square" lIns="0" tIns="0" rIns="0" bIns="0" rtlCol="0" anchor="ctr"/>
-          <a:lstStyle/>
-          <a:p>
-            <a:pPr algn="l" indent="0" marL="0">
-              <a:buNone/>
-            </a:pPr>
-            <a:r>
-              <a:rPr lang="en-US" sz="2600" b="1" dirty="0">
-                <a:solidFill>
-                  <a:srgbClr val="FFFFFF"/>
-                </a:solidFill>
-                <a:latin typeface="Calibri" pitchFamily="34" charset="0"/>
-                <a:ea typeface="Calibri" pitchFamily="34" charset="-122"/>
-                <a:cs typeface="Calibri" pitchFamily="34" charset="-120"/>
-              </a:rPr>
-              <a:t>Stack technique</a:t>
-            </a:r>
-            <a:endParaRPr lang="en-US" sz="2600" dirty="0"/>
-          </a:p>
-        </p:txBody>
-      </p:sp>
-      <p:sp>
-        <p:nvSpPr>
-          <p:cNvPr id="4" name="Shape 2"/>
-          <p:cNvSpPr/>
-          <p:nvPr/>
-        </p:nvSpPr>
-        <p:spPr>
-          <a:xfrm>
-            <a:off x="274320" y="868680"/>
-            <a:ext cx="1920240" cy="2103120"/>
-          </a:xfrm>
-          <a:prstGeom prst="roundRect">
-            <a:avLst>
-              <a:gd name="adj" fmla="val 5714"/>
-            </a:avLst>
-          </a:prstGeom>
-          <a:solidFill>
-            <a:srgbClr val="1A237E"/>
-          </a:solidFill>
-          <a:ln/>
-          <a:effectLst>
-            <a:outerShdw sx="100000" sy="100000" kx="0" ky="0" algn="bl" rotWithShape="0" blurRad="101600" dist="38100" dir="2700000">
-              <a:srgbClr val="000000">
-                <a:alpha val="13000"/>
-              </a:srgbClr>
-            </a:outerShdw>
-          </a:effectLst>
-        </p:spPr>
+        <p:txBody>
+          <a:bodyPr/>
+          <a:lstStyle/>
+          <a:p>
+            <a:endParaRPr lang="fr-FR"/>
+          </a:p>
+        </p:txBody>
       </p:sp>
       <p:pic>
         <p:nvPicPr>
-          <p:cNvPr id="5" name="Image 0" descr="preencoded.png">    </p:cNvPr>
-          <p:cNvPicPr>
-            <a:picLocks noChangeAspect="1"/>
-          </p:cNvPicPr>
-          <p:nvPr/>
-        </p:nvPicPr>
-        <p:blipFill>
-          <a:blip r:embed="rId1"/>
-          <a:stretch>
-            <a:fillRect/>
-          </a:stretch>
-        </p:blipFill>
-        <p:spPr>
-          <a:xfrm>
-            <a:off x="1005840" y="1051560"/>
-            <a:ext cx="457200" cy="457200"/>
-          </a:xfrm>
-          <a:prstGeom prst="rect">
-            <a:avLst/>
-          </a:prstGeom>
-        </p:spPr>
-      </p:pic>
-      <p:sp>
-        <p:nvSpPr>
-          <p:cNvPr id="6" name="Text 3"/>
-          <p:cNvSpPr/>
-          <p:nvPr/>
-        </p:nvSpPr>
-        <p:spPr>
-          <a:xfrm>
-            <a:off x="274320" y="1645920"/>
-            <a:ext cx="1920240" cy="411480"/>
-          </a:xfrm>
-          <a:prstGeom prst="rect">
-            <a:avLst/>
-          </a:prstGeom>
-          <a:noFill/>
-          <a:ln/>
-        </p:spPr>
-        <p:txBody>
-          <a:bodyPr wrap="square" lIns="0" tIns="0" rIns="0" bIns="0" rtlCol="0" anchor="ctr"/>
-          <a:lstStyle/>
-          <a:p>
-            <a:pPr algn="ctr" indent="0" marL="0">
-              <a:buNone/>
-            </a:pPr>
-            <a:r>
-              <a:rPr lang="en-US" sz="1300" b="1" dirty="0">
-                <a:solidFill>
-                  <a:srgbClr val="FFFFFF"/>
-                </a:solidFill>
-                <a:latin typeface="Calibri" pitchFamily="34" charset="0"/>
-                <a:ea typeface="Calibri" pitchFamily="34" charset="-122"/>
-                <a:cs typeface="Calibri" pitchFamily="34" charset="-120"/>
-              </a:rPr>
-              <a:t>React</a:t>
-            </a:r>
-            <a:endParaRPr lang="en-US" sz="1300" dirty="0"/>
-          </a:p>
-        </p:txBody>
-      </p:sp>
-      <p:sp>
-        <p:nvSpPr>
-          <p:cNvPr id="7" name="Text 4"/>
-          <p:cNvSpPr/>
-          <p:nvPr/>
-        </p:nvSpPr>
-        <p:spPr>
-          <a:xfrm>
-            <a:off x="274320" y="2103120"/>
-            <a:ext cx="1920240" cy="502920"/>
-          </a:xfrm>
-          <a:prstGeom prst="rect">
-            <a:avLst/>
-          </a:prstGeom>
-          <a:noFill/>
-          <a:ln/>
-        </p:spPr>
-        <p:txBody>
-          <a:bodyPr wrap="square" lIns="0" tIns="0" rIns="0" bIns="0" rtlCol="0" anchor="ctr"/>
-          <a:lstStyle/>
-          <a:p>
-            <a:pPr algn="ctr" indent="0" marL="0">
-              <a:buNone/>
-            </a:pPr>
-            <a:r>
-              <a:rPr lang="en-US" sz="1100" dirty="0">
-                <a:solidFill>
-                  <a:srgbClr val="ECEFF1"/>
-                </a:solidFill>
-                <a:latin typeface="Calibri" pitchFamily="34" charset="0"/>
-                <a:ea typeface="Calibri" pitchFamily="34" charset="-122"/>
-                <a:cs typeface="Calibri" pitchFamily="34" charset="-120"/>
-              </a:rPr>
-              <a:t>UI / composants</a:t>
-            </a:r>
-            <a:endParaRPr lang="en-US" sz="1100" dirty="0"/>
-          </a:p>
-        </p:txBody>
-      </p:sp>
-      <p:sp>
-        <p:nvSpPr>
-          <p:cNvPr id="8" name="Shape 5"/>
-          <p:cNvSpPr/>
-          <p:nvPr/>
-        </p:nvSpPr>
-        <p:spPr>
-          <a:xfrm>
-            <a:off x="2331720" y="868680"/>
-            <a:ext cx="1920240" cy="2103120"/>
-          </a:xfrm>
-          <a:prstGeom prst="roundRect">
-            <a:avLst>
-              <a:gd name="adj" fmla="val 5714"/>
-            </a:avLst>
-          </a:prstGeom>
-          <a:solidFill>
-            <a:srgbClr val="00838F"/>
-          </a:solidFill>
-          <a:ln/>
-          <a:effectLst>
-            <a:outerShdw sx="100000" sy="100000" kx="0" ky="0" algn="bl" rotWithShape="0" blurRad="101600" dist="38100" dir="2700000">
-              <a:srgbClr val="000000">
-                <a:alpha val="13000"/>
-              </a:srgbClr>
-            </a:outerShdw>
-          </a:effectLst>
-        </p:spPr>
-      </p:sp>
-      <p:pic>
-        <p:nvPicPr>
-          <p:cNvPr id="9" name="Image 1" descr="preencoded.png">    </p:cNvPr>
-          <p:cNvPicPr>
-            <a:picLocks noChangeAspect="1"/>
-          </p:cNvPicPr>
-          <p:nvPr/>
-        </p:nvPicPr>
-        <p:blipFill>
-          <a:blip r:embed="rId2"/>
-          <a:stretch>
-            <a:fillRect/>
-          </a:stretch>
-        </p:blipFill>
-        <p:spPr>
-          <a:xfrm>
-            <a:off x="3063240" y="1051560"/>
-            <a:ext cx="457200" cy="457200"/>
-          </a:xfrm>
-          <a:prstGeom prst="rect">
-            <a:avLst/>
-          </a:prstGeom>
-        </p:spPr>
-      </p:pic>
-      <p:sp>
-        <p:nvSpPr>
-          <p:cNvPr id="10" name="Text 6"/>
-          <p:cNvSpPr/>
-          <p:nvPr/>
-        </p:nvSpPr>
-        <p:spPr>
-          <a:xfrm>
-            <a:off x="2331720" y="1645920"/>
-            <a:ext cx="1920240" cy="411480"/>
-          </a:xfrm>
-          <a:prstGeom prst="rect">
-            <a:avLst/>
-          </a:prstGeom>
-          <a:noFill/>
-          <a:ln/>
-        </p:spPr>
-        <p:txBody>
-          <a:bodyPr wrap="square" lIns="0" tIns="0" rIns="0" bIns="0" rtlCol="0" anchor="ctr"/>
-          <a:lstStyle/>
-          <a:p>
-            <a:pPr algn="ctr" indent="0" marL="0">
-              <a:buNone/>
-            </a:pPr>
-            <a:r>
-              <a:rPr lang="en-US" sz="1300" b="1" dirty="0">
-                <a:solidFill>
-                  <a:srgbClr val="FFFFFF"/>
-                </a:solidFill>
-                <a:latin typeface="Calibri" pitchFamily="34" charset="0"/>
-                <a:ea typeface="Calibri" pitchFamily="34" charset="-122"/>
-                <a:cs typeface="Calibri" pitchFamily="34" charset="-120"/>
-              </a:rPr>
-              <a:t>React Router</a:t>
-            </a:r>
-            <a:endParaRPr lang="en-US" sz="1300" dirty="0"/>
-          </a:p>
-        </p:txBody>
-      </p:sp>
-      <p:sp>
-        <p:nvSpPr>
-          <p:cNvPr id="11" name="Text 7"/>
-          <p:cNvSpPr/>
-          <p:nvPr/>
-        </p:nvSpPr>
-        <p:spPr>
-          <a:xfrm>
-            <a:off x="2331720" y="2103120"/>
-            <a:ext cx="1920240" cy="502920"/>
-          </a:xfrm>
-          <a:prstGeom prst="rect">
-            <a:avLst/>
-          </a:prstGeom>
-          <a:noFill/>
-          <a:ln/>
-        </p:spPr>
-        <p:txBody>
-          <a:bodyPr wrap="square" lIns="0" tIns="0" rIns="0" bIns="0" rtlCol="0" anchor="ctr"/>
-          <a:lstStyle/>
-          <a:p>
-            <a:pPr algn="ctr" indent="0" marL="0">
-              <a:buNone/>
-            </a:pPr>
-            <a:r>
-              <a:rPr lang="en-US" sz="1100" dirty="0">
-                <a:solidFill>
-                  <a:srgbClr val="ECEFF1"/>
-                </a:solidFill>
-                <a:latin typeface="Calibri" pitchFamily="34" charset="0"/>
-                <a:ea typeface="Calibri" pitchFamily="34" charset="-122"/>
-                <a:cs typeface="Calibri" pitchFamily="34" charset="-120"/>
-              </a:rPr>
-              <a:t>Navigation SPA</a:t>
-            </a:r>
-            <a:endParaRPr lang="en-US" sz="1100" dirty="0"/>
-          </a:p>
-        </p:txBody>
-      </p:sp>
-      <p:sp>
-        <p:nvSpPr>
-          <p:cNvPr id="12" name="Shape 8"/>
-          <p:cNvSpPr/>
-          <p:nvPr/>
-        </p:nvSpPr>
-        <p:spPr>
-          <a:xfrm>
-            <a:off x="4389120" y="868680"/>
-            <a:ext cx="1920240" cy="2103120"/>
-          </a:xfrm>
-          <a:prstGeom prst="roundRect">
-            <a:avLst>
-              <a:gd name="adj" fmla="val 5714"/>
-            </a:avLst>
-          </a:prstGeom>
-          <a:solidFill>
-            <a:srgbClr val="1565C0"/>
-          </a:solidFill>
-          <a:ln/>
-          <a:effectLst>
-            <a:outerShdw sx="100000" sy="100000" kx="0" ky="0" algn="bl" rotWithShape="0" blurRad="101600" dist="38100" dir="2700000">
-              <a:srgbClr val="000000">
-                <a:alpha val="13000"/>
-              </a:srgbClr>
-            </a:outerShdw>
-          </a:effectLst>
-        </p:spPr>
-      </p:sp>
-      <p:pic>
-        <p:nvPicPr>
-          <p:cNvPr id="13" name="Image 2" descr="preencoded.png">    </p:cNvPr>
+          <p:cNvPr id="3" name="Image 0" descr="preencoded.png"/>
           <p:cNvPicPr>
             <a:picLocks noChangeAspect="1"/>
           </p:cNvPicPr>
@@ -5942,8 +5081,8 @@
         </p:blipFill>
         <p:spPr>
           <a:xfrm>
-            <a:off x="5120640" y="1051560"/>
-            <a:ext cx="457200" cy="457200"/>
+            <a:off x="182880" y="64008"/>
+            <a:ext cx="566928" cy="566928"/>
           </a:xfrm>
           <a:prstGeom prst="rect">
             <a:avLst/>
@@ -5952,14 +5091,14 @@
       </p:pic>
       <p:sp>
         <p:nvSpPr>
-          <p:cNvPr id="14" name="Text 9"/>
-          <p:cNvSpPr/>
-          <p:nvPr/>
-        </p:nvSpPr>
-        <p:spPr>
-          <a:xfrm>
-            <a:off x="4389120" y="1645920"/>
-            <a:ext cx="1920240" cy="411480"/>
+          <p:cNvPr id="4" name="Text 1"/>
+          <p:cNvSpPr/>
+          <p:nvPr/>
+        </p:nvSpPr>
+        <p:spPr>
+          <a:xfrm>
+            <a:off x="841248" y="45720"/>
+            <a:ext cx="7955280" cy="640080"/>
           </a:xfrm>
           <a:prstGeom prst="rect">
             <a:avLst/>
@@ -5971,11 +5110,11 @@
           <a:bodyPr wrap="square" lIns="0" tIns="0" rIns="0" bIns="0" rtlCol="0" anchor="ctr"/>
           <a:lstStyle/>
           <a:p>
-            <a:pPr algn="ctr" indent="0" marL="0">
-              <a:buNone/>
-            </a:pPr>
-            <a:r>
-              <a:rPr lang="en-US" sz="1300" b="1" dirty="0">
+            <a:pPr marL="0" indent="0" algn="l">
+              <a:buNone/>
+            </a:pPr>
+            <a:r>
+              <a:rPr lang="en-US" sz="2600" b="1" dirty="0">
                 <a:solidFill>
                   <a:srgbClr val="FFFFFF"/>
                 </a:solidFill>
@@ -5983,83 +5122,401 @@
                 <a:ea typeface="Calibri" pitchFamily="34" charset="-122"/>
                 <a:cs typeface="Calibri" pitchFamily="34" charset="-120"/>
               </a:rPr>
-              <a:t>Axios</a:t>
-            </a:r>
-            <a:endParaRPr lang="en-US" sz="1300" dirty="0"/>
-          </a:p>
-        </p:txBody>
-      </p:sp>
-      <p:sp>
-        <p:nvSpPr>
-          <p:cNvPr id="15" name="Text 10"/>
-          <p:cNvSpPr/>
-          <p:nvPr/>
-        </p:nvSpPr>
-        <p:spPr>
-          <a:xfrm>
-            <a:off x="4389120" y="2103120"/>
-            <a:ext cx="1920240" cy="502920"/>
-          </a:xfrm>
-          <a:prstGeom prst="rect">
-            <a:avLst/>
-          </a:prstGeom>
-          <a:noFill/>
-          <a:ln/>
-        </p:spPr>
-        <p:txBody>
-          <a:bodyPr wrap="square" lIns="0" tIns="0" rIns="0" bIns="0" rtlCol="0" anchor="ctr"/>
-          <a:lstStyle/>
-          <a:p>
-            <a:pPr algn="ctr" indent="0" marL="0">
-              <a:buNone/>
-            </a:pPr>
-            <a:r>
-              <a:rPr lang="en-US" sz="1100" dirty="0">
-                <a:solidFill>
-                  <a:srgbClr val="ECEFF1"/>
-                </a:solidFill>
-                <a:latin typeface="Calibri" pitchFamily="34" charset="0"/>
-                <a:ea typeface="Calibri" pitchFamily="34" charset="-122"/>
-                <a:cs typeface="Calibri" pitchFamily="34" charset="-120"/>
-              </a:rPr>
-              <a:t>Appels API REST</a:t>
-            </a:r>
-            <a:endParaRPr lang="en-US" sz="1100" dirty="0"/>
-          </a:p>
-        </p:txBody>
-      </p:sp>
-      <p:sp>
-        <p:nvSpPr>
-          <p:cNvPr id="16" name="Shape 11"/>
-          <p:cNvSpPr/>
-          <p:nvPr/>
-        </p:nvSpPr>
-        <p:spPr>
-          <a:xfrm>
-            <a:off x="6446520" y="868680"/>
-            <a:ext cx="1920240" cy="2103120"/>
+              <a:t>Open Trivia DB</a:t>
+            </a:r>
+            <a:endParaRPr lang="en-US" sz="2600" dirty="0"/>
+          </a:p>
+        </p:txBody>
+      </p:sp>
+      <p:sp>
+        <p:nvSpPr>
+          <p:cNvPr id="8" name="Shape 5"/>
+          <p:cNvSpPr/>
+          <p:nvPr/>
+        </p:nvSpPr>
+        <p:spPr>
+          <a:xfrm>
+            <a:off x="365760" y="2286000"/>
+            <a:ext cx="4023360" cy="2606040"/>
           </a:xfrm>
           <a:prstGeom prst="roundRect">
             <a:avLst>
-              <a:gd name="adj" fmla="val 5714"/>
+              <a:gd name="adj" fmla="val 3509"/>
             </a:avLst>
           </a:prstGeom>
           <a:solidFill>
-            <a:srgbClr val="2E7D32"/>
+            <a:srgbClr val="0A2E0B"/>
           </a:solidFill>
-          <a:ln/>
-          <a:effectLst>
-            <a:outerShdw sx="100000" sy="100000" kx="0" ky="0" algn="bl" rotWithShape="0" blurRad="101600" dist="38100" dir="2700000">
-              <a:srgbClr val="000000">
-                <a:alpha val="13000"/>
-              </a:srgbClr>
-            </a:outerShdw>
-          </a:effectLst>
-        </p:spPr>
+          <a:ln w="12700">
+            <a:solidFill>
+              <a:srgbClr val="388E3C"/>
+            </a:solidFill>
+            <a:prstDash val="solid"/>
+          </a:ln>
+        </p:spPr>
+        <p:txBody>
+          <a:bodyPr/>
+          <a:lstStyle/>
+          <a:p>
+            <a:endParaRPr lang="fr-FR"/>
+          </a:p>
+        </p:txBody>
+      </p:sp>
+      <p:sp>
+        <p:nvSpPr>
+          <p:cNvPr id="9" name="Shape 6"/>
+          <p:cNvSpPr/>
+          <p:nvPr/>
+        </p:nvSpPr>
+        <p:spPr>
+          <a:xfrm>
+            <a:off x="4754880" y="2286000"/>
+            <a:ext cx="4023360" cy="2606040"/>
+          </a:xfrm>
+          <a:prstGeom prst="roundRect">
+            <a:avLst>
+              <a:gd name="adj" fmla="val 3509"/>
+            </a:avLst>
+          </a:prstGeom>
+          <a:solidFill>
+            <a:srgbClr val="2D0A0A"/>
+          </a:solidFill>
+          <a:ln w="12700">
+            <a:solidFill>
+              <a:srgbClr val="C62828"/>
+            </a:solidFill>
+            <a:prstDash val="solid"/>
+          </a:ln>
+        </p:spPr>
+        <p:txBody>
+          <a:bodyPr/>
+          <a:lstStyle/>
+          <a:p>
+            <a:endParaRPr lang="fr-FR"/>
+          </a:p>
+        </p:txBody>
+      </p:sp>
+      <p:sp>
+        <p:nvSpPr>
+          <p:cNvPr id="10" name="Text 7"/>
+          <p:cNvSpPr/>
+          <p:nvPr/>
+        </p:nvSpPr>
+        <p:spPr>
+          <a:xfrm>
+            <a:off x="640080" y="2377440"/>
+            <a:ext cx="3474720" cy="365760"/>
+          </a:xfrm>
+          <a:prstGeom prst="rect">
+            <a:avLst/>
+          </a:prstGeom>
+          <a:noFill/>
+          <a:ln/>
+        </p:spPr>
+        <p:txBody>
+          <a:bodyPr wrap="square" lIns="0" tIns="0" rIns="0" bIns="0" rtlCol="0" anchor="ctr"/>
+          <a:lstStyle/>
+          <a:p>
+            <a:pPr marL="0" indent="0">
+              <a:buNone/>
+            </a:pPr>
+            <a:r>
+              <a:rPr lang="en-US" sz="1400" b="1" dirty="0">
+                <a:solidFill>
+                  <a:srgbClr val="A5D6A7"/>
+                </a:solidFill>
+                <a:latin typeface="Calibri" pitchFamily="34" charset="0"/>
+                <a:ea typeface="Calibri" pitchFamily="34" charset="-122"/>
+                <a:cs typeface="Calibri" pitchFamily="34" charset="-120"/>
+              </a:rPr>
+              <a:t>Avantages</a:t>
+            </a:r>
+            <a:endParaRPr lang="en-US" sz="1400" dirty="0"/>
+          </a:p>
+        </p:txBody>
+      </p:sp>
+      <p:sp>
+        <p:nvSpPr>
+          <p:cNvPr id="12" name="Text 8"/>
+          <p:cNvSpPr/>
+          <p:nvPr/>
+        </p:nvSpPr>
+        <p:spPr>
+          <a:xfrm>
+            <a:off x="914400" y="2852928"/>
+            <a:ext cx="3291840" cy="411480"/>
+          </a:xfrm>
+          <a:prstGeom prst="rect">
+            <a:avLst/>
+          </a:prstGeom>
+          <a:noFill/>
+          <a:ln/>
+        </p:spPr>
+        <p:txBody>
+          <a:bodyPr wrap="square" lIns="0" tIns="0" rIns="0" bIns="0" rtlCol="0" anchor="ctr"/>
+          <a:lstStyle/>
+          <a:p>
+            <a:pPr marL="0" indent="0">
+              <a:buNone/>
+            </a:pPr>
+            <a:r>
+              <a:rPr lang="en-US" sz="1200" dirty="0">
+                <a:solidFill>
+                  <a:srgbClr val="E8F5E9"/>
+                </a:solidFill>
+                <a:latin typeface="Calibri" pitchFamily="34" charset="0"/>
+                <a:ea typeface="Calibri" pitchFamily="34" charset="-122"/>
+                <a:cs typeface="Calibri" pitchFamily="34" charset="-120"/>
+              </a:rPr>
+              <a:t>Gratuite, sans clé API</a:t>
+            </a:r>
+            <a:endParaRPr lang="en-US" sz="1200" dirty="0"/>
+          </a:p>
+        </p:txBody>
+      </p:sp>
+      <p:sp>
+        <p:nvSpPr>
+          <p:cNvPr id="14" name="Text 9"/>
+          <p:cNvSpPr/>
+          <p:nvPr/>
+        </p:nvSpPr>
+        <p:spPr>
+          <a:xfrm>
+            <a:off x="914400" y="3401568"/>
+            <a:ext cx="3291840" cy="411480"/>
+          </a:xfrm>
+          <a:prstGeom prst="rect">
+            <a:avLst/>
+          </a:prstGeom>
+          <a:noFill/>
+          <a:ln/>
+        </p:spPr>
+        <p:txBody>
+          <a:bodyPr wrap="square" lIns="0" tIns="0" rIns="0" bIns="0" rtlCol="0" anchor="ctr"/>
+          <a:lstStyle/>
+          <a:p>
+            <a:pPr marL="0" indent="0">
+              <a:buNone/>
+            </a:pPr>
+            <a:r>
+              <a:rPr lang="en-US" sz="1200" dirty="0">
+                <a:solidFill>
+                  <a:srgbClr val="E8F5E9"/>
+                </a:solidFill>
+                <a:latin typeface="Calibri" pitchFamily="34" charset="0"/>
+                <a:ea typeface="Calibri" pitchFamily="34" charset="-122"/>
+                <a:cs typeface="Calibri" pitchFamily="34" charset="-120"/>
+              </a:rPr>
+              <a:t>Données prêtes à l'emploi</a:t>
+            </a:r>
+            <a:endParaRPr lang="en-US" sz="1200" dirty="0"/>
+          </a:p>
+        </p:txBody>
+      </p:sp>
+      <p:sp>
+        <p:nvSpPr>
+          <p:cNvPr id="16" name="Text 10"/>
+          <p:cNvSpPr/>
+          <p:nvPr/>
+        </p:nvSpPr>
+        <p:spPr>
+          <a:xfrm>
+            <a:off x="914400" y="3950208"/>
+            <a:ext cx="3291840" cy="411480"/>
+          </a:xfrm>
+          <a:prstGeom prst="rect">
+            <a:avLst/>
+          </a:prstGeom>
+          <a:noFill/>
+          <a:ln/>
+        </p:spPr>
+        <p:txBody>
+          <a:bodyPr wrap="square" lIns="0" tIns="0" rIns="0" bIns="0" rtlCol="0" anchor="ctr"/>
+          <a:lstStyle/>
+          <a:p>
+            <a:pPr marL="0" indent="0">
+              <a:buNone/>
+            </a:pPr>
+            <a:r>
+              <a:rPr lang="en-US" sz="1200" dirty="0">
+                <a:solidFill>
+                  <a:srgbClr val="E8F5E9"/>
+                </a:solidFill>
+                <a:latin typeface="Calibri" pitchFamily="34" charset="0"/>
+                <a:ea typeface="Calibri" pitchFamily="34" charset="-122"/>
+                <a:cs typeface="Calibri" pitchFamily="34" charset="-120"/>
+              </a:rPr>
+              <a:t>Filtrage URL simple</a:t>
+            </a:r>
+            <a:endParaRPr lang="en-US" sz="1200" dirty="0"/>
+          </a:p>
+        </p:txBody>
+      </p:sp>
+      <p:sp>
+        <p:nvSpPr>
+          <p:cNvPr id="17" name="Text 11"/>
+          <p:cNvSpPr/>
+          <p:nvPr/>
+        </p:nvSpPr>
+        <p:spPr>
+          <a:xfrm>
+            <a:off x="4937760" y="2377440"/>
+            <a:ext cx="3474720" cy="365760"/>
+          </a:xfrm>
+          <a:prstGeom prst="rect">
+            <a:avLst/>
+          </a:prstGeom>
+          <a:noFill/>
+          <a:ln/>
+        </p:spPr>
+        <p:txBody>
+          <a:bodyPr wrap="square" lIns="0" tIns="0" rIns="0" bIns="0" rtlCol="0" anchor="ctr"/>
+          <a:lstStyle/>
+          <a:p>
+            <a:pPr marL="0" indent="0">
+              <a:buNone/>
+            </a:pPr>
+            <a:r>
+              <a:rPr lang="en-US" sz="1400" b="1" dirty="0">
+                <a:solidFill>
+                  <a:srgbClr val="EF9A9A"/>
+                </a:solidFill>
+                <a:latin typeface="Calibri" pitchFamily="34" charset="0"/>
+                <a:ea typeface="Calibri" pitchFamily="34" charset="-122"/>
+                <a:cs typeface="Calibri" pitchFamily="34" charset="-120"/>
+              </a:rPr>
+              <a:t>Inconvénients</a:t>
+            </a:r>
+            <a:endParaRPr lang="en-US" sz="1400" dirty="0"/>
+          </a:p>
+        </p:txBody>
+      </p:sp>
+      <p:sp>
+        <p:nvSpPr>
+          <p:cNvPr id="19" name="Text 12"/>
+          <p:cNvSpPr/>
+          <p:nvPr/>
+        </p:nvSpPr>
+        <p:spPr>
+          <a:xfrm>
+            <a:off x="5212080" y="2852928"/>
+            <a:ext cx="3291840" cy="411480"/>
+          </a:xfrm>
+          <a:prstGeom prst="rect">
+            <a:avLst/>
+          </a:prstGeom>
+          <a:noFill/>
+          <a:ln/>
+        </p:spPr>
+        <p:txBody>
+          <a:bodyPr wrap="square" lIns="0" tIns="0" rIns="0" bIns="0" rtlCol="0" anchor="ctr"/>
+          <a:lstStyle/>
+          <a:p>
+            <a:pPr marL="0" indent="0">
+              <a:buNone/>
+            </a:pPr>
+            <a:r>
+              <a:rPr lang="en-US" sz="1200" dirty="0">
+                <a:solidFill>
+                  <a:srgbClr val="FFCDD2"/>
+                </a:solidFill>
+                <a:latin typeface="Calibri" pitchFamily="34" charset="0"/>
+                <a:ea typeface="Calibri" pitchFamily="34" charset="-122"/>
+                <a:cs typeface="Calibri" pitchFamily="34" charset="-120"/>
+              </a:rPr>
+              <a:t>Rate limiting (HTTP 429)</a:t>
+            </a:r>
+            <a:endParaRPr lang="en-US" sz="1200" dirty="0"/>
+          </a:p>
+        </p:txBody>
+      </p:sp>
+      <p:sp>
+        <p:nvSpPr>
+          <p:cNvPr id="21" name="Text 13"/>
+          <p:cNvSpPr/>
+          <p:nvPr/>
+        </p:nvSpPr>
+        <p:spPr>
+          <a:xfrm>
+            <a:off x="5212080" y="3401568"/>
+            <a:ext cx="3291840" cy="411480"/>
+          </a:xfrm>
+          <a:prstGeom prst="rect">
+            <a:avLst/>
+          </a:prstGeom>
+          <a:noFill/>
+          <a:ln/>
+        </p:spPr>
+        <p:txBody>
+          <a:bodyPr wrap="square" lIns="0" tIns="0" rIns="0" bIns="0" rtlCol="0" anchor="ctr"/>
+          <a:lstStyle/>
+          <a:p>
+            <a:pPr marL="0" indent="0">
+              <a:buNone/>
+            </a:pPr>
+            <a:r>
+              <a:rPr lang="en-US" sz="1200" dirty="0">
+                <a:solidFill>
+                  <a:srgbClr val="FFCDD2"/>
+                </a:solidFill>
+                <a:latin typeface="Calibri" pitchFamily="34" charset="0"/>
+                <a:ea typeface="Calibri" pitchFamily="34" charset="-122"/>
+                <a:cs typeface="Calibri" pitchFamily="34" charset="-120"/>
+              </a:rPr>
+              <a:t>Texte encodé HTML (&amp;amp;)</a:t>
+            </a:r>
+            <a:endParaRPr lang="en-US" sz="1200" dirty="0"/>
+          </a:p>
+        </p:txBody>
+      </p:sp>
+      <p:sp>
+        <p:nvSpPr>
+          <p:cNvPr id="23" name="Text 14"/>
+          <p:cNvSpPr/>
+          <p:nvPr/>
+        </p:nvSpPr>
+        <p:spPr>
+          <a:xfrm>
+            <a:off x="5212080" y="3950208"/>
+            <a:ext cx="3291840" cy="411480"/>
+          </a:xfrm>
+          <a:prstGeom prst="rect">
+            <a:avLst/>
+          </a:prstGeom>
+          <a:noFill/>
+          <a:ln/>
+        </p:spPr>
+        <p:txBody>
+          <a:bodyPr wrap="square" lIns="0" tIns="0" rIns="0" bIns="0" rtlCol="0" anchor="ctr"/>
+          <a:lstStyle/>
+          <a:p>
+            <a:pPr marL="0" indent="0">
+              <a:buNone/>
+            </a:pPr>
+            <a:r>
+              <a:rPr lang="en-US" sz="1200" dirty="0">
+                <a:solidFill>
+                  <a:srgbClr val="FFCDD2"/>
+                </a:solidFill>
+                <a:latin typeface="Calibri" pitchFamily="34" charset="0"/>
+                <a:ea typeface="Calibri" pitchFamily="34" charset="-122"/>
+                <a:cs typeface="Calibri" pitchFamily="34" charset="-120"/>
+              </a:rPr>
+              <a:t>Contenu en anglais seulement</a:t>
+            </a:r>
+            <a:endParaRPr lang="en-US" sz="1200" dirty="0"/>
+          </a:p>
+        </p:txBody>
       </p:sp>
       <p:pic>
         <p:nvPicPr>
-          <p:cNvPr id="17" name="Image 3" descr="preencoded.png">    </p:cNvPr>
+          <p:cNvPr id="25" name="Image 24">
+            <a:extLst>
+              <a:ext uri="{FF2B5EF4-FFF2-40B4-BE49-F238E27FC236}">
+                <a16:creationId xmlns:a16="http://schemas.microsoft.com/office/drawing/2014/main" id="{2B9422FC-60F4-72C8-8994-A1E29ED923D2}"/>
+              </a:ext>
+            </a:extLst>
+          </p:cNvPr>
           <p:cNvPicPr>
             <a:picLocks noChangeAspect="1"/>
           </p:cNvPicPr>
@@ -6073,485 +5530,14 @@
         </p:blipFill>
         <p:spPr>
           <a:xfrm>
-            <a:off x="7178040" y="1051560"/>
-            <a:ext cx="457200" cy="457200"/>
+            <a:off x="1111736" y="1005840"/>
+            <a:ext cx="6920527" cy="1024986"/>
           </a:xfrm>
           <a:prstGeom prst="rect">
             <a:avLst/>
           </a:prstGeom>
         </p:spPr>
       </p:pic>
-      <p:sp>
-        <p:nvSpPr>
-          <p:cNvPr id="18" name="Text 12"/>
-          <p:cNvSpPr/>
-          <p:nvPr/>
-        </p:nvSpPr>
-        <p:spPr>
-          <a:xfrm>
-            <a:off x="6446520" y="1645920"/>
-            <a:ext cx="1920240" cy="411480"/>
-          </a:xfrm>
-          <a:prstGeom prst="rect">
-            <a:avLst/>
-          </a:prstGeom>
-          <a:noFill/>
-          <a:ln/>
-        </p:spPr>
-        <p:txBody>
-          <a:bodyPr wrap="square" lIns="0" tIns="0" rIns="0" bIns="0" rtlCol="0" anchor="ctr"/>
-          <a:lstStyle/>
-          <a:p>
-            <a:pPr algn="ctr" indent="0" marL="0">
-              <a:buNone/>
-            </a:pPr>
-            <a:r>
-              <a:rPr lang="en-US" sz="1300" b="1" dirty="0">
-                <a:solidFill>
-                  <a:srgbClr val="FFFFFF"/>
-                </a:solidFill>
-                <a:latin typeface="Calibri" pitchFamily="34" charset="0"/>
-                <a:ea typeface="Calibri" pitchFamily="34" charset="-122"/>
-                <a:cs typeface="Calibri" pitchFamily="34" charset="-120"/>
-              </a:rPr>
-              <a:t>Open Trivia DB</a:t>
-            </a:r>
-            <a:endParaRPr lang="en-US" sz="1300" dirty="0"/>
-          </a:p>
-        </p:txBody>
-      </p:sp>
-      <p:sp>
-        <p:nvSpPr>
-          <p:cNvPr id="19" name="Text 13"/>
-          <p:cNvSpPr/>
-          <p:nvPr/>
-        </p:nvSpPr>
-        <p:spPr>
-          <a:xfrm>
-            <a:off x="6446520" y="2103120"/>
-            <a:ext cx="1920240" cy="502920"/>
-          </a:xfrm>
-          <a:prstGeom prst="rect">
-            <a:avLst/>
-          </a:prstGeom>
-          <a:noFill/>
-          <a:ln/>
-        </p:spPr>
-        <p:txBody>
-          <a:bodyPr wrap="square" lIns="0" tIns="0" rIns="0" bIns="0" rtlCol="0" anchor="ctr"/>
-          <a:lstStyle/>
-          <a:p>
-            <a:pPr algn="ctr" indent="0" marL="0">
-              <a:buNone/>
-            </a:pPr>
-            <a:r>
-              <a:rPr lang="en-US" sz="1100" dirty="0">
-                <a:solidFill>
-                  <a:srgbClr val="ECEFF1"/>
-                </a:solidFill>
-                <a:latin typeface="Calibri" pitchFamily="34" charset="0"/>
-                <a:ea typeface="Calibri" pitchFamily="34" charset="-122"/>
-                <a:cs typeface="Calibri" pitchFamily="34" charset="-120"/>
-              </a:rPr>
-              <a:t>Questions quiz</a:t>
-            </a:r>
-            <a:endParaRPr lang="en-US" sz="1100" dirty="0"/>
-          </a:p>
-        </p:txBody>
-      </p:sp>
-      <p:sp>
-        <p:nvSpPr>
-          <p:cNvPr id="20" name="Shape 14"/>
-          <p:cNvSpPr/>
-          <p:nvPr/>
-        </p:nvSpPr>
-        <p:spPr>
-          <a:xfrm>
-            <a:off x="1280160" y="2743200"/>
-            <a:ext cx="1920240" cy="2103120"/>
-          </a:xfrm>
-          <a:prstGeom prst="roundRect">
-            <a:avLst>
-              <a:gd name="adj" fmla="val 5714"/>
-            </a:avLst>
-          </a:prstGeom>
-          <a:solidFill>
-            <a:srgbClr val="6A1B9A"/>
-          </a:solidFill>
-          <a:ln/>
-          <a:effectLst>
-            <a:outerShdw sx="100000" sy="100000" kx="0" ky="0" algn="bl" rotWithShape="0" blurRad="101600" dist="38100" dir="2700000">
-              <a:srgbClr val="000000">
-                <a:alpha val="13000"/>
-              </a:srgbClr>
-            </a:outerShdw>
-          </a:effectLst>
-        </p:spPr>
-      </p:sp>
-      <p:pic>
-        <p:nvPicPr>
-          <p:cNvPr id="21" name="Image 4" descr="preencoded.png">    </p:cNvPr>
-          <p:cNvPicPr>
-            <a:picLocks noChangeAspect="1"/>
-          </p:cNvPicPr>
-          <p:nvPr/>
-        </p:nvPicPr>
-        <p:blipFill>
-          <a:blip r:embed="rId5"/>
-          <a:stretch>
-            <a:fillRect/>
-          </a:stretch>
-        </p:blipFill>
-        <p:spPr>
-          <a:xfrm>
-            <a:off x="2011680" y="2926080"/>
-            <a:ext cx="457200" cy="457200"/>
-          </a:xfrm>
-          <a:prstGeom prst="rect">
-            <a:avLst/>
-          </a:prstGeom>
-        </p:spPr>
-      </p:pic>
-      <p:sp>
-        <p:nvSpPr>
-          <p:cNvPr id="22" name="Text 15"/>
-          <p:cNvSpPr/>
-          <p:nvPr/>
-        </p:nvSpPr>
-        <p:spPr>
-          <a:xfrm>
-            <a:off x="1280160" y="3520440"/>
-            <a:ext cx="1920240" cy="411480"/>
-          </a:xfrm>
-          <a:prstGeom prst="rect">
-            <a:avLst/>
-          </a:prstGeom>
-          <a:noFill/>
-          <a:ln/>
-        </p:spPr>
-        <p:txBody>
-          <a:bodyPr wrap="square" lIns="0" tIns="0" rIns="0" bIns="0" rtlCol="0" anchor="ctr"/>
-          <a:lstStyle/>
-          <a:p>
-            <a:pPr algn="ctr" indent="0" marL="0">
-              <a:buNone/>
-            </a:pPr>
-            <a:r>
-              <a:rPr lang="en-US" sz="1300" b="1" dirty="0">
-                <a:solidFill>
-                  <a:srgbClr val="FFFFFF"/>
-                </a:solidFill>
-                <a:latin typeface="Calibri" pitchFamily="34" charset="0"/>
-                <a:ea typeface="Calibri" pitchFamily="34" charset="-122"/>
-                <a:cs typeface="Calibri" pitchFamily="34" charset="-120"/>
-              </a:rPr>
-              <a:t>CSS Variables</a:t>
-            </a:r>
-            <a:endParaRPr lang="en-US" sz="1300" dirty="0"/>
-          </a:p>
-        </p:txBody>
-      </p:sp>
-      <p:sp>
-        <p:nvSpPr>
-          <p:cNvPr id="23" name="Text 16"/>
-          <p:cNvSpPr/>
-          <p:nvPr/>
-        </p:nvSpPr>
-        <p:spPr>
-          <a:xfrm>
-            <a:off x="1280160" y="3977640"/>
-            <a:ext cx="1920240" cy="502920"/>
-          </a:xfrm>
-          <a:prstGeom prst="rect">
-            <a:avLst/>
-          </a:prstGeom>
-          <a:noFill/>
-          <a:ln/>
-        </p:spPr>
-        <p:txBody>
-          <a:bodyPr wrap="square" lIns="0" tIns="0" rIns="0" bIns="0" rtlCol="0" anchor="ctr"/>
-          <a:lstStyle/>
-          <a:p>
-            <a:pPr algn="ctr" indent="0" marL="0">
-              <a:buNone/>
-            </a:pPr>
-            <a:r>
-              <a:rPr lang="en-US" sz="1100" dirty="0">
-                <a:solidFill>
-                  <a:srgbClr val="ECEFF1"/>
-                </a:solidFill>
-                <a:latin typeface="Calibri" pitchFamily="34" charset="0"/>
-                <a:ea typeface="Calibri" pitchFamily="34" charset="-122"/>
-                <a:cs typeface="Calibri" pitchFamily="34" charset="-120"/>
-              </a:rPr>
-              <a:t>Thème sombre/clair</a:t>
-            </a:r>
-            <a:endParaRPr lang="en-US" sz="1100" dirty="0"/>
-          </a:p>
-        </p:txBody>
-      </p:sp>
-      <p:sp>
-        <p:nvSpPr>
-          <p:cNvPr id="24" name="Shape 17"/>
-          <p:cNvSpPr/>
-          <p:nvPr/>
-        </p:nvSpPr>
-        <p:spPr>
-          <a:xfrm>
-            <a:off x="3337560" y="2743200"/>
-            <a:ext cx="1920240" cy="2103120"/>
-          </a:xfrm>
-          <a:prstGeom prst="roundRect">
-            <a:avLst>
-              <a:gd name="adj" fmla="val 5714"/>
-            </a:avLst>
-          </a:prstGeom>
-          <a:solidFill>
-            <a:srgbClr val="E65100"/>
-          </a:solidFill>
-          <a:ln/>
-          <a:effectLst>
-            <a:outerShdw sx="100000" sy="100000" kx="0" ky="0" algn="bl" rotWithShape="0" blurRad="101600" dist="38100" dir="2700000">
-              <a:srgbClr val="000000">
-                <a:alpha val="13000"/>
-              </a:srgbClr>
-            </a:outerShdw>
-          </a:effectLst>
-        </p:spPr>
-      </p:sp>
-      <p:pic>
-        <p:nvPicPr>
-          <p:cNvPr id="25" name="Image 5" descr="preencoded.png">    </p:cNvPr>
-          <p:cNvPicPr>
-            <a:picLocks noChangeAspect="1"/>
-          </p:cNvPicPr>
-          <p:nvPr/>
-        </p:nvPicPr>
-        <p:blipFill>
-          <a:blip r:embed="rId6"/>
-          <a:stretch>
-            <a:fillRect/>
-          </a:stretch>
-        </p:blipFill>
-        <p:spPr>
-          <a:xfrm>
-            <a:off x="4069080" y="2926080"/>
-            <a:ext cx="457200" cy="457200"/>
-          </a:xfrm>
-          <a:prstGeom prst="rect">
-            <a:avLst/>
-          </a:prstGeom>
-        </p:spPr>
-      </p:pic>
-      <p:sp>
-        <p:nvSpPr>
-          <p:cNvPr id="26" name="Text 18"/>
-          <p:cNvSpPr/>
-          <p:nvPr/>
-        </p:nvSpPr>
-        <p:spPr>
-          <a:xfrm>
-            <a:off x="3337560" y="3520440"/>
-            <a:ext cx="1920240" cy="411480"/>
-          </a:xfrm>
-          <a:prstGeom prst="rect">
-            <a:avLst/>
-          </a:prstGeom>
-          <a:noFill/>
-          <a:ln/>
-        </p:spPr>
-        <p:txBody>
-          <a:bodyPr wrap="square" lIns="0" tIns="0" rIns="0" bIns="0" rtlCol="0" anchor="ctr"/>
-          <a:lstStyle/>
-          <a:p>
-            <a:pPr algn="ctr" indent="0" marL="0">
-              <a:buNone/>
-            </a:pPr>
-            <a:r>
-              <a:rPr lang="en-US" sz="1300" b="1" dirty="0">
-                <a:solidFill>
-                  <a:srgbClr val="FFFFFF"/>
-                </a:solidFill>
-                <a:latin typeface="Calibri" pitchFamily="34" charset="0"/>
-                <a:ea typeface="Calibri" pitchFamily="34" charset="-122"/>
-                <a:cs typeface="Calibri" pitchFamily="34" charset="-120"/>
-              </a:rPr>
-              <a:t>i18n maison</a:t>
-            </a:r>
-            <a:endParaRPr lang="en-US" sz="1300" dirty="0"/>
-          </a:p>
-        </p:txBody>
-      </p:sp>
-      <p:sp>
-        <p:nvSpPr>
-          <p:cNvPr id="27" name="Text 19"/>
-          <p:cNvSpPr/>
-          <p:nvPr/>
-        </p:nvSpPr>
-        <p:spPr>
-          <a:xfrm>
-            <a:off x="3337560" y="3977640"/>
-            <a:ext cx="1920240" cy="502920"/>
-          </a:xfrm>
-          <a:prstGeom prst="rect">
-            <a:avLst/>
-          </a:prstGeom>
-          <a:noFill/>
-          <a:ln/>
-        </p:spPr>
-        <p:txBody>
-          <a:bodyPr wrap="square" lIns="0" tIns="0" rIns="0" bIns="0" rtlCol="0" anchor="ctr"/>
-          <a:lstStyle/>
-          <a:p>
-            <a:pPr algn="ctr" indent="0" marL="0">
-              <a:buNone/>
-            </a:pPr>
-            <a:r>
-              <a:rPr lang="en-US" sz="1100" dirty="0">
-                <a:solidFill>
-                  <a:srgbClr val="ECEFF1"/>
-                </a:solidFill>
-                <a:latin typeface="Calibri" pitchFamily="34" charset="0"/>
-                <a:ea typeface="Calibri" pitchFamily="34" charset="-122"/>
-                <a:cs typeface="Calibri" pitchFamily="34" charset="-120"/>
-              </a:rPr>
-              <a:t>FR / EN</a:t>
-            </a:r>
-            <a:endParaRPr lang="en-US" sz="1100" dirty="0"/>
-          </a:p>
-        </p:txBody>
-      </p:sp>
-      <p:sp>
-        <p:nvSpPr>
-          <p:cNvPr id="28" name="Shape 20"/>
-          <p:cNvSpPr/>
-          <p:nvPr/>
-        </p:nvSpPr>
-        <p:spPr>
-          <a:xfrm>
-            <a:off x="5394960" y="2743200"/>
-            <a:ext cx="1920240" cy="2103120"/>
-          </a:xfrm>
-          <a:prstGeom prst="roundRect">
-            <a:avLst>
-              <a:gd name="adj" fmla="val 5714"/>
-            </a:avLst>
-          </a:prstGeom>
-          <a:solidFill>
-            <a:srgbClr val="AD1457"/>
-          </a:solidFill>
-          <a:ln/>
-          <a:effectLst>
-            <a:outerShdw sx="100000" sy="100000" kx="0" ky="0" algn="bl" rotWithShape="0" blurRad="101600" dist="38100" dir="2700000">
-              <a:srgbClr val="000000">
-                <a:alpha val="13000"/>
-              </a:srgbClr>
-            </a:outerShdw>
-          </a:effectLst>
-        </p:spPr>
-      </p:sp>
-      <p:pic>
-        <p:nvPicPr>
-          <p:cNvPr id="29" name="Image 6" descr="preencoded.png">    </p:cNvPr>
-          <p:cNvPicPr>
-            <a:picLocks noChangeAspect="1"/>
-          </p:cNvPicPr>
-          <p:nvPr/>
-        </p:nvPicPr>
-        <p:blipFill>
-          <a:blip r:embed="rId7"/>
-          <a:stretch>
-            <a:fillRect/>
-          </a:stretch>
-        </p:blipFill>
-        <p:spPr>
-          <a:xfrm>
-            <a:off x="6126480" y="2926080"/>
-            <a:ext cx="457200" cy="457200"/>
-          </a:xfrm>
-          <a:prstGeom prst="rect">
-            <a:avLst/>
-          </a:prstGeom>
-        </p:spPr>
-      </p:pic>
-      <p:sp>
-        <p:nvSpPr>
-          <p:cNvPr id="30" name="Text 21"/>
-          <p:cNvSpPr/>
-          <p:nvPr/>
-        </p:nvSpPr>
-        <p:spPr>
-          <a:xfrm>
-            <a:off x="5394960" y="3520440"/>
-            <a:ext cx="1920240" cy="411480"/>
-          </a:xfrm>
-          <a:prstGeom prst="rect">
-            <a:avLst/>
-          </a:prstGeom>
-          <a:noFill/>
-          <a:ln/>
-        </p:spPr>
-        <p:txBody>
-          <a:bodyPr wrap="square" lIns="0" tIns="0" rIns="0" bIns="0" rtlCol="0" anchor="ctr"/>
-          <a:lstStyle/>
-          <a:p>
-            <a:pPr algn="ctr" indent="0" marL="0">
-              <a:buNone/>
-            </a:pPr>
-            <a:r>
-              <a:rPr lang="en-US" sz="1300" b="1" dirty="0">
-                <a:solidFill>
-                  <a:srgbClr val="FFFFFF"/>
-                </a:solidFill>
-                <a:latin typeface="Calibri" pitchFamily="34" charset="0"/>
-                <a:ea typeface="Calibri" pitchFamily="34" charset="-122"/>
-                <a:cs typeface="Calibri" pitchFamily="34" charset="-120"/>
-              </a:rPr>
-              <a:t>Gamepad API</a:t>
-            </a:r>
-            <a:endParaRPr lang="en-US" sz="1300" dirty="0"/>
-          </a:p>
-        </p:txBody>
-      </p:sp>
-      <p:sp>
-        <p:nvSpPr>
-          <p:cNvPr id="31" name="Text 22"/>
-          <p:cNvSpPr/>
-          <p:nvPr/>
-        </p:nvSpPr>
-        <p:spPr>
-          <a:xfrm>
-            <a:off x="5394960" y="3977640"/>
-            <a:ext cx="1920240" cy="502920"/>
-          </a:xfrm>
-          <a:prstGeom prst="rect">
-            <a:avLst/>
-          </a:prstGeom>
-          <a:noFill/>
-          <a:ln/>
-        </p:spPr>
-        <p:txBody>
-          <a:bodyPr wrap="square" lIns="0" tIns="0" rIns="0" bIns="0" rtlCol="0" anchor="ctr"/>
-          <a:lstStyle/>
-          <a:p>
-            <a:pPr algn="ctr" indent="0" marL="0">
-              <a:buNone/>
-            </a:pPr>
-            <a:r>
-              <a:rPr lang="en-US" sz="1100" dirty="0">
-                <a:solidFill>
-                  <a:srgbClr val="ECEFF1"/>
-                </a:solidFill>
-                <a:latin typeface="Calibri" pitchFamily="34" charset="0"/>
-                <a:ea typeface="Calibri" pitchFamily="34" charset="-122"/>
-                <a:cs typeface="Calibri" pitchFamily="34" charset="-120"/>
-              </a:rPr>
-              <a:t>Support manette</a:t>
-            </a:r>
-            <a:endParaRPr lang="en-US" sz="1100" dirty="0"/>
-          </a:p>
-        </p:txBody>
-      </p:sp>
     </p:spTree>
   </p:cSld>
   <p:clrMapOvr>
@@ -6562,12 +5548,13 @@
 
 <file path=ppt/slides/slide7.xml><?xml version="1.0" encoding="utf-8"?>
 <p:sld xmlns:a="http://schemas.openxmlformats.org/drawingml/2006/main" xmlns:r="http://schemas.openxmlformats.org/officeDocument/2006/relationships" xmlns:p="http://schemas.openxmlformats.org/presentationml/2006/main">
-  <p:cSld name="Slide 7">
+  <p:cSld name="Slide 6">
     <p:bg>
       <p:bgPr>
         <a:solidFill>
-          <a:srgbClr val="0D1B2A"/>
+          <a:srgbClr val="F0F4FF"/>
         </a:solidFill>
+        <a:effectLst/>
       </p:bgPr>
     </p:bg>
     <p:spTree>
@@ -6599,15 +5586,22 @@
             <a:avLst/>
           </a:prstGeom>
           <a:solidFill>
-            <a:srgbClr val="00838F"/>
+            <a:srgbClr val="1A237E"/>
           </a:solidFill>
           <a:ln w="12700">
             <a:solidFill>
-              <a:srgbClr val="00838F"/>
+              <a:srgbClr val="1A237E"/>
             </a:solidFill>
             <a:prstDash val="solid"/>
           </a:ln>
         </p:spPr>
+        <p:txBody>
+          <a:bodyPr/>
+          <a:lstStyle/>
+          <a:p>
+            <a:endParaRPr lang="fr-FR"/>
+          </a:p>
+        </p:txBody>
       </p:sp>
       <p:sp>
         <p:nvSpPr>
@@ -6630,7 +5624,7 @@
           <a:bodyPr wrap="square" lIns="0" tIns="0" rIns="0" bIns="0" rtlCol="0" anchor="ctr"/>
           <a:lstStyle/>
           <a:p>
-            <a:pPr algn="l" indent="0" marL="0">
+            <a:pPr marL="0" indent="0" algn="l">
               <a:buNone/>
             </a:pPr>
             <a:r>
@@ -6642,7 +5636,7 @@
                 <a:ea typeface="Calibri" pitchFamily="34" charset="-122"/>
                 <a:cs typeface="Calibri" pitchFamily="34" charset="-120"/>
               </a:rPr>
-              <a:t>Ce que j'ai appris</a:t>
+              <a:t>Stack technique</a:t>
             </a:r>
             <a:endParaRPr lang="en-US" sz="2600" dirty="0"/>
           </a:p>
@@ -6656,202 +5650,37 @@
         </p:nvSpPr>
         <p:spPr>
           <a:xfrm>
-            <a:off x="320040" y="886968"/>
-            <a:ext cx="402336" cy="402336"/>
-          </a:xfrm>
-          <a:prstGeom prst="ellipse">
-            <a:avLst/>
+            <a:off x="274320" y="868680"/>
+            <a:ext cx="1920240" cy="2103120"/>
+          </a:xfrm>
+          <a:prstGeom prst="roundRect">
+            <a:avLst>
+              <a:gd name="adj" fmla="val 5714"/>
+            </a:avLst>
           </a:prstGeom>
           <a:solidFill>
-            <a:srgbClr val="1C3A4A"/>
+            <a:srgbClr val="1A237E"/>
           </a:solidFill>
-          <a:ln w="12700">
-            <a:solidFill>
-              <a:srgbClr val="00ACC1"/>
-            </a:solidFill>
-            <a:prstDash val="solid"/>
-          </a:ln>
-        </p:spPr>
+          <a:ln/>
+          <a:effectLst>
+            <a:outerShdw blurRad="101600" dist="38100" dir="2700000" algn="bl" rotWithShape="0">
+              <a:srgbClr val="000000">
+                <a:alpha val="13000"/>
+              </a:srgbClr>
+            </a:outerShdw>
+          </a:effectLst>
+        </p:spPr>
+        <p:txBody>
+          <a:bodyPr/>
+          <a:lstStyle/>
+          <a:p>
+            <a:endParaRPr lang="fr-FR"/>
+          </a:p>
+        </p:txBody>
       </p:sp>
       <p:pic>
         <p:nvPicPr>
-          <p:cNvPr id="5" name="Image 0" descr="preencoded.png">    </p:cNvPr>
-          <p:cNvPicPr>
-            <a:picLocks noChangeAspect="1"/>
-          </p:cNvPicPr>
-          <p:nvPr/>
-        </p:nvPicPr>
-        <p:blipFill>
-          <a:blip r:embed="rId1"/>
-          <a:stretch>
-            <a:fillRect/>
-          </a:stretch>
-        </p:blipFill>
-        <p:spPr>
-          <a:xfrm>
-            <a:off x="356616" y="905256"/>
-            <a:ext cx="329184" cy="329184"/>
-          </a:xfrm>
-          <a:prstGeom prst="rect">
-            <a:avLst/>
-          </a:prstGeom>
-        </p:spPr>
-      </p:pic>
-      <p:sp>
-        <p:nvSpPr>
-          <p:cNvPr id="6" name="Text 3"/>
-          <p:cNvSpPr/>
-          <p:nvPr/>
-        </p:nvSpPr>
-        <p:spPr>
-          <a:xfrm>
-            <a:off x="841248" y="868680"/>
-            <a:ext cx="7955280" cy="493776"/>
-          </a:xfrm>
-          <a:prstGeom prst="rect">
-            <a:avLst/>
-          </a:prstGeom>
-          <a:noFill/>
-          <a:ln/>
-        </p:spPr>
-        <p:txBody>
-          <a:bodyPr wrap="square" lIns="0" tIns="0" rIns="0" bIns="0" rtlCol="0" anchor="ctr"/>
-          <a:lstStyle/>
-          <a:p>
-            <a:pPr algn="l" indent="0" marL="0">
-              <a:buNone/>
-            </a:pPr>
-            <a:r>
-              <a:rPr lang="en-US" sz="1250" dirty="0">
-                <a:solidFill>
-                  <a:srgbClr val="CFD8DC"/>
-                </a:solidFill>
-                <a:latin typeface="Calibri" pitchFamily="34" charset="0"/>
-                <a:ea typeface="Calibri" pitchFamily="34" charset="-122"/>
-                <a:cs typeface="Calibri" pitchFamily="34" charset="-120"/>
-              </a:rPr>
-              <a:t>Structurer une app React en pages, composants et contextes</a:t>
-            </a:r>
-            <a:endParaRPr lang="en-US" sz="1250" dirty="0"/>
-          </a:p>
-        </p:txBody>
-      </p:sp>
-      <p:sp>
-        <p:nvSpPr>
-          <p:cNvPr id="7" name="Shape 4"/>
-          <p:cNvSpPr/>
-          <p:nvPr/>
-        </p:nvSpPr>
-        <p:spPr>
-          <a:xfrm>
-            <a:off x="320040" y="1563624"/>
-            <a:ext cx="402336" cy="402336"/>
-          </a:xfrm>
-          <a:prstGeom prst="ellipse">
-            <a:avLst/>
-          </a:prstGeom>
-          <a:solidFill>
-            <a:srgbClr val="1C3A4A"/>
-          </a:solidFill>
-          <a:ln w="12700">
-            <a:solidFill>
-              <a:srgbClr val="00ACC1"/>
-            </a:solidFill>
-            <a:prstDash val="solid"/>
-          </a:ln>
-        </p:spPr>
-      </p:sp>
-      <p:pic>
-        <p:nvPicPr>
-          <p:cNvPr id="8" name="Image 1" descr="preencoded.png">    </p:cNvPr>
-          <p:cNvPicPr>
-            <a:picLocks noChangeAspect="1"/>
-          </p:cNvPicPr>
-          <p:nvPr/>
-        </p:nvPicPr>
-        <p:blipFill>
-          <a:blip r:embed="rId2"/>
-          <a:stretch>
-            <a:fillRect/>
-          </a:stretch>
-        </p:blipFill>
-        <p:spPr>
-          <a:xfrm>
-            <a:off x="356616" y="1581912"/>
-            <a:ext cx="329184" cy="329184"/>
-          </a:xfrm>
-          <a:prstGeom prst="rect">
-            <a:avLst/>
-          </a:prstGeom>
-        </p:spPr>
-      </p:pic>
-      <p:sp>
-        <p:nvSpPr>
-          <p:cNvPr id="9" name="Text 5"/>
-          <p:cNvSpPr/>
-          <p:nvPr/>
-        </p:nvSpPr>
-        <p:spPr>
-          <a:xfrm>
-            <a:off x="841248" y="1545336"/>
-            <a:ext cx="7955280" cy="493776"/>
-          </a:xfrm>
-          <a:prstGeom prst="rect">
-            <a:avLst/>
-          </a:prstGeom>
-          <a:noFill/>
-          <a:ln/>
-        </p:spPr>
-        <p:txBody>
-          <a:bodyPr wrap="square" lIns="0" tIns="0" rIns="0" bIns="0" rtlCol="0" anchor="ctr"/>
-          <a:lstStyle/>
-          <a:p>
-            <a:pPr algn="l" indent="0" marL="0">
-              <a:buNone/>
-            </a:pPr>
-            <a:r>
-              <a:rPr lang="en-US" sz="1250" dirty="0">
-                <a:solidFill>
-                  <a:srgbClr val="CFD8DC"/>
-                </a:solidFill>
-                <a:latin typeface="Calibri" pitchFamily="34" charset="0"/>
-                <a:ea typeface="Calibri" pitchFamily="34" charset="-122"/>
-                <a:cs typeface="Calibri" pitchFamily="34" charset="-120"/>
-              </a:rPr>
-              <a:t>Maîtriser les hooks et le stale state (useEffect, dépendances)</a:t>
-            </a:r>
-            <a:endParaRPr lang="en-US" sz="1250" dirty="0"/>
-          </a:p>
-        </p:txBody>
-      </p:sp>
-      <p:sp>
-        <p:nvSpPr>
-          <p:cNvPr id="10" name="Shape 6"/>
-          <p:cNvSpPr/>
-          <p:nvPr/>
-        </p:nvSpPr>
-        <p:spPr>
-          <a:xfrm>
-            <a:off x="320040" y="2240280"/>
-            <a:ext cx="402336" cy="402336"/>
-          </a:xfrm>
-          <a:prstGeom prst="ellipse">
-            <a:avLst/>
-          </a:prstGeom>
-          <a:solidFill>
-            <a:srgbClr val="1C3A4A"/>
-          </a:solidFill>
-          <a:ln w="12700">
-            <a:solidFill>
-              <a:srgbClr val="00ACC1"/>
-            </a:solidFill>
-            <a:prstDash val="solid"/>
-          </a:ln>
-        </p:spPr>
-      </p:sp>
-      <p:pic>
-        <p:nvPicPr>
-          <p:cNvPr id="11" name="Image 2" descr="preencoded.png">    </p:cNvPr>
+          <p:cNvPr id="5" name="Image 0" descr="preencoded.png"/>
           <p:cNvPicPr>
             <a:picLocks noChangeAspect="1"/>
           </p:cNvPicPr>
@@ -6865,8 +5694,8 @@
         </p:blipFill>
         <p:spPr>
           <a:xfrm>
-            <a:off x="356616" y="2258568"/>
-            <a:ext cx="329184" cy="329184"/>
+            <a:off x="1005840" y="1051560"/>
+            <a:ext cx="457200" cy="457200"/>
           </a:xfrm>
           <a:prstGeom prst="rect">
             <a:avLst/>
@@ -6875,14 +5704,14 @@
       </p:pic>
       <p:sp>
         <p:nvSpPr>
-          <p:cNvPr id="12" name="Text 7"/>
-          <p:cNvSpPr/>
-          <p:nvPr/>
-        </p:nvSpPr>
-        <p:spPr>
-          <a:xfrm>
-            <a:off x="841248" y="2221992"/>
-            <a:ext cx="7955280" cy="493776"/>
+          <p:cNvPr id="6" name="Text 3"/>
+          <p:cNvSpPr/>
+          <p:nvPr/>
+        </p:nvSpPr>
+        <p:spPr>
+          <a:xfrm>
+            <a:off x="274320" y="1645920"/>
+            <a:ext cx="1920240" cy="411480"/>
           </a:xfrm>
           <a:prstGeom prst="rect">
             <a:avLst/>
@@ -6894,52 +5723,102 @@
           <a:bodyPr wrap="square" lIns="0" tIns="0" rIns="0" bIns="0" rtlCol="0" anchor="ctr"/>
           <a:lstStyle/>
           <a:p>
-            <a:pPr algn="l" indent="0" marL="0">
-              <a:buNone/>
-            </a:pPr>
-            <a:r>
-              <a:rPr lang="en-US" sz="1250" dirty="0">
-                <a:solidFill>
-                  <a:srgbClr val="CFD8DC"/>
-                </a:solidFill>
-                <a:latin typeface="Calibri" pitchFamily="34" charset="0"/>
-                <a:ea typeface="Calibri" pitchFamily="34" charset="-122"/>
-                <a:cs typeface="Calibri" pitchFamily="34" charset="-120"/>
-              </a:rPr>
-              <a:t>Consommer une API tierce avec ses contraintes (rate limiting)</a:t>
-            </a:r>
-            <a:endParaRPr lang="en-US" sz="1250" dirty="0"/>
-          </a:p>
-        </p:txBody>
-      </p:sp>
-      <p:sp>
-        <p:nvSpPr>
-          <p:cNvPr id="13" name="Shape 8"/>
-          <p:cNvSpPr/>
-          <p:nvPr/>
-        </p:nvSpPr>
-        <p:spPr>
-          <a:xfrm>
-            <a:off x="320040" y="2916936"/>
-            <a:ext cx="402336" cy="402336"/>
-          </a:xfrm>
-          <a:prstGeom prst="ellipse">
-            <a:avLst/>
+            <a:pPr marL="0" indent="0" algn="ctr">
+              <a:buNone/>
+            </a:pPr>
+            <a:r>
+              <a:rPr lang="en-US" sz="1300" b="1" dirty="0">
+                <a:solidFill>
+                  <a:srgbClr val="FFFFFF"/>
+                </a:solidFill>
+                <a:latin typeface="Calibri" pitchFamily="34" charset="0"/>
+                <a:ea typeface="Calibri" pitchFamily="34" charset="-122"/>
+                <a:cs typeface="Calibri" pitchFamily="34" charset="-120"/>
+              </a:rPr>
+              <a:t>React</a:t>
+            </a:r>
+            <a:endParaRPr lang="en-US" sz="1300" dirty="0"/>
+          </a:p>
+        </p:txBody>
+      </p:sp>
+      <p:sp>
+        <p:nvSpPr>
+          <p:cNvPr id="7" name="Text 4"/>
+          <p:cNvSpPr/>
+          <p:nvPr/>
+        </p:nvSpPr>
+        <p:spPr>
+          <a:xfrm>
+            <a:off x="274320" y="2103120"/>
+            <a:ext cx="1920240" cy="502920"/>
+          </a:xfrm>
+          <a:prstGeom prst="rect">
+            <a:avLst/>
+          </a:prstGeom>
+          <a:noFill/>
+          <a:ln/>
+        </p:spPr>
+        <p:txBody>
+          <a:bodyPr wrap="square" lIns="0" tIns="0" rIns="0" bIns="0" rtlCol="0" anchor="ctr"/>
+          <a:lstStyle/>
+          <a:p>
+            <a:pPr marL="0" indent="0" algn="ctr">
+              <a:buNone/>
+            </a:pPr>
+            <a:r>
+              <a:rPr lang="en-US" sz="1100" dirty="0">
+                <a:solidFill>
+                  <a:srgbClr val="ECEFF1"/>
+                </a:solidFill>
+                <a:latin typeface="Calibri" pitchFamily="34" charset="0"/>
+                <a:ea typeface="Calibri" pitchFamily="34" charset="-122"/>
+                <a:cs typeface="Calibri" pitchFamily="34" charset="-120"/>
+              </a:rPr>
+              <a:t>UI / composants</a:t>
+            </a:r>
+            <a:endParaRPr lang="en-US" sz="1100" dirty="0"/>
+          </a:p>
+        </p:txBody>
+      </p:sp>
+      <p:sp>
+        <p:nvSpPr>
+          <p:cNvPr id="8" name="Shape 5"/>
+          <p:cNvSpPr/>
+          <p:nvPr/>
+        </p:nvSpPr>
+        <p:spPr>
+          <a:xfrm>
+            <a:off x="2331720" y="868680"/>
+            <a:ext cx="1920240" cy="2103120"/>
+          </a:xfrm>
+          <a:prstGeom prst="roundRect">
+            <a:avLst>
+              <a:gd name="adj" fmla="val 5714"/>
+            </a:avLst>
           </a:prstGeom>
           <a:solidFill>
-            <a:srgbClr val="1C3A4A"/>
+            <a:srgbClr val="00838F"/>
           </a:solidFill>
-          <a:ln w="12700">
-            <a:solidFill>
-              <a:srgbClr val="00ACC1"/>
-            </a:solidFill>
-            <a:prstDash val="solid"/>
-          </a:ln>
-        </p:spPr>
+          <a:ln/>
+          <a:effectLst>
+            <a:outerShdw blurRad="101600" dist="38100" dir="2700000" algn="bl" rotWithShape="0">
+              <a:srgbClr val="000000">
+                <a:alpha val="13000"/>
+              </a:srgbClr>
+            </a:outerShdw>
+          </a:effectLst>
+        </p:spPr>
+        <p:txBody>
+          <a:bodyPr/>
+          <a:lstStyle/>
+          <a:p>
+            <a:endParaRPr lang="fr-FR"/>
+          </a:p>
+        </p:txBody>
       </p:sp>
       <p:pic>
         <p:nvPicPr>
-          <p:cNvPr id="14" name="Image 3" descr="preencoded.png">    </p:cNvPr>
+          <p:cNvPr id="9" name="Image 1" descr="preencoded.png"/>
           <p:cNvPicPr>
             <a:picLocks noChangeAspect="1"/>
           </p:cNvPicPr>
@@ -6953,8 +5832,8 @@
         </p:blipFill>
         <p:spPr>
           <a:xfrm>
-            <a:off x="356616" y="2935224"/>
-            <a:ext cx="329184" cy="329184"/>
+            <a:off x="3063240" y="1051560"/>
+            <a:ext cx="457200" cy="457200"/>
           </a:xfrm>
           <a:prstGeom prst="rect">
             <a:avLst/>
@@ -6963,14 +5842,14 @@
       </p:pic>
       <p:sp>
         <p:nvSpPr>
-          <p:cNvPr id="15" name="Text 9"/>
-          <p:cNvSpPr/>
-          <p:nvPr/>
-        </p:nvSpPr>
-        <p:spPr>
-          <a:xfrm>
-            <a:off x="841248" y="2898648"/>
-            <a:ext cx="7955280" cy="493776"/>
+          <p:cNvPr id="10" name="Text 6"/>
+          <p:cNvSpPr/>
+          <p:nvPr/>
+        </p:nvSpPr>
+        <p:spPr>
+          <a:xfrm>
+            <a:off x="2331720" y="1645920"/>
+            <a:ext cx="1920240" cy="411480"/>
           </a:xfrm>
           <a:prstGeom prst="rect">
             <a:avLst/>
@@ -6982,52 +5861,102 @@
           <a:bodyPr wrap="square" lIns="0" tIns="0" rIns="0" bIns="0" rtlCol="0" anchor="ctr"/>
           <a:lstStyle/>
           <a:p>
-            <a:pPr algn="l" indent="0" marL="0">
-              <a:buNone/>
-            </a:pPr>
-            <a:r>
-              <a:rPr lang="en-US" sz="1250" dirty="0">
-                <a:solidFill>
-                  <a:srgbClr val="CFD8DC"/>
-                </a:solidFill>
-                <a:latin typeface="Calibri" pitchFamily="34" charset="0"/>
-                <a:ea typeface="Calibri" pitchFamily="34" charset="-122"/>
-                <a:cs typeface="Calibri" pitchFamily="34" charset="-120"/>
-              </a:rPr>
-              <a:t>Système de thème avec variables CSS — sans librairie</a:t>
-            </a:r>
-            <a:endParaRPr lang="en-US" sz="1250" dirty="0"/>
-          </a:p>
-        </p:txBody>
-      </p:sp>
-      <p:sp>
-        <p:nvSpPr>
-          <p:cNvPr id="16" name="Shape 10"/>
-          <p:cNvSpPr/>
-          <p:nvPr/>
-        </p:nvSpPr>
-        <p:spPr>
-          <a:xfrm>
-            <a:off x="320040" y="3593592"/>
-            <a:ext cx="402336" cy="402336"/>
-          </a:xfrm>
-          <a:prstGeom prst="ellipse">
-            <a:avLst/>
+            <a:pPr marL="0" indent="0" algn="ctr">
+              <a:buNone/>
+            </a:pPr>
+            <a:r>
+              <a:rPr lang="en-US" sz="1300" b="1" dirty="0">
+                <a:solidFill>
+                  <a:srgbClr val="FFFFFF"/>
+                </a:solidFill>
+                <a:latin typeface="Calibri" pitchFamily="34" charset="0"/>
+                <a:ea typeface="Calibri" pitchFamily="34" charset="-122"/>
+                <a:cs typeface="Calibri" pitchFamily="34" charset="-120"/>
+              </a:rPr>
+              <a:t>React Router</a:t>
+            </a:r>
+            <a:endParaRPr lang="en-US" sz="1300" dirty="0"/>
+          </a:p>
+        </p:txBody>
+      </p:sp>
+      <p:sp>
+        <p:nvSpPr>
+          <p:cNvPr id="11" name="Text 7"/>
+          <p:cNvSpPr/>
+          <p:nvPr/>
+        </p:nvSpPr>
+        <p:spPr>
+          <a:xfrm>
+            <a:off x="2331720" y="2103120"/>
+            <a:ext cx="1920240" cy="502920"/>
+          </a:xfrm>
+          <a:prstGeom prst="rect">
+            <a:avLst/>
+          </a:prstGeom>
+          <a:noFill/>
+          <a:ln/>
+        </p:spPr>
+        <p:txBody>
+          <a:bodyPr wrap="square" lIns="0" tIns="0" rIns="0" bIns="0" rtlCol="0" anchor="ctr"/>
+          <a:lstStyle/>
+          <a:p>
+            <a:pPr marL="0" indent="0" algn="ctr">
+              <a:buNone/>
+            </a:pPr>
+            <a:r>
+              <a:rPr lang="en-US" sz="1100" dirty="0">
+                <a:solidFill>
+                  <a:srgbClr val="ECEFF1"/>
+                </a:solidFill>
+                <a:latin typeface="Calibri" pitchFamily="34" charset="0"/>
+                <a:ea typeface="Calibri" pitchFamily="34" charset="-122"/>
+                <a:cs typeface="Calibri" pitchFamily="34" charset="-120"/>
+              </a:rPr>
+              <a:t>Navigation SPA</a:t>
+            </a:r>
+            <a:endParaRPr lang="en-US" sz="1100" dirty="0"/>
+          </a:p>
+        </p:txBody>
+      </p:sp>
+      <p:sp>
+        <p:nvSpPr>
+          <p:cNvPr id="12" name="Shape 8"/>
+          <p:cNvSpPr/>
+          <p:nvPr/>
+        </p:nvSpPr>
+        <p:spPr>
+          <a:xfrm>
+            <a:off x="4389120" y="868680"/>
+            <a:ext cx="1920240" cy="2103120"/>
+          </a:xfrm>
+          <a:prstGeom prst="roundRect">
+            <a:avLst>
+              <a:gd name="adj" fmla="val 5714"/>
+            </a:avLst>
           </a:prstGeom>
           <a:solidFill>
-            <a:srgbClr val="1C3A4A"/>
+            <a:srgbClr val="1565C0"/>
           </a:solidFill>
-          <a:ln w="12700">
-            <a:solidFill>
-              <a:srgbClr val="00ACC1"/>
-            </a:solidFill>
-            <a:prstDash val="solid"/>
-          </a:ln>
-        </p:spPr>
+          <a:ln/>
+          <a:effectLst>
+            <a:outerShdw blurRad="101600" dist="38100" dir="2700000" algn="bl" rotWithShape="0">
+              <a:srgbClr val="000000">
+                <a:alpha val="13000"/>
+              </a:srgbClr>
+            </a:outerShdw>
+          </a:effectLst>
+        </p:spPr>
+        <p:txBody>
+          <a:bodyPr/>
+          <a:lstStyle/>
+          <a:p>
+            <a:endParaRPr lang="fr-FR"/>
+          </a:p>
+        </p:txBody>
       </p:sp>
       <p:pic>
         <p:nvPicPr>
-          <p:cNvPr id="17" name="Image 4" descr="preencoded.png">    </p:cNvPr>
+          <p:cNvPr id="13" name="Image 2" descr="preencoded.png"/>
           <p:cNvPicPr>
             <a:picLocks noChangeAspect="1"/>
           </p:cNvPicPr>
@@ -7041,8 +5970,8 @@
         </p:blipFill>
         <p:spPr>
           <a:xfrm>
-            <a:off x="356616" y="3611880"/>
-            <a:ext cx="329184" cy="329184"/>
+            <a:off x="5120640" y="1051560"/>
+            <a:ext cx="457200" cy="457200"/>
           </a:xfrm>
           <a:prstGeom prst="rect">
             <a:avLst/>
@@ -7051,14 +5980,14 @@
       </p:pic>
       <p:sp>
         <p:nvSpPr>
-          <p:cNvPr id="18" name="Text 11"/>
-          <p:cNvSpPr/>
-          <p:nvPr/>
-        </p:nvSpPr>
-        <p:spPr>
-          <a:xfrm>
-            <a:off x="841248" y="3575304"/>
-            <a:ext cx="7955280" cy="493776"/>
+          <p:cNvPr id="14" name="Text 9"/>
+          <p:cNvSpPr/>
+          <p:nvPr/>
+        </p:nvSpPr>
+        <p:spPr>
+          <a:xfrm>
+            <a:off x="4389120" y="1645920"/>
+            <a:ext cx="1920240" cy="411480"/>
           </a:xfrm>
           <a:prstGeom prst="rect">
             <a:avLst/>
@@ -7070,52 +5999,102 @@
           <a:bodyPr wrap="square" lIns="0" tIns="0" rIns="0" bIns="0" rtlCol="0" anchor="ctr"/>
           <a:lstStyle/>
           <a:p>
-            <a:pPr algn="l" indent="0" marL="0">
-              <a:buNone/>
-            </a:pPr>
-            <a:r>
-              <a:rPr lang="en-US" sz="1250" dirty="0">
-                <a:solidFill>
-                  <a:srgbClr val="CFD8DC"/>
-                </a:solidFill>
-                <a:latin typeface="Calibri" pitchFamily="34" charset="0"/>
-                <a:ea typeface="Calibri" pitchFamily="34" charset="-122"/>
-                <a:cs typeface="Calibri" pitchFamily="34" charset="-120"/>
-              </a:rPr>
-              <a:t>i18n maison : clés imbriquées, synchronisation avec l'UI</a:t>
-            </a:r>
-            <a:endParaRPr lang="en-US" sz="1250" dirty="0"/>
-          </a:p>
-        </p:txBody>
-      </p:sp>
-      <p:sp>
-        <p:nvSpPr>
-          <p:cNvPr id="19" name="Shape 12"/>
-          <p:cNvSpPr/>
-          <p:nvPr/>
-        </p:nvSpPr>
-        <p:spPr>
-          <a:xfrm>
-            <a:off x="320040" y="4270248"/>
-            <a:ext cx="402336" cy="402336"/>
-          </a:xfrm>
-          <a:prstGeom prst="ellipse">
-            <a:avLst/>
+            <a:pPr marL="0" indent="0" algn="ctr">
+              <a:buNone/>
+            </a:pPr>
+            <a:r>
+              <a:rPr lang="en-US" sz="1300" b="1" dirty="0">
+                <a:solidFill>
+                  <a:srgbClr val="FFFFFF"/>
+                </a:solidFill>
+                <a:latin typeface="Calibri" pitchFamily="34" charset="0"/>
+                <a:ea typeface="Calibri" pitchFamily="34" charset="-122"/>
+                <a:cs typeface="Calibri" pitchFamily="34" charset="-120"/>
+              </a:rPr>
+              <a:t>Axios</a:t>
+            </a:r>
+            <a:endParaRPr lang="en-US" sz="1300" dirty="0"/>
+          </a:p>
+        </p:txBody>
+      </p:sp>
+      <p:sp>
+        <p:nvSpPr>
+          <p:cNvPr id="15" name="Text 10"/>
+          <p:cNvSpPr/>
+          <p:nvPr/>
+        </p:nvSpPr>
+        <p:spPr>
+          <a:xfrm>
+            <a:off x="4389120" y="2103120"/>
+            <a:ext cx="1920240" cy="502920"/>
+          </a:xfrm>
+          <a:prstGeom prst="rect">
+            <a:avLst/>
+          </a:prstGeom>
+          <a:noFill/>
+          <a:ln/>
+        </p:spPr>
+        <p:txBody>
+          <a:bodyPr wrap="square" lIns="0" tIns="0" rIns="0" bIns="0" rtlCol="0" anchor="ctr"/>
+          <a:lstStyle/>
+          <a:p>
+            <a:pPr marL="0" indent="0" algn="ctr">
+              <a:buNone/>
+            </a:pPr>
+            <a:r>
+              <a:rPr lang="en-US" sz="1100" dirty="0">
+                <a:solidFill>
+                  <a:srgbClr val="ECEFF1"/>
+                </a:solidFill>
+                <a:latin typeface="Calibri" pitchFamily="34" charset="0"/>
+                <a:ea typeface="Calibri" pitchFamily="34" charset="-122"/>
+                <a:cs typeface="Calibri" pitchFamily="34" charset="-120"/>
+              </a:rPr>
+              <a:t>Appels API REST</a:t>
+            </a:r>
+            <a:endParaRPr lang="en-US" sz="1100" dirty="0"/>
+          </a:p>
+        </p:txBody>
+      </p:sp>
+      <p:sp>
+        <p:nvSpPr>
+          <p:cNvPr id="16" name="Shape 11"/>
+          <p:cNvSpPr/>
+          <p:nvPr/>
+        </p:nvSpPr>
+        <p:spPr>
+          <a:xfrm>
+            <a:off x="6446520" y="868680"/>
+            <a:ext cx="1920240" cy="2103120"/>
+          </a:xfrm>
+          <a:prstGeom prst="roundRect">
+            <a:avLst>
+              <a:gd name="adj" fmla="val 5714"/>
+            </a:avLst>
           </a:prstGeom>
           <a:solidFill>
-            <a:srgbClr val="1C3A4A"/>
+            <a:srgbClr val="2E7D32"/>
           </a:solidFill>
-          <a:ln w="12700">
-            <a:solidFill>
-              <a:srgbClr val="00ACC1"/>
-            </a:solidFill>
-            <a:prstDash val="solid"/>
-          </a:ln>
-        </p:spPr>
+          <a:ln/>
+          <a:effectLst>
+            <a:outerShdw blurRad="101600" dist="38100" dir="2700000" algn="bl" rotWithShape="0">
+              <a:srgbClr val="000000">
+                <a:alpha val="13000"/>
+              </a:srgbClr>
+            </a:outerShdw>
+          </a:effectLst>
+        </p:spPr>
+        <p:txBody>
+          <a:bodyPr/>
+          <a:lstStyle/>
+          <a:p>
+            <a:endParaRPr lang="fr-FR"/>
+          </a:p>
+        </p:txBody>
       </p:sp>
       <p:pic>
         <p:nvPicPr>
-          <p:cNvPr id="20" name="Image 5" descr="preencoded.png">    </p:cNvPr>
+          <p:cNvPr id="17" name="Image 3" descr="preencoded.png"/>
           <p:cNvPicPr>
             <a:picLocks noChangeAspect="1"/>
           </p:cNvPicPr>
@@ -7129,8 +6108,8 @@
         </p:blipFill>
         <p:spPr>
           <a:xfrm>
-            <a:off x="356616" y="4288536"/>
-            <a:ext cx="329184" cy="329184"/>
+            <a:off x="7178040" y="1051560"/>
+            <a:ext cx="457200" cy="457200"/>
           </a:xfrm>
           <a:prstGeom prst="rect">
             <a:avLst/>
@@ -7139,14 +6118,14 @@
       </p:pic>
       <p:sp>
         <p:nvSpPr>
-          <p:cNvPr id="21" name="Text 13"/>
-          <p:cNvSpPr/>
-          <p:nvPr/>
-        </p:nvSpPr>
-        <p:spPr>
-          <a:xfrm>
-            <a:off x="841248" y="4251960"/>
-            <a:ext cx="7955280" cy="493776"/>
+          <p:cNvPr id="18" name="Text 12"/>
+          <p:cNvSpPr/>
+          <p:nvPr/>
+        </p:nvSpPr>
+        <p:spPr>
+          <a:xfrm>
+            <a:off x="6446520" y="1645920"/>
+            <a:ext cx="1920240" cy="411480"/>
           </a:xfrm>
           <a:prstGeom prst="rect">
             <a:avLst/>
@@ -7158,21 +6137,474 @@
           <a:bodyPr wrap="square" lIns="0" tIns="0" rIns="0" bIns="0" rtlCol="0" anchor="ctr"/>
           <a:lstStyle/>
           <a:p>
-            <a:pPr algn="l" indent="0" marL="0">
-              <a:buNone/>
-            </a:pPr>
-            <a:r>
-              <a:rPr lang="en-US" sz="1250" dirty="0">
-                <a:solidFill>
-                  <a:srgbClr val="CFD8DC"/>
-                </a:solidFill>
-                <a:latin typeface="Calibri" pitchFamily="34" charset="0"/>
-                <a:ea typeface="Calibri" pitchFamily="34" charset="-122"/>
-                <a:cs typeface="Calibri" pitchFamily="34" charset="-120"/>
-              </a:rPr>
-              <a:t>Gamepad API — polling via requestAnimationFrame, cooldown</a:t>
-            </a:r>
-            <a:endParaRPr lang="en-US" sz="1250" dirty="0"/>
+            <a:pPr marL="0" indent="0" algn="ctr">
+              <a:buNone/>
+            </a:pPr>
+            <a:r>
+              <a:rPr lang="en-US" sz="1300" b="1" dirty="0">
+                <a:solidFill>
+                  <a:srgbClr val="FFFFFF"/>
+                </a:solidFill>
+                <a:latin typeface="Calibri" pitchFamily="34" charset="0"/>
+                <a:ea typeface="Calibri" pitchFamily="34" charset="-122"/>
+                <a:cs typeface="Calibri" pitchFamily="34" charset="-120"/>
+              </a:rPr>
+              <a:t>Open Trivia DB</a:t>
+            </a:r>
+            <a:endParaRPr lang="en-US" sz="1300" dirty="0"/>
+          </a:p>
+        </p:txBody>
+      </p:sp>
+      <p:sp>
+        <p:nvSpPr>
+          <p:cNvPr id="19" name="Text 13"/>
+          <p:cNvSpPr/>
+          <p:nvPr/>
+        </p:nvSpPr>
+        <p:spPr>
+          <a:xfrm>
+            <a:off x="6446520" y="2103120"/>
+            <a:ext cx="1920240" cy="502920"/>
+          </a:xfrm>
+          <a:prstGeom prst="rect">
+            <a:avLst/>
+          </a:prstGeom>
+          <a:noFill/>
+          <a:ln/>
+        </p:spPr>
+        <p:txBody>
+          <a:bodyPr wrap="square" lIns="0" tIns="0" rIns="0" bIns="0" rtlCol="0" anchor="ctr"/>
+          <a:lstStyle/>
+          <a:p>
+            <a:pPr marL="0" indent="0" algn="ctr">
+              <a:buNone/>
+            </a:pPr>
+            <a:r>
+              <a:rPr lang="en-US" sz="1100" dirty="0">
+                <a:solidFill>
+                  <a:srgbClr val="ECEFF1"/>
+                </a:solidFill>
+                <a:latin typeface="Calibri" pitchFamily="34" charset="0"/>
+                <a:ea typeface="Calibri" pitchFamily="34" charset="-122"/>
+                <a:cs typeface="Calibri" pitchFamily="34" charset="-120"/>
+              </a:rPr>
+              <a:t>Questions quiz</a:t>
+            </a:r>
+            <a:endParaRPr lang="en-US" sz="1100" dirty="0"/>
+          </a:p>
+        </p:txBody>
+      </p:sp>
+      <p:sp>
+        <p:nvSpPr>
+          <p:cNvPr id="20" name="Shape 14"/>
+          <p:cNvSpPr/>
+          <p:nvPr/>
+        </p:nvSpPr>
+        <p:spPr>
+          <a:xfrm>
+            <a:off x="1280160" y="2743200"/>
+            <a:ext cx="1920240" cy="2103120"/>
+          </a:xfrm>
+          <a:prstGeom prst="roundRect">
+            <a:avLst>
+              <a:gd name="adj" fmla="val 5714"/>
+            </a:avLst>
+          </a:prstGeom>
+          <a:solidFill>
+            <a:srgbClr val="6A1B9A"/>
+          </a:solidFill>
+          <a:ln/>
+          <a:effectLst>
+            <a:outerShdw blurRad="101600" dist="38100" dir="2700000" algn="bl" rotWithShape="0">
+              <a:srgbClr val="000000">
+                <a:alpha val="13000"/>
+              </a:srgbClr>
+            </a:outerShdw>
+          </a:effectLst>
+        </p:spPr>
+        <p:txBody>
+          <a:bodyPr/>
+          <a:lstStyle/>
+          <a:p>
+            <a:endParaRPr lang="fr-FR"/>
+          </a:p>
+        </p:txBody>
+      </p:sp>
+      <p:pic>
+        <p:nvPicPr>
+          <p:cNvPr id="21" name="Image 4" descr="preencoded.png"/>
+          <p:cNvPicPr>
+            <a:picLocks noChangeAspect="1"/>
+          </p:cNvPicPr>
+          <p:nvPr/>
+        </p:nvPicPr>
+        <p:blipFill>
+          <a:blip r:embed="rId7"/>
+          <a:stretch>
+            <a:fillRect/>
+          </a:stretch>
+        </p:blipFill>
+        <p:spPr>
+          <a:xfrm>
+            <a:off x="2011680" y="2926080"/>
+            <a:ext cx="457200" cy="457200"/>
+          </a:xfrm>
+          <a:prstGeom prst="rect">
+            <a:avLst/>
+          </a:prstGeom>
+        </p:spPr>
+      </p:pic>
+      <p:sp>
+        <p:nvSpPr>
+          <p:cNvPr id="22" name="Text 15"/>
+          <p:cNvSpPr/>
+          <p:nvPr/>
+        </p:nvSpPr>
+        <p:spPr>
+          <a:xfrm>
+            <a:off x="1280160" y="3520440"/>
+            <a:ext cx="1920240" cy="411480"/>
+          </a:xfrm>
+          <a:prstGeom prst="rect">
+            <a:avLst/>
+          </a:prstGeom>
+          <a:noFill/>
+          <a:ln/>
+        </p:spPr>
+        <p:txBody>
+          <a:bodyPr wrap="square" lIns="0" tIns="0" rIns="0" bIns="0" rtlCol="0" anchor="ctr"/>
+          <a:lstStyle/>
+          <a:p>
+            <a:pPr marL="0" indent="0" algn="ctr">
+              <a:buNone/>
+            </a:pPr>
+            <a:r>
+              <a:rPr lang="en-US" sz="1300" b="1" dirty="0">
+                <a:solidFill>
+                  <a:srgbClr val="FFFFFF"/>
+                </a:solidFill>
+                <a:latin typeface="Calibri" pitchFamily="34" charset="0"/>
+                <a:ea typeface="Calibri" pitchFamily="34" charset="-122"/>
+                <a:cs typeface="Calibri" pitchFamily="34" charset="-120"/>
+              </a:rPr>
+              <a:t>CSS Variables</a:t>
+            </a:r>
+            <a:endParaRPr lang="en-US" sz="1300" dirty="0"/>
+          </a:p>
+        </p:txBody>
+      </p:sp>
+      <p:sp>
+        <p:nvSpPr>
+          <p:cNvPr id="23" name="Text 16"/>
+          <p:cNvSpPr/>
+          <p:nvPr/>
+        </p:nvSpPr>
+        <p:spPr>
+          <a:xfrm>
+            <a:off x="1280160" y="3977640"/>
+            <a:ext cx="1920240" cy="502920"/>
+          </a:xfrm>
+          <a:prstGeom prst="rect">
+            <a:avLst/>
+          </a:prstGeom>
+          <a:noFill/>
+          <a:ln/>
+        </p:spPr>
+        <p:txBody>
+          <a:bodyPr wrap="square" lIns="0" tIns="0" rIns="0" bIns="0" rtlCol="0" anchor="ctr"/>
+          <a:lstStyle/>
+          <a:p>
+            <a:pPr marL="0" indent="0" algn="ctr">
+              <a:buNone/>
+            </a:pPr>
+            <a:r>
+              <a:rPr lang="en-US" sz="1100" dirty="0">
+                <a:solidFill>
+                  <a:srgbClr val="ECEFF1"/>
+                </a:solidFill>
+                <a:latin typeface="Calibri" pitchFamily="34" charset="0"/>
+                <a:ea typeface="Calibri" pitchFamily="34" charset="-122"/>
+                <a:cs typeface="Calibri" pitchFamily="34" charset="-120"/>
+              </a:rPr>
+              <a:t>Thème sombre/clair</a:t>
+            </a:r>
+            <a:endParaRPr lang="en-US" sz="1100" dirty="0"/>
+          </a:p>
+        </p:txBody>
+      </p:sp>
+      <p:sp>
+        <p:nvSpPr>
+          <p:cNvPr id="24" name="Shape 17"/>
+          <p:cNvSpPr/>
+          <p:nvPr/>
+        </p:nvSpPr>
+        <p:spPr>
+          <a:xfrm>
+            <a:off x="3337560" y="2743200"/>
+            <a:ext cx="1920240" cy="2103120"/>
+          </a:xfrm>
+          <a:prstGeom prst="roundRect">
+            <a:avLst>
+              <a:gd name="adj" fmla="val 5714"/>
+            </a:avLst>
+          </a:prstGeom>
+          <a:solidFill>
+            <a:srgbClr val="E65100"/>
+          </a:solidFill>
+          <a:ln/>
+          <a:effectLst>
+            <a:outerShdw blurRad="101600" dist="38100" dir="2700000" algn="bl" rotWithShape="0">
+              <a:srgbClr val="000000">
+                <a:alpha val="13000"/>
+              </a:srgbClr>
+            </a:outerShdw>
+          </a:effectLst>
+        </p:spPr>
+        <p:txBody>
+          <a:bodyPr/>
+          <a:lstStyle/>
+          <a:p>
+            <a:endParaRPr lang="fr-FR"/>
+          </a:p>
+        </p:txBody>
+      </p:sp>
+      <p:pic>
+        <p:nvPicPr>
+          <p:cNvPr id="25" name="Image 5" descr="preencoded.png"/>
+          <p:cNvPicPr>
+            <a:picLocks noChangeAspect="1"/>
+          </p:cNvPicPr>
+          <p:nvPr/>
+        </p:nvPicPr>
+        <p:blipFill>
+          <a:blip r:embed="rId8"/>
+          <a:stretch>
+            <a:fillRect/>
+          </a:stretch>
+        </p:blipFill>
+        <p:spPr>
+          <a:xfrm>
+            <a:off x="4069080" y="2926080"/>
+            <a:ext cx="457200" cy="457200"/>
+          </a:xfrm>
+          <a:prstGeom prst="rect">
+            <a:avLst/>
+          </a:prstGeom>
+        </p:spPr>
+      </p:pic>
+      <p:sp>
+        <p:nvSpPr>
+          <p:cNvPr id="26" name="Text 18"/>
+          <p:cNvSpPr/>
+          <p:nvPr/>
+        </p:nvSpPr>
+        <p:spPr>
+          <a:xfrm>
+            <a:off x="3337560" y="3520440"/>
+            <a:ext cx="1920240" cy="411480"/>
+          </a:xfrm>
+          <a:prstGeom prst="rect">
+            <a:avLst/>
+          </a:prstGeom>
+          <a:noFill/>
+          <a:ln/>
+        </p:spPr>
+        <p:txBody>
+          <a:bodyPr wrap="square" lIns="0" tIns="0" rIns="0" bIns="0" rtlCol="0" anchor="ctr"/>
+          <a:lstStyle/>
+          <a:p>
+            <a:pPr marL="0" indent="0" algn="ctr">
+              <a:buNone/>
+            </a:pPr>
+            <a:r>
+              <a:rPr lang="en-US" sz="1300" b="1" dirty="0">
+                <a:solidFill>
+                  <a:srgbClr val="FFFFFF"/>
+                </a:solidFill>
+                <a:latin typeface="Calibri" pitchFamily="34" charset="0"/>
+                <a:ea typeface="Calibri" pitchFamily="34" charset="-122"/>
+                <a:cs typeface="Calibri" pitchFamily="34" charset="-120"/>
+              </a:rPr>
+              <a:t>i18n maison</a:t>
+            </a:r>
+            <a:endParaRPr lang="en-US" sz="1300" dirty="0"/>
+          </a:p>
+        </p:txBody>
+      </p:sp>
+      <p:sp>
+        <p:nvSpPr>
+          <p:cNvPr id="27" name="Text 19"/>
+          <p:cNvSpPr/>
+          <p:nvPr/>
+        </p:nvSpPr>
+        <p:spPr>
+          <a:xfrm>
+            <a:off x="3337560" y="3977640"/>
+            <a:ext cx="1920240" cy="502920"/>
+          </a:xfrm>
+          <a:prstGeom prst="rect">
+            <a:avLst/>
+          </a:prstGeom>
+          <a:noFill/>
+          <a:ln/>
+        </p:spPr>
+        <p:txBody>
+          <a:bodyPr wrap="square" lIns="0" tIns="0" rIns="0" bIns="0" rtlCol="0" anchor="ctr"/>
+          <a:lstStyle/>
+          <a:p>
+            <a:pPr marL="0" indent="0" algn="ctr">
+              <a:buNone/>
+            </a:pPr>
+            <a:r>
+              <a:rPr lang="en-US" sz="1100" dirty="0">
+                <a:solidFill>
+                  <a:srgbClr val="ECEFF1"/>
+                </a:solidFill>
+                <a:latin typeface="Calibri" pitchFamily="34" charset="0"/>
+                <a:ea typeface="Calibri" pitchFamily="34" charset="-122"/>
+                <a:cs typeface="Calibri" pitchFamily="34" charset="-120"/>
+              </a:rPr>
+              <a:t>FR / EN</a:t>
+            </a:r>
+            <a:endParaRPr lang="en-US" sz="1100" dirty="0"/>
+          </a:p>
+        </p:txBody>
+      </p:sp>
+      <p:sp>
+        <p:nvSpPr>
+          <p:cNvPr id="28" name="Shape 20"/>
+          <p:cNvSpPr/>
+          <p:nvPr/>
+        </p:nvSpPr>
+        <p:spPr>
+          <a:xfrm>
+            <a:off x="5394960" y="2743200"/>
+            <a:ext cx="1920240" cy="2103120"/>
+          </a:xfrm>
+          <a:prstGeom prst="roundRect">
+            <a:avLst>
+              <a:gd name="adj" fmla="val 5714"/>
+            </a:avLst>
+          </a:prstGeom>
+          <a:solidFill>
+            <a:srgbClr val="AD1457"/>
+          </a:solidFill>
+          <a:ln/>
+          <a:effectLst>
+            <a:outerShdw blurRad="101600" dist="38100" dir="2700000" algn="bl" rotWithShape="0">
+              <a:srgbClr val="000000">
+                <a:alpha val="13000"/>
+              </a:srgbClr>
+            </a:outerShdw>
+          </a:effectLst>
+        </p:spPr>
+        <p:txBody>
+          <a:bodyPr/>
+          <a:lstStyle/>
+          <a:p>
+            <a:endParaRPr lang="fr-FR"/>
+          </a:p>
+        </p:txBody>
+      </p:sp>
+      <p:pic>
+        <p:nvPicPr>
+          <p:cNvPr id="29" name="Image 6" descr="preencoded.png"/>
+          <p:cNvPicPr>
+            <a:picLocks noChangeAspect="1"/>
+          </p:cNvPicPr>
+          <p:nvPr/>
+        </p:nvPicPr>
+        <p:blipFill>
+          <a:blip r:embed="rId9"/>
+          <a:stretch>
+            <a:fillRect/>
+          </a:stretch>
+        </p:blipFill>
+        <p:spPr>
+          <a:xfrm>
+            <a:off x="6126480" y="2926080"/>
+            <a:ext cx="457200" cy="457200"/>
+          </a:xfrm>
+          <a:prstGeom prst="rect">
+            <a:avLst/>
+          </a:prstGeom>
+        </p:spPr>
+      </p:pic>
+      <p:sp>
+        <p:nvSpPr>
+          <p:cNvPr id="30" name="Text 21"/>
+          <p:cNvSpPr/>
+          <p:nvPr/>
+        </p:nvSpPr>
+        <p:spPr>
+          <a:xfrm>
+            <a:off x="5394960" y="3520440"/>
+            <a:ext cx="1920240" cy="411480"/>
+          </a:xfrm>
+          <a:prstGeom prst="rect">
+            <a:avLst/>
+          </a:prstGeom>
+          <a:noFill/>
+          <a:ln/>
+        </p:spPr>
+        <p:txBody>
+          <a:bodyPr wrap="square" lIns="0" tIns="0" rIns="0" bIns="0" rtlCol="0" anchor="ctr"/>
+          <a:lstStyle/>
+          <a:p>
+            <a:pPr marL="0" indent="0" algn="ctr">
+              <a:buNone/>
+            </a:pPr>
+            <a:r>
+              <a:rPr lang="en-US" sz="1300" b="1" dirty="0">
+                <a:solidFill>
+                  <a:srgbClr val="FFFFFF"/>
+                </a:solidFill>
+                <a:latin typeface="Calibri" pitchFamily="34" charset="0"/>
+                <a:ea typeface="Calibri" pitchFamily="34" charset="-122"/>
+                <a:cs typeface="Calibri" pitchFamily="34" charset="-120"/>
+              </a:rPr>
+              <a:t>Gamepad API</a:t>
+            </a:r>
+            <a:endParaRPr lang="en-US" sz="1300" dirty="0"/>
+          </a:p>
+        </p:txBody>
+      </p:sp>
+      <p:sp>
+        <p:nvSpPr>
+          <p:cNvPr id="31" name="Text 22"/>
+          <p:cNvSpPr/>
+          <p:nvPr/>
+        </p:nvSpPr>
+        <p:spPr>
+          <a:xfrm>
+            <a:off x="5394960" y="3977640"/>
+            <a:ext cx="1920240" cy="502920"/>
+          </a:xfrm>
+          <a:prstGeom prst="rect">
+            <a:avLst/>
+          </a:prstGeom>
+          <a:noFill/>
+          <a:ln/>
+        </p:spPr>
+        <p:txBody>
+          <a:bodyPr wrap="square" lIns="0" tIns="0" rIns="0" bIns="0" rtlCol="0" anchor="ctr"/>
+          <a:lstStyle/>
+          <a:p>
+            <a:pPr marL="0" indent="0" algn="ctr">
+              <a:buNone/>
+            </a:pPr>
+            <a:r>
+              <a:rPr lang="en-US" sz="1100" dirty="0">
+                <a:solidFill>
+                  <a:srgbClr val="ECEFF1"/>
+                </a:solidFill>
+                <a:latin typeface="Calibri" pitchFamily="34" charset="0"/>
+                <a:ea typeface="Calibri" pitchFamily="34" charset="-122"/>
+                <a:cs typeface="Calibri" pitchFamily="34" charset="-120"/>
+              </a:rPr>
+              <a:t>Support manette</a:t>
+            </a:r>
+            <a:endParaRPr lang="en-US" sz="1100" dirty="0"/>
           </a:p>
         </p:txBody>
       </p:sp>
@@ -7186,12 +6618,13 @@
 
 <file path=ppt/slides/slide8.xml><?xml version="1.0" encoding="utf-8"?>
 <p:sld xmlns:a="http://schemas.openxmlformats.org/drawingml/2006/main" xmlns:r="http://schemas.openxmlformats.org/officeDocument/2006/relationships" xmlns:p="http://schemas.openxmlformats.org/presentationml/2006/main">
-  <p:cSld name="Slide 8">
+  <p:cSld name="Slide 7">
     <p:bg>
       <p:bgPr>
         <a:solidFill>
-          <a:srgbClr val="1A237E"/>
+          <a:srgbClr val="0D1B2A"/>
         </a:solidFill>
+        <a:effectLst/>
       </p:bgPr>
     </p:bg>
     <p:spTree>
@@ -7216,6 +6649,680 @@
         </p:nvSpPr>
         <p:spPr>
           <a:xfrm>
+            <a:off x="0" y="0"/>
+            <a:ext cx="9144000" cy="731520"/>
+          </a:xfrm>
+          <a:prstGeom prst="rect">
+            <a:avLst/>
+          </a:prstGeom>
+          <a:solidFill>
+            <a:srgbClr val="00838F"/>
+          </a:solidFill>
+          <a:ln w="12700">
+            <a:solidFill>
+              <a:srgbClr val="00838F"/>
+            </a:solidFill>
+            <a:prstDash val="solid"/>
+          </a:ln>
+        </p:spPr>
+        <p:txBody>
+          <a:bodyPr/>
+          <a:lstStyle/>
+          <a:p>
+            <a:endParaRPr lang="fr-FR"/>
+          </a:p>
+        </p:txBody>
+      </p:sp>
+      <p:sp>
+        <p:nvSpPr>
+          <p:cNvPr id="3" name="Text 1"/>
+          <p:cNvSpPr/>
+          <p:nvPr/>
+        </p:nvSpPr>
+        <p:spPr>
+          <a:xfrm>
+            <a:off x="365760" y="45720"/>
+            <a:ext cx="8412480" cy="640080"/>
+          </a:xfrm>
+          <a:prstGeom prst="rect">
+            <a:avLst/>
+          </a:prstGeom>
+          <a:noFill/>
+          <a:ln/>
+        </p:spPr>
+        <p:txBody>
+          <a:bodyPr wrap="square" lIns="0" tIns="0" rIns="0" bIns="0" rtlCol="0" anchor="ctr"/>
+          <a:lstStyle/>
+          <a:p>
+            <a:pPr marL="0" indent="0" algn="l">
+              <a:buNone/>
+            </a:pPr>
+            <a:r>
+              <a:rPr lang="en-US" sz="2600" b="1" dirty="0">
+                <a:solidFill>
+                  <a:srgbClr val="FFFFFF"/>
+                </a:solidFill>
+                <a:latin typeface="Calibri" pitchFamily="34" charset="0"/>
+                <a:ea typeface="Calibri" pitchFamily="34" charset="-122"/>
+                <a:cs typeface="Calibri" pitchFamily="34" charset="-120"/>
+              </a:rPr>
+              <a:t>Ce que j'ai appris</a:t>
+            </a:r>
+            <a:endParaRPr lang="en-US" sz="2600" dirty="0"/>
+          </a:p>
+        </p:txBody>
+      </p:sp>
+      <p:sp>
+        <p:nvSpPr>
+          <p:cNvPr id="4" name="Shape 2"/>
+          <p:cNvSpPr/>
+          <p:nvPr/>
+        </p:nvSpPr>
+        <p:spPr>
+          <a:xfrm>
+            <a:off x="320040" y="886968"/>
+            <a:ext cx="402336" cy="402336"/>
+          </a:xfrm>
+          <a:prstGeom prst="ellipse">
+            <a:avLst/>
+          </a:prstGeom>
+          <a:solidFill>
+            <a:srgbClr val="1C3A4A"/>
+          </a:solidFill>
+          <a:ln w="12700">
+            <a:solidFill>
+              <a:srgbClr val="00ACC1"/>
+            </a:solidFill>
+            <a:prstDash val="solid"/>
+          </a:ln>
+        </p:spPr>
+        <p:txBody>
+          <a:bodyPr/>
+          <a:lstStyle/>
+          <a:p>
+            <a:endParaRPr lang="fr-FR"/>
+          </a:p>
+        </p:txBody>
+      </p:sp>
+      <p:pic>
+        <p:nvPicPr>
+          <p:cNvPr id="5" name="Image 0" descr="preencoded.png"/>
+          <p:cNvPicPr>
+            <a:picLocks noChangeAspect="1"/>
+          </p:cNvPicPr>
+          <p:nvPr/>
+        </p:nvPicPr>
+        <p:blipFill>
+          <a:blip r:embed="rId3"/>
+          <a:stretch>
+            <a:fillRect/>
+          </a:stretch>
+        </p:blipFill>
+        <p:spPr>
+          <a:xfrm>
+            <a:off x="356616" y="923544"/>
+            <a:ext cx="329184" cy="329184"/>
+          </a:xfrm>
+          <a:prstGeom prst="rect">
+            <a:avLst/>
+          </a:prstGeom>
+        </p:spPr>
+      </p:pic>
+      <p:sp>
+        <p:nvSpPr>
+          <p:cNvPr id="6" name="Text 3"/>
+          <p:cNvSpPr/>
+          <p:nvPr/>
+        </p:nvSpPr>
+        <p:spPr>
+          <a:xfrm>
+            <a:off x="841248" y="868680"/>
+            <a:ext cx="7955280" cy="493776"/>
+          </a:xfrm>
+          <a:prstGeom prst="rect">
+            <a:avLst/>
+          </a:prstGeom>
+          <a:noFill/>
+          <a:ln/>
+        </p:spPr>
+        <p:txBody>
+          <a:bodyPr wrap="square" lIns="0" tIns="0" rIns="0" bIns="0" rtlCol="0" anchor="ctr"/>
+          <a:lstStyle/>
+          <a:p>
+            <a:pPr marL="0" indent="0" algn="l">
+              <a:buNone/>
+            </a:pPr>
+            <a:r>
+              <a:rPr lang="en-US" sz="1250" dirty="0">
+                <a:solidFill>
+                  <a:srgbClr val="CFD8DC"/>
+                </a:solidFill>
+                <a:latin typeface="Calibri" pitchFamily="34" charset="0"/>
+                <a:ea typeface="Calibri" pitchFamily="34" charset="-122"/>
+                <a:cs typeface="Calibri" pitchFamily="34" charset="-120"/>
+              </a:rPr>
+              <a:t>Structurer une app React en pages, composants et contextes</a:t>
+            </a:r>
+            <a:endParaRPr lang="en-US" sz="1250" dirty="0"/>
+          </a:p>
+        </p:txBody>
+      </p:sp>
+      <p:sp>
+        <p:nvSpPr>
+          <p:cNvPr id="7" name="Shape 4"/>
+          <p:cNvSpPr/>
+          <p:nvPr/>
+        </p:nvSpPr>
+        <p:spPr>
+          <a:xfrm>
+            <a:off x="320040" y="1563624"/>
+            <a:ext cx="402336" cy="402336"/>
+          </a:xfrm>
+          <a:prstGeom prst="ellipse">
+            <a:avLst/>
+          </a:prstGeom>
+          <a:solidFill>
+            <a:srgbClr val="1C3A4A"/>
+          </a:solidFill>
+          <a:ln w="12700">
+            <a:solidFill>
+              <a:srgbClr val="00ACC1"/>
+            </a:solidFill>
+            <a:prstDash val="solid"/>
+          </a:ln>
+        </p:spPr>
+        <p:txBody>
+          <a:bodyPr/>
+          <a:lstStyle/>
+          <a:p>
+            <a:endParaRPr lang="fr-FR"/>
+          </a:p>
+        </p:txBody>
+      </p:sp>
+      <p:pic>
+        <p:nvPicPr>
+          <p:cNvPr id="8" name="Image 1" descr="preencoded.png"/>
+          <p:cNvPicPr>
+            <a:picLocks noChangeAspect="1"/>
+          </p:cNvPicPr>
+          <p:nvPr/>
+        </p:nvPicPr>
+        <p:blipFill>
+          <a:blip r:embed="rId4"/>
+          <a:stretch>
+            <a:fillRect/>
+          </a:stretch>
+        </p:blipFill>
+        <p:spPr>
+          <a:xfrm>
+            <a:off x="356616" y="1600200"/>
+            <a:ext cx="329184" cy="329184"/>
+          </a:xfrm>
+          <a:prstGeom prst="rect">
+            <a:avLst/>
+          </a:prstGeom>
+        </p:spPr>
+      </p:pic>
+      <p:sp>
+        <p:nvSpPr>
+          <p:cNvPr id="9" name="Text 5"/>
+          <p:cNvSpPr/>
+          <p:nvPr/>
+        </p:nvSpPr>
+        <p:spPr>
+          <a:xfrm>
+            <a:off x="841248" y="1545336"/>
+            <a:ext cx="7955280" cy="493776"/>
+          </a:xfrm>
+          <a:prstGeom prst="rect">
+            <a:avLst/>
+          </a:prstGeom>
+          <a:noFill/>
+          <a:ln/>
+        </p:spPr>
+        <p:txBody>
+          <a:bodyPr wrap="square" lIns="0" tIns="0" rIns="0" bIns="0" rtlCol="0" anchor="ctr"/>
+          <a:lstStyle/>
+          <a:p>
+            <a:pPr marL="0" indent="0" algn="l">
+              <a:buNone/>
+            </a:pPr>
+            <a:r>
+              <a:rPr lang="en-US" sz="1250" dirty="0">
+                <a:solidFill>
+                  <a:srgbClr val="CFD8DC"/>
+                </a:solidFill>
+                <a:latin typeface="Calibri" pitchFamily="34" charset="0"/>
+                <a:ea typeface="Calibri" pitchFamily="34" charset="-122"/>
+                <a:cs typeface="Calibri" pitchFamily="34" charset="-120"/>
+              </a:rPr>
+              <a:t>Maîtriser les hooks et le stale state (useEffect, dépendances)</a:t>
+            </a:r>
+            <a:endParaRPr lang="en-US" sz="1250" dirty="0"/>
+          </a:p>
+        </p:txBody>
+      </p:sp>
+      <p:sp>
+        <p:nvSpPr>
+          <p:cNvPr id="10" name="Shape 6"/>
+          <p:cNvSpPr/>
+          <p:nvPr/>
+        </p:nvSpPr>
+        <p:spPr>
+          <a:xfrm>
+            <a:off x="320040" y="2240280"/>
+            <a:ext cx="402336" cy="402336"/>
+          </a:xfrm>
+          <a:prstGeom prst="ellipse">
+            <a:avLst/>
+          </a:prstGeom>
+          <a:solidFill>
+            <a:srgbClr val="1C3A4A"/>
+          </a:solidFill>
+          <a:ln w="12700">
+            <a:solidFill>
+              <a:srgbClr val="00ACC1"/>
+            </a:solidFill>
+            <a:prstDash val="solid"/>
+          </a:ln>
+        </p:spPr>
+        <p:txBody>
+          <a:bodyPr/>
+          <a:lstStyle/>
+          <a:p>
+            <a:endParaRPr lang="fr-FR"/>
+          </a:p>
+        </p:txBody>
+      </p:sp>
+      <p:pic>
+        <p:nvPicPr>
+          <p:cNvPr id="11" name="Image 2" descr="preencoded.png"/>
+          <p:cNvPicPr>
+            <a:picLocks noChangeAspect="1"/>
+          </p:cNvPicPr>
+          <p:nvPr/>
+        </p:nvPicPr>
+        <p:blipFill>
+          <a:blip r:embed="rId5"/>
+          <a:stretch>
+            <a:fillRect/>
+          </a:stretch>
+        </p:blipFill>
+        <p:spPr>
+          <a:xfrm>
+            <a:off x="356616" y="2276856"/>
+            <a:ext cx="329184" cy="329184"/>
+          </a:xfrm>
+          <a:prstGeom prst="rect">
+            <a:avLst/>
+          </a:prstGeom>
+        </p:spPr>
+      </p:pic>
+      <p:sp>
+        <p:nvSpPr>
+          <p:cNvPr id="12" name="Text 7"/>
+          <p:cNvSpPr/>
+          <p:nvPr/>
+        </p:nvSpPr>
+        <p:spPr>
+          <a:xfrm>
+            <a:off x="841248" y="2221992"/>
+            <a:ext cx="7955280" cy="493776"/>
+          </a:xfrm>
+          <a:prstGeom prst="rect">
+            <a:avLst/>
+          </a:prstGeom>
+          <a:noFill/>
+          <a:ln/>
+        </p:spPr>
+        <p:txBody>
+          <a:bodyPr wrap="square" lIns="0" tIns="0" rIns="0" bIns="0" rtlCol="0" anchor="ctr"/>
+          <a:lstStyle/>
+          <a:p>
+            <a:pPr marL="0" indent="0" algn="l">
+              <a:buNone/>
+            </a:pPr>
+            <a:r>
+              <a:rPr lang="en-US" sz="1250" dirty="0">
+                <a:solidFill>
+                  <a:srgbClr val="CFD8DC"/>
+                </a:solidFill>
+                <a:latin typeface="Calibri" pitchFamily="34" charset="0"/>
+                <a:ea typeface="Calibri" pitchFamily="34" charset="-122"/>
+                <a:cs typeface="Calibri" pitchFamily="34" charset="-120"/>
+              </a:rPr>
+              <a:t>Consommer une API tierce avec ses contraintes (rate limiting)</a:t>
+            </a:r>
+            <a:endParaRPr lang="en-US" sz="1250" dirty="0"/>
+          </a:p>
+        </p:txBody>
+      </p:sp>
+      <p:sp>
+        <p:nvSpPr>
+          <p:cNvPr id="13" name="Shape 8"/>
+          <p:cNvSpPr/>
+          <p:nvPr/>
+        </p:nvSpPr>
+        <p:spPr>
+          <a:xfrm>
+            <a:off x="320040" y="2916936"/>
+            <a:ext cx="402336" cy="402336"/>
+          </a:xfrm>
+          <a:prstGeom prst="ellipse">
+            <a:avLst/>
+          </a:prstGeom>
+          <a:solidFill>
+            <a:srgbClr val="1C3A4A"/>
+          </a:solidFill>
+          <a:ln w="12700">
+            <a:solidFill>
+              <a:srgbClr val="00ACC1"/>
+            </a:solidFill>
+            <a:prstDash val="solid"/>
+          </a:ln>
+        </p:spPr>
+        <p:txBody>
+          <a:bodyPr/>
+          <a:lstStyle/>
+          <a:p>
+            <a:endParaRPr lang="fr-FR"/>
+          </a:p>
+        </p:txBody>
+      </p:sp>
+      <p:pic>
+        <p:nvPicPr>
+          <p:cNvPr id="14" name="Image 3" descr="preencoded.png"/>
+          <p:cNvPicPr>
+            <a:picLocks noChangeAspect="1"/>
+          </p:cNvPicPr>
+          <p:nvPr/>
+        </p:nvPicPr>
+        <p:blipFill>
+          <a:blip r:embed="rId6"/>
+          <a:stretch>
+            <a:fillRect/>
+          </a:stretch>
+        </p:blipFill>
+        <p:spPr>
+          <a:xfrm>
+            <a:off x="356616" y="2953512"/>
+            <a:ext cx="329184" cy="329184"/>
+          </a:xfrm>
+          <a:prstGeom prst="rect">
+            <a:avLst/>
+          </a:prstGeom>
+        </p:spPr>
+      </p:pic>
+      <p:sp>
+        <p:nvSpPr>
+          <p:cNvPr id="15" name="Text 9"/>
+          <p:cNvSpPr/>
+          <p:nvPr/>
+        </p:nvSpPr>
+        <p:spPr>
+          <a:xfrm>
+            <a:off x="841248" y="2898648"/>
+            <a:ext cx="7955280" cy="493776"/>
+          </a:xfrm>
+          <a:prstGeom prst="rect">
+            <a:avLst/>
+          </a:prstGeom>
+          <a:noFill/>
+          <a:ln/>
+        </p:spPr>
+        <p:txBody>
+          <a:bodyPr wrap="square" lIns="0" tIns="0" rIns="0" bIns="0" rtlCol="0" anchor="ctr"/>
+          <a:lstStyle/>
+          <a:p>
+            <a:pPr marL="0" indent="0" algn="l">
+              <a:buNone/>
+            </a:pPr>
+            <a:r>
+              <a:rPr lang="en-US" sz="1250" dirty="0">
+                <a:solidFill>
+                  <a:srgbClr val="CFD8DC"/>
+                </a:solidFill>
+                <a:latin typeface="Calibri" pitchFamily="34" charset="0"/>
+                <a:ea typeface="Calibri" pitchFamily="34" charset="-122"/>
+                <a:cs typeface="Calibri" pitchFamily="34" charset="-120"/>
+              </a:rPr>
+              <a:t>Système de thème avec variables CSS — sans librairie</a:t>
+            </a:r>
+            <a:endParaRPr lang="en-US" sz="1250" dirty="0"/>
+          </a:p>
+        </p:txBody>
+      </p:sp>
+      <p:sp>
+        <p:nvSpPr>
+          <p:cNvPr id="16" name="Shape 10"/>
+          <p:cNvSpPr/>
+          <p:nvPr/>
+        </p:nvSpPr>
+        <p:spPr>
+          <a:xfrm>
+            <a:off x="320040" y="3593592"/>
+            <a:ext cx="402336" cy="402336"/>
+          </a:xfrm>
+          <a:prstGeom prst="ellipse">
+            <a:avLst/>
+          </a:prstGeom>
+          <a:solidFill>
+            <a:srgbClr val="1C3A4A"/>
+          </a:solidFill>
+          <a:ln w="12700">
+            <a:solidFill>
+              <a:srgbClr val="00ACC1"/>
+            </a:solidFill>
+            <a:prstDash val="solid"/>
+          </a:ln>
+        </p:spPr>
+        <p:txBody>
+          <a:bodyPr/>
+          <a:lstStyle/>
+          <a:p>
+            <a:endParaRPr lang="fr-FR"/>
+          </a:p>
+        </p:txBody>
+      </p:sp>
+      <p:pic>
+        <p:nvPicPr>
+          <p:cNvPr id="17" name="Image 4" descr="preencoded.png"/>
+          <p:cNvPicPr>
+            <a:picLocks noChangeAspect="1"/>
+          </p:cNvPicPr>
+          <p:nvPr/>
+        </p:nvPicPr>
+        <p:blipFill>
+          <a:blip r:embed="rId7"/>
+          <a:stretch>
+            <a:fillRect/>
+          </a:stretch>
+        </p:blipFill>
+        <p:spPr>
+          <a:xfrm>
+            <a:off x="356616" y="3630168"/>
+            <a:ext cx="329184" cy="329184"/>
+          </a:xfrm>
+          <a:prstGeom prst="rect">
+            <a:avLst/>
+          </a:prstGeom>
+        </p:spPr>
+      </p:pic>
+      <p:sp>
+        <p:nvSpPr>
+          <p:cNvPr id="18" name="Text 11"/>
+          <p:cNvSpPr/>
+          <p:nvPr/>
+        </p:nvSpPr>
+        <p:spPr>
+          <a:xfrm>
+            <a:off x="841248" y="3575304"/>
+            <a:ext cx="7955280" cy="493776"/>
+          </a:xfrm>
+          <a:prstGeom prst="rect">
+            <a:avLst/>
+          </a:prstGeom>
+          <a:noFill/>
+          <a:ln/>
+        </p:spPr>
+        <p:txBody>
+          <a:bodyPr wrap="square" lIns="0" tIns="0" rIns="0" bIns="0" rtlCol="0" anchor="ctr"/>
+          <a:lstStyle/>
+          <a:p>
+            <a:pPr marL="0" indent="0" algn="l">
+              <a:buNone/>
+            </a:pPr>
+            <a:r>
+              <a:rPr lang="en-US" sz="1250" dirty="0">
+                <a:solidFill>
+                  <a:srgbClr val="CFD8DC"/>
+                </a:solidFill>
+                <a:latin typeface="Calibri" pitchFamily="34" charset="0"/>
+                <a:ea typeface="Calibri" pitchFamily="34" charset="-122"/>
+                <a:cs typeface="Calibri" pitchFamily="34" charset="-120"/>
+              </a:rPr>
+              <a:t>i18n maison : clés imbriquées, synchronisation avec l'UI</a:t>
+            </a:r>
+            <a:endParaRPr lang="en-US" sz="1250" dirty="0"/>
+          </a:p>
+        </p:txBody>
+      </p:sp>
+      <p:sp>
+        <p:nvSpPr>
+          <p:cNvPr id="19" name="Shape 12"/>
+          <p:cNvSpPr/>
+          <p:nvPr/>
+        </p:nvSpPr>
+        <p:spPr>
+          <a:xfrm>
+            <a:off x="320040" y="4270248"/>
+            <a:ext cx="402336" cy="402336"/>
+          </a:xfrm>
+          <a:prstGeom prst="ellipse">
+            <a:avLst/>
+          </a:prstGeom>
+          <a:solidFill>
+            <a:srgbClr val="1C3A4A"/>
+          </a:solidFill>
+          <a:ln w="12700">
+            <a:solidFill>
+              <a:srgbClr val="00ACC1"/>
+            </a:solidFill>
+            <a:prstDash val="solid"/>
+          </a:ln>
+        </p:spPr>
+        <p:txBody>
+          <a:bodyPr/>
+          <a:lstStyle/>
+          <a:p>
+            <a:endParaRPr lang="fr-FR"/>
+          </a:p>
+        </p:txBody>
+      </p:sp>
+      <p:pic>
+        <p:nvPicPr>
+          <p:cNvPr id="20" name="Image 5" descr="preencoded.png"/>
+          <p:cNvPicPr>
+            <a:picLocks noChangeAspect="1"/>
+          </p:cNvPicPr>
+          <p:nvPr/>
+        </p:nvPicPr>
+        <p:blipFill>
+          <a:blip r:embed="rId8"/>
+          <a:stretch>
+            <a:fillRect/>
+          </a:stretch>
+        </p:blipFill>
+        <p:spPr>
+          <a:xfrm>
+            <a:off x="356616" y="4306824"/>
+            <a:ext cx="329184" cy="329184"/>
+          </a:xfrm>
+          <a:prstGeom prst="rect">
+            <a:avLst/>
+          </a:prstGeom>
+        </p:spPr>
+      </p:pic>
+      <p:sp>
+        <p:nvSpPr>
+          <p:cNvPr id="21" name="Text 13"/>
+          <p:cNvSpPr/>
+          <p:nvPr/>
+        </p:nvSpPr>
+        <p:spPr>
+          <a:xfrm>
+            <a:off x="841248" y="4251960"/>
+            <a:ext cx="7955280" cy="493776"/>
+          </a:xfrm>
+          <a:prstGeom prst="rect">
+            <a:avLst/>
+          </a:prstGeom>
+          <a:noFill/>
+          <a:ln/>
+        </p:spPr>
+        <p:txBody>
+          <a:bodyPr wrap="square" lIns="0" tIns="0" rIns="0" bIns="0" rtlCol="0" anchor="ctr"/>
+          <a:lstStyle/>
+          <a:p>
+            <a:pPr marL="0" indent="0" algn="l">
+              <a:buNone/>
+            </a:pPr>
+            <a:r>
+              <a:rPr lang="en-US" sz="1250" dirty="0">
+                <a:solidFill>
+                  <a:srgbClr val="CFD8DC"/>
+                </a:solidFill>
+                <a:latin typeface="Calibri" pitchFamily="34" charset="0"/>
+                <a:ea typeface="Calibri" pitchFamily="34" charset="-122"/>
+                <a:cs typeface="Calibri" pitchFamily="34" charset="-120"/>
+              </a:rPr>
+              <a:t>Gamepad API — polling via requestAnimationFrame, cooldown</a:t>
+            </a:r>
+            <a:endParaRPr lang="en-US" sz="1250" dirty="0"/>
+          </a:p>
+        </p:txBody>
+      </p:sp>
+    </p:spTree>
+  </p:cSld>
+  <p:clrMapOvr>
+    <a:masterClrMapping/>
+  </p:clrMapOvr>
+</p:sld>
+</file>
+
+<file path=ppt/slides/slide9.xml><?xml version="1.0" encoding="utf-8"?>
+<p:sld xmlns:a="http://schemas.openxmlformats.org/drawingml/2006/main" xmlns:r="http://schemas.openxmlformats.org/officeDocument/2006/relationships" xmlns:p="http://schemas.openxmlformats.org/presentationml/2006/main">
+  <p:cSld name="Slide 8">
+    <p:bg>
+      <p:bgPr>
+        <a:solidFill>
+          <a:srgbClr val="1A237E"/>
+        </a:solidFill>
+        <a:effectLst/>
+      </p:bgPr>
+    </p:bg>
+    <p:spTree>
+      <p:nvGrpSpPr>
+        <p:cNvPr id="1" name=""/>
+        <p:cNvGrpSpPr/>
+        <p:nvPr/>
+      </p:nvGrpSpPr>
+      <p:grpSpPr>
+        <a:xfrm>
+          <a:off x="0" y="0"/>
+          <a:ext cx="0" cy="0"/>
+          <a:chOff x="0" y="0"/>
+          <a:chExt cx="0" cy="0"/>
+        </a:xfrm>
+      </p:grpSpPr>
+      <p:sp>
+        <p:nvSpPr>
+          <p:cNvPr id="2" name="Shape 0"/>
+          <p:cNvSpPr/>
+          <p:nvPr/>
+        </p:nvSpPr>
+        <p:spPr>
+          <a:xfrm>
             <a:off x="-1371600" y="2743200"/>
             <a:ext cx="4114800" cy="4114800"/>
           </a:xfrm>
@@ -7232,6 +7339,13 @@
             <a:prstDash val="solid"/>
           </a:ln>
         </p:spPr>
+        <p:txBody>
+          <a:bodyPr/>
+          <a:lstStyle/>
+          <a:p>
+            <a:endParaRPr lang="fr-FR"/>
+          </a:p>
+        </p:txBody>
       </p:sp>
       <p:sp>
         <p:nvSpPr>
@@ -7259,6 +7373,13 @@
             <a:prstDash val="solid"/>
           </a:ln>
         </p:spPr>
+        <p:txBody>
+          <a:bodyPr/>
+          <a:lstStyle/>
+          <a:p>
+            <a:endParaRPr lang="fr-FR"/>
+          </a:p>
+        </p:txBody>
       </p:sp>
       <p:sp>
         <p:nvSpPr>
@@ -7281,7 +7402,7 @@
           <a:bodyPr wrap="square" lIns="0" tIns="0" rIns="0" bIns="0" rtlCol="0" anchor="ctr"/>
           <a:lstStyle/>
           <a:p>
-            <a:pPr algn="l" indent="0" marL="0">
+            <a:pPr marL="0" indent="0" algn="l">
               <a:buNone/>
             </a:pPr>
             <a:r>
@@ -7325,6 +7446,13 @@
             <a:prstDash val="solid"/>
           </a:ln>
         </p:spPr>
+        <p:txBody>
+          <a:bodyPr/>
+          <a:lstStyle/>
+          <a:p>
+            <a:endParaRPr lang="fr-FR"/>
+          </a:p>
+        </p:txBody>
       </p:sp>
       <p:sp>
         <p:nvSpPr>
@@ -7347,7 +7475,7 @@
           <a:bodyPr wrap="square" lIns="0" tIns="0" rIns="0" bIns="0" rtlCol="0" anchor="ctr"/>
           <a:lstStyle/>
           <a:p>
-            <a:pPr indent="0" marL="0">
+            <a:pPr marL="0" indent="0">
               <a:buNone/>
             </a:pPr>
             <a:r>
@@ -7386,7 +7514,7 @@
           <a:bodyPr wrap="square" lIns="0" tIns="0" rIns="0" bIns="0" rtlCol="0" anchor="ctr"/>
           <a:lstStyle/>
           <a:p>
-            <a:pPr algn="r" indent="0" marL="0">
+            <a:pPr marL="0" indent="0" algn="r">
               <a:buNone/>
             </a:pPr>
             <a:r>
@@ -7430,6 +7558,13 @@
             <a:prstDash val="solid"/>
           </a:ln>
         </p:spPr>
+        <p:txBody>
+          <a:bodyPr/>
+          <a:lstStyle/>
+          <a:p>
+            <a:endParaRPr lang="fr-FR"/>
+          </a:p>
+        </p:txBody>
       </p:sp>
       <p:sp>
         <p:nvSpPr>
@@ -7452,7 +7587,7 @@
           <a:bodyPr wrap="square" lIns="0" tIns="0" rIns="0" bIns="0" rtlCol="0" anchor="ctr"/>
           <a:lstStyle/>
           <a:p>
-            <a:pPr indent="0" marL="0">
+            <a:pPr marL="0" indent="0">
               <a:buNone/>
             </a:pPr>
             <a:r>
@@ -7491,7 +7626,7 @@
           <a:bodyPr wrap="square" lIns="0" tIns="0" rIns="0" bIns="0" rtlCol="0" anchor="ctr"/>
           <a:lstStyle/>
           <a:p>
-            <a:pPr algn="r" indent="0" marL="0">
+            <a:pPr marL="0" indent="0" algn="r">
               <a:buNone/>
             </a:pPr>
             <a:r>
@@ -7535,6 +7670,13 @@
             <a:prstDash val="solid"/>
           </a:ln>
         </p:spPr>
+        <p:txBody>
+          <a:bodyPr/>
+          <a:lstStyle/>
+          <a:p>
+            <a:endParaRPr lang="fr-FR"/>
+          </a:p>
+        </p:txBody>
       </p:sp>
       <p:sp>
         <p:nvSpPr>
@@ -7557,7 +7699,7 @@
           <a:bodyPr wrap="square" lIns="0" tIns="0" rIns="0" bIns="0" rtlCol="0" anchor="ctr"/>
           <a:lstStyle/>
           <a:p>
-            <a:pPr indent="0" marL="0">
+            <a:pPr marL="0" indent="0">
               <a:buNone/>
             </a:pPr>
             <a:r>
@@ -7596,7 +7738,7 @@
           <a:bodyPr wrap="square" lIns="0" tIns="0" rIns="0" bIns="0" rtlCol="0" anchor="ctr"/>
           <a:lstStyle/>
           <a:p>
-            <a:pPr algn="r" indent="0" marL="0">
+            <a:pPr marL="0" indent="0" algn="r">
               <a:buNone/>
             </a:pPr>
             <a:r>
@@ -7635,7 +7777,7 @@
           <a:bodyPr wrap="square" lIns="0" tIns="0" rIns="0" bIns="0" rtlCol="0" anchor="ctr"/>
           <a:lstStyle/>
           <a:p>
-            <a:pPr algn="ctr" indent="0" marL="0">
+            <a:pPr marL="0" indent="0" algn="ctr">
               <a:buNone/>
             </a:pPr>
             <a:r>
@@ -7954,4 +8096,319 @@
     </a:ext>
   </a:extLst>
 </a:theme>
+</file>
+
+<file path=ppt/theme/theme2.xml><?xml version="1.0" encoding="utf-8"?>
+<a:theme xmlns:a="http://schemas.openxmlformats.org/drawingml/2006/main" name="Thème Office">
+  <a:themeElements>
+    <a:clrScheme name="Office">
+      <a:dk1>
+        <a:sysClr val="windowText" lastClr="000000"/>
+      </a:dk1>
+      <a:lt1>
+        <a:sysClr val="window" lastClr="FFFFFF"/>
+      </a:lt1>
+      <a:dk2>
+        <a:srgbClr val="0E2841"/>
+      </a:dk2>
+      <a:lt2>
+        <a:srgbClr val="E8E8E8"/>
+      </a:lt2>
+      <a:accent1>
+        <a:srgbClr val="156082"/>
+      </a:accent1>
+      <a:accent2>
+        <a:srgbClr val="E97132"/>
+      </a:accent2>
+      <a:accent3>
+        <a:srgbClr val="196B24"/>
+      </a:accent3>
+      <a:accent4>
+        <a:srgbClr val="0F9ED5"/>
+      </a:accent4>
+      <a:accent5>
+        <a:srgbClr val="A02B93"/>
+      </a:accent5>
+      <a:accent6>
+        <a:srgbClr val="4EA72E"/>
+      </a:accent6>
+      <a:hlink>
+        <a:srgbClr val="467886"/>
+      </a:hlink>
+      <a:folHlink>
+        <a:srgbClr val="96607D"/>
+      </a:folHlink>
+    </a:clrScheme>
+    <a:fontScheme name="Office">
+      <a:majorFont>
+        <a:latin typeface="Aptos Display" panose="02110004020202020204"/>
+        <a:ea typeface=""/>
+        <a:cs typeface=""/>
+        <a:font script="Jpan" typeface="游ゴシック Light"/>
+        <a:font script="Hang" typeface="맑은 고딕"/>
+        <a:font script="Hans" typeface="等线 Light"/>
+        <a:font script="Hant" typeface="新細明體"/>
+        <a:font script="Arab" typeface="Times New Roman"/>
+        <a:font script="Hebr" typeface="Times New Roman"/>
+        <a:font script="Thai" typeface="Angsana New"/>
+        <a:font script="Ethi" typeface="Nyala"/>
+        <a:font script="Beng" typeface="Vrinda"/>
+        <a:font script="Gujr" typeface="Shruti"/>
+        <a:font script="Khmr" typeface="MoolBoran"/>
+        <a:font script="Knda" typeface="Tunga"/>
+        <a:font script="Guru" typeface="Raavi"/>
+        <a:font script="Cans" typeface="Euphemia"/>
+        <a:font script="Cher" typeface="Plantagenet Cherokee"/>
+        <a:font script="Yiii" typeface="Microsoft Yi Baiti"/>
+        <a:font script="Tibt" typeface="Microsoft Himalaya"/>
+        <a:font script="Thaa" typeface="MV Boli"/>
+        <a:font script="Deva" typeface="Mangal"/>
+        <a:font script="Telu" typeface="Gautami"/>
+        <a:font script="Taml" typeface="Latha"/>
+        <a:font script="Syrc" typeface="Estrangelo Edessa"/>
+        <a:font script="Orya" typeface="Kalinga"/>
+        <a:font script="Mlym" typeface="Kartika"/>
+        <a:font script="Laoo" typeface="DokChampa"/>
+        <a:font script="Sinh" typeface="Iskoola Pota"/>
+        <a:font script="Mong" typeface="Mongolian Baiti"/>
+        <a:font script="Viet" typeface="Times New Roman"/>
+        <a:font script="Uigh" typeface="Microsoft Uighur"/>
+        <a:font script="Geor" typeface="Sylfaen"/>
+        <a:font script="Armn" typeface="Arial"/>
+        <a:font script="Bugi" typeface="Leelawadee UI"/>
+        <a:font script="Bopo" typeface="Microsoft JhengHei"/>
+        <a:font script="Java" typeface="Javanese Text"/>
+        <a:font script="Lisu" typeface="Segoe UI"/>
+        <a:font script="Mymr" typeface="Myanmar Text"/>
+        <a:font script="Nkoo" typeface="Ebrima"/>
+        <a:font script="Olck" typeface="Nirmala UI"/>
+        <a:font script="Osma" typeface="Ebrima"/>
+        <a:font script="Phag" typeface="Phagspa"/>
+        <a:font script="Syrn" typeface="Estrangelo Edessa"/>
+        <a:font script="Syrj" typeface="Estrangelo Edessa"/>
+        <a:font script="Syre" typeface="Estrangelo Edessa"/>
+        <a:font script="Sora" typeface="Nirmala UI"/>
+        <a:font script="Tale" typeface="Microsoft Tai Le"/>
+        <a:font script="Talu" typeface="Microsoft New Tai Lue"/>
+        <a:font script="Tfng" typeface="Ebrima"/>
+      </a:majorFont>
+      <a:minorFont>
+        <a:latin typeface="Aptos" panose="02110004020202020204"/>
+        <a:ea typeface=""/>
+        <a:cs typeface=""/>
+        <a:font script="Jpan" typeface="游ゴシック"/>
+        <a:font script="Hang" typeface="맑은 고딕"/>
+        <a:font script="Hans" typeface="等线"/>
+        <a:font script="Hant" typeface="新細明體"/>
+        <a:font script="Arab" typeface="Arial"/>
+        <a:font script="Hebr" typeface="Arial"/>
+        <a:font script="Thai" typeface="Cordia New"/>
+        <a:font script="Ethi" typeface="Nyala"/>
+        <a:font script="Beng" typeface="Vrinda"/>
+        <a:font script="Gujr" typeface="Shruti"/>
+        <a:font script="Khmr" typeface="DaunPenh"/>
+        <a:font script="Knda" typeface="Tunga"/>
+        <a:font script="Guru" typeface="Raavi"/>
+        <a:font script="Cans" typeface="Euphemia"/>
+        <a:font script="Cher" typeface="Plantagenet Cherokee"/>
+        <a:font script="Yiii" typeface="Microsoft Yi Baiti"/>
+        <a:font script="Tibt" typeface="Microsoft Himalaya"/>
+        <a:font script="Thaa" typeface="MV Boli"/>
+        <a:font script="Deva" typeface="Mangal"/>
+        <a:font script="Telu" typeface="Gautami"/>
+        <a:font script="Taml" typeface="Latha"/>
+        <a:font script="Syrc" typeface="Estrangelo Edessa"/>
+        <a:font script="Orya" typeface="Kalinga"/>
+        <a:font script="Mlym" typeface="Kartika"/>
+        <a:font script="Laoo" typeface="DokChampa"/>
+        <a:font script="Sinh" typeface="Iskoola Pota"/>
+        <a:font script="Mong" typeface="Mongolian Baiti"/>
+        <a:font script="Viet" typeface="Arial"/>
+        <a:font script="Uigh" typeface="Microsoft Uighur"/>
+        <a:font script="Geor" typeface="Sylfaen"/>
+        <a:font script="Armn" typeface="Arial"/>
+        <a:font script="Bugi" typeface="Leelawadee UI"/>
+        <a:font script="Bopo" typeface="Microsoft JhengHei"/>
+        <a:font script="Java" typeface="Javanese Text"/>
+        <a:font script="Lisu" typeface="Segoe UI"/>
+        <a:font script="Mymr" typeface="Myanmar Text"/>
+        <a:font script="Nkoo" typeface="Ebrima"/>
+        <a:font script="Olck" typeface="Nirmala UI"/>
+        <a:font script="Osma" typeface="Ebrima"/>
+        <a:font script="Phag" typeface="Phagspa"/>
+        <a:font script="Syrn" typeface="Estrangelo Edessa"/>
+        <a:font script="Syrj" typeface="Estrangelo Edessa"/>
+        <a:font script="Syre" typeface="Estrangelo Edessa"/>
+        <a:font script="Sora" typeface="Nirmala UI"/>
+        <a:font script="Tale" typeface="Microsoft Tai Le"/>
+        <a:font script="Talu" typeface="Microsoft New Tai Lue"/>
+        <a:font script="Tfng" typeface="Ebrima"/>
+      </a:minorFont>
+    </a:fontScheme>
+    <a:fmtScheme name="Office">
+      <a:fillStyleLst>
+        <a:solidFill>
+          <a:schemeClr val="phClr"/>
+        </a:solidFill>
+        <a:gradFill rotWithShape="1">
+          <a:gsLst>
+            <a:gs pos="0">
+              <a:schemeClr val="phClr">
+                <a:lumMod val="110000"/>
+                <a:satMod val="105000"/>
+                <a:tint val="67000"/>
+              </a:schemeClr>
+            </a:gs>
+            <a:gs pos="50000">
+              <a:schemeClr val="phClr">
+                <a:lumMod val="105000"/>
+                <a:satMod val="103000"/>
+                <a:tint val="73000"/>
+              </a:schemeClr>
+            </a:gs>
+            <a:gs pos="100000">
+              <a:schemeClr val="phClr">
+                <a:lumMod val="105000"/>
+                <a:satMod val="109000"/>
+                <a:tint val="81000"/>
+              </a:schemeClr>
+            </a:gs>
+          </a:gsLst>
+          <a:lin ang="5400000" scaled="0"/>
+        </a:gradFill>
+        <a:gradFill rotWithShape="1">
+          <a:gsLst>
+            <a:gs pos="0">
+              <a:schemeClr val="phClr">
+                <a:satMod val="103000"/>
+                <a:lumMod val="102000"/>
+                <a:tint val="94000"/>
+              </a:schemeClr>
+            </a:gs>
+            <a:gs pos="50000">
+              <a:schemeClr val="phClr">
+                <a:satMod val="110000"/>
+                <a:lumMod val="100000"/>
+                <a:shade val="100000"/>
+              </a:schemeClr>
+            </a:gs>
+            <a:gs pos="100000">
+              <a:schemeClr val="phClr">
+                <a:lumMod val="99000"/>
+                <a:satMod val="120000"/>
+                <a:shade val="78000"/>
+              </a:schemeClr>
+            </a:gs>
+          </a:gsLst>
+          <a:lin ang="5400000" scaled="0"/>
+        </a:gradFill>
+      </a:fillStyleLst>
+      <a:lnStyleLst>
+        <a:ln w="12700" cap="flat" cmpd="sng" algn="ctr">
+          <a:solidFill>
+            <a:schemeClr val="phClr"/>
+          </a:solidFill>
+          <a:prstDash val="solid"/>
+          <a:miter lim="800000"/>
+        </a:ln>
+        <a:ln w="19050" cap="flat" cmpd="sng" algn="ctr">
+          <a:solidFill>
+            <a:schemeClr val="phClr"/>
+          </a:solidFill>
+          <a:prstDash val="solid"/>
+          <a:miter lim="800000"/>
+        </a:ln>
+        <a:ln w="25400" cap="flat" cmpd="sng" algn="ctr">
+          <a:solidFill>
+            <a:schemeClr val="phClr"/>
+          </a:solidFill>
+          <a:prstDash val="solid"/>
+          <a:miter lim="800000"/>
+        </a:ln>
+      </a:lnStyleLst>
+      <a:effectStyleLst>
+        <a:effectStyle>
+          <a:effectLst/>
+        </a:effectStyle>
+        <a:effectStyle>
+          <a:effectLst/>
+        </a:effectStyle>
+        <a:effectStyle>
+          <a:effectLst>
+            <a:outerShdw blurRad="57150" dist="19050" dir="5400000" algn="ctr" rotWithShape="0">
+              <a:srgbClr val="000000">
+                <a:alpha val="63000"/>
+              </a:srgbClr>
+            </a:outerShdw>
+          </a:effectLst>
+        </a:effectStyle>
+      </a:effectStyleLst>
+      <a:bgFillStyleLst>
+        <a:solidFill>
+          <a:schemeClr val="phClr"/>
+        </a:solidFill>
+        <a:solidFill>
+          <a:schemeClr val="phClr">
+            <a:tint val="95000"/>
+            <a:satMod val="170000"/>
+          </a:schemeClr>
+        </a:solidFill>
+        <a:gradFill rotWithShape="1">
+          <a:gsLst>
+            <a:gs pos="0">
+              <a:schemeClr val="phClr">
+                <a:tint val="93000"/>
+                <a:satMod val="150000"/>
+                <a:shade val="98000"/>
+                <a:lumMod val="102000"/>
+              </a:schemeClr>
+            </a:gs>
+            <a:gs pos="50000">
+              <a:schemeClr val="phClr">
+                <a:tint val="98000"/>
+                <a:satMod val="130000"/>
+                <a:shade val="90000"/>
+                <a:lumMod val="103000"/>
+              </a:schemeClr>
+            </a:gs>
+            <a:gs pos="100000">
+              <a:schemeClr val="phClr">
+                <a:shade val="63000"/>
+                <a:satMod val="120000"/>
+              </a:schemeClr>
+            </a:gs>
+          </a:gsLst>
+          <a:lin ang="5400000" scaled="0"/>
+        </a:gradFill>
+      </a:bgFillStyleLst>
+    </a:fmtScheme>
+  </a:themeElements>
+  <a:objectDefaults>
+    <a:lnDef>
+      <a:spPr/>
+      <a:bodyPr/>
+      <a:lstStyle/>
+      <a:style>
+        <a:lnRef idx="2">
+          <a:schemeClr val="accent1"/>
+        </a:lnRef>
+        <a:fillRef idx="0">
+          <a:schemeClr val="accent1"/>
+        </a:fillRef>
+        <a:effectRef idx="1">
+          <a:schemeClr val="accent1"/>
+        </a:effectRef>
+        <a:fontRef idx="minor">
+          <a:schemeClr val="tx1"/>
+        </a:fontRef>
+      </a:style>
+    </a:lnDef>
+  </a:objectDefaults>
+  <a:extraClrSchemeLst/>
+  <a:extLst>
+    <a:ext uri="{05A4C25C-085E-4340-85A3-A5531E510DB2}">
+      <thm15:themeFamily xmlns:thm15="http://schemas.microsoft.com/office/thememl/2012/main" name="Office Theme" id="{2E142A2C-CD16-42D6-873A-C26D2A0506FA}" vid="{1BDDFF52-6CD6-40A5-AB3C-68EB2F1E4D0A}"/>
+    </a:ext>
+  </a:extLst>
+</a:theme>
 </file>